--- a/pictures/Deck-en/Deck-en.pptx
+++ b/pictures/Deck-en/Deck-en.pptx
@@ -203,7 +203,7 @@
           <a:p>
             <a:fld id="{263B0988-6DB9-4E3D-B7FD-EFF3BCABE954}" type="datetimeFigureOut">
               <a:rPr lang="fr-FR" smtClean="0"/>
-              <a:t>16/04/2026</a:t>
+              <a:t>17/04/2026</a:t>
             </a:fld>
             <a:endParaRPr lang="fr-FR"/>
           </a:p>
@@ -554,6 +554,90 @@
 </p:notes>
 </file>
 
+<file path=ppt/notesSlides/notesSlide2.xml><?xml version="1.0" encoding="utf-8"?>
+<p:notes xmlns:a="http://schemas.openxmlformats.org/drawingml/2006/main" xmlns:r="http://schemas.openxmlformats.org/officeDocument/2006/relationships" xmlns:p="http://schemas.openxmlformats.org/presentationml/2006/main">
+  <p:cSld>
+    <p:spTree>
+      <p:nvGrpSpPr>
+        <p:cNvPr id="1" name=""/>
+        <p:cNvGrpSpPr/>
+        <p:nvPr/>
+      </p:nvGrpSpPr>
+      <p:grpSpPr>
+        <a:xfrm>
+          <a:off x="0" y="0"/>
+          <a:ext cx="0" cy="0"/>
+          <a:chOff x="0" y="0"/>
+          <a:chExt cx="0" cy="0"/>
+        </a:xfrm>
+      </p:grpSpPr>
+      <p:sp>
+        <p:nvSpPr>
+          <p:cNvPr id="2" name="Espace réservé de l'image des diapositives 1"/>
+          <p:cNvSpPr>
+            <a:spLocks noGrp="1" noRot="1" noChangeAspect="1"/>
+          </p:cNvSpPr>
+          <p:nvPr>
+            <p:ph type="sldImg"/>
+          </p:nvPr>
+        </p:nvSpPr>
+        <p:spPr/>
+      </p:sp>
+      <p:sp>
+        <p:nvSpPr>
+          <p:cNvPr id="3" name="Espace réservé des notes 2"/>
+          <p:cNvSpPr>
+            <a:spLocks noGrp="1"/>
+          </p:cNvSpPr>
+          <p:nvPr>
+            <p:ph type="body" idx="1"/>
+          </p:nvPr>
+        </p:nvSpPr>
+        <p:spPr/>
+        <p:txBody>
+          <a:bodyPr/>
+          <a:lstStyle/>
+          <a:p>
+            <a:endParaRPr lang="fr-FR" dirty="0"/>
+          </a:p>
+        </p:txBody>
+      </p:sp>
+      <p:sp>
+        <p:nvSpPr>
+          <p:cNvPr id="4" name="Espace réservé du numéro de diapositive 3"/>
+          <p:cNvSpPr>
+            <a:spLocks noGrp="1"/>
+          </p:cNvSpPr>
+          <p:nvPr>
+            <p:ph type="sldNum" sz="quarter" idx="5"/>
+          </p:nvPr>
+        </p:nvSpPr>
+        <p:spPr/>
+        <p:txBody>
+          <a:bodyPr/>
+          <a:lstStyle/>
+          <a:p>
+            <a:fld id="{D3B0DD9D-2173-49B3-B084-704F33D21705}" type="slidenum">
+              <a:rPr lang="fr-FR" smtClean="0"/>
+              <a:t>4</a:t>
+            </a:fld>
+            <a:endParaRPr lang="fr-FR"/>
+          </a:p>
+        </p:txBody>
+      </p:sp>
+    </p:spTree>
+    <p:extLst>
+      <p:ext uri="{BB962C8B-B14F-4D97-AF65-F5344CB8AC3E}">
+        <p14:creationId xmlns:p14="http://schemas.microsoft.com/office/powerpoint/2010/main" val="1900118895"/>
+      </p:ext>
+    </p:extLst>
+  </p:cSld>
+  <p:clrMapOvr>
+    <a:masterClrMapping/>
+  </p:clrMapOvr>
+</p:notes>
+</file>
+
 <file path=ppt/slideLayouts/slideLayout1.xml><?xml version="1.0" encoding="utf-8"?>
 <p:sldLayout xmlns:a="http://schemas.openxmlformats.org/drawingml/2006/main" xmlns:r="http://schemas.openxmlformats.org/officeDocument/2006/relationships" xmlns:p="http://schemas.openxmlformats.org/presentationml/2006/main" type="title" preserve="1">
   <p:cSld name="Diapositive de titre">
@@ -701,7 +785,7 @@
           <a:p>
             <a:fld id="{588505E2-0C4C-443F-8F57-41958F504CA2}" type="datetimeFigureOut">
               <a:rPr lang="fr-FR" smtClean="0"/>
-              <a:t>16/04/2026</a:t>
+              <a:t>17/04/2026</a:t>
             </a:fld>
             <a:endParaRPr lang="fr-FR"/>
           </a:p>
@@ -899,7 +983,7 @@
           <a:p>
             <a:fld id="{588505E2-0C4C-443F-8F57-41958F504CA2}" type="datetimeFigureOut">
               <a:rPr lang="fr-FR" smtClean="0"/>
-              <a:t>16/04/2026</a:t>
+              <a:t>17/04/2026</a:t>
             </a:fld>
             <a:endParaRPr lang="fr-FR"/>
           </a:p>
@@ -1107,7 +1191,7 @@
           <a:p>
             <a:fld id="{588505E2-0C4C-443F-8F57-41958F504CA2}" type="datetimeFigureOut">
               <a:rPr lang="fr-FR" smtClean="0"/>
-              <a:t>16/04/2026</a:t>
+              <a:t>17/04/2026</a:t>
             </a:fld>
             <a:endParaRPr lang="fr-FR"/>
           </a:p>
@@ -1305,7 +1389,7 @@
           <a:p>
             <a:fld id="{588505E2-0C4C-443F-8F57-41958F504CA2}" type="datetimeFigureOut">
               <a:rPr lang="fr-FR" smtClean="0"/>
-              <a:t>16/04/2026</a:t>
+              <a:t>17/04/2026</a:t>
             </a:fld>
             <a:endParaRPr lang="fr-FR"/>
           </a:p>
@@ -1580,7 +1664,7 @@
           <a:p>
             <a:fld id="{588505E2-0C4C-443F-8F57-41958F504CA2}" type="datetimeFigureOut">
               <a:rPr lang="fr-FR" smtClean="0"/>
-              <a:t>16/04/2026</a:t>
+              <a:t>17/04/2026</a:t>
             </a:fld>
             <a:endParaRPr lang="fr-FR"/>
           </a:p>
@@ -1845,7 +1929,7 @@
           <a:p>
             <a:fld id="{588505E2-0C4C-443F-8F57-41958F504CA2}" type="datetimeFigureOut">
               <a:rPr lang="fr-FR" smtClean="0"/>
-              <a:t>16/04/2026</a:t>
+              <a:t>17/04/2026</a:t>
             </a:fld>
             <a:endParaRPr lang="fr-FR"/>
           </a:p>
@@ -2257,7 +2341,7 @@
           <a:p>
             <a:fld id="{588505E2-0C4C-443F-8F57-41958F504CA2}" type="datetimeFigureOut">
               <a:rPr lang="fr-FR" smtClean="0"/>
-              <a:t>16/04/2026</a:t>
+              <a:t>17/04/2026</a:t>
             </a:fld>
             <a:endParaRPr lang="fr-FR"/>
           </a:p>
@@ -2398,7 +2482,7 @@
           <a:p>
             <a:fld id="{588505E2-0C4C-443F-8F57-41958F504CA2}" type="datetimeFigureOut">
               <a:rPr lang="fr-FR" smtClean="0"/>
-              <a:t>16/04/2026</a:t>
+              <a:t>17/04/2026</a:t>
             </a:fld>
             <a:endParaRPr lang="fr-FR"/>
           </a:p>
@@ -2511,7 +2595,7 @@
           <a:p>
             <a:fld id="{588505E2-0C4C-443F-8F57-41958F504CA2}" type="datetimeFigureOut">
               <a:rPr lang="fr-FR" smtClean="0"/>
-              <a:t>16/04/2026</a:t>
+              <a:t>17/04/2026</a:t>
             </a:fld>
             <a:endParaRPr lang="fr-FR"/>
           </a:p>
@@ -2822,7 +2906,7 @@
           <a:p>
             <a:fld id="{588505E2-0C4C-443F-8F57-41958F504CA2}" type="datetimeFigureOut">
               <a:rPr lang="fr-FR" smtClean="0"/>
-              <a:t>16/04/2026</a:t>
+              <a:t>17/04/2026</a:t>
             </a:fld>
             <a:endParaRPr lang="fr-FR"/>
           </a:p>
@@ -3110,7 +3194,7 @@
           <a:p>
             <a:fld id="{588505E2-0C4C-443F-8F57-41958F504CA2}" type="datetimeFigureOut">
               <a:rPr lang="fr-FR" smtClean="0"/>
-              <a:t>16/04/2026</a:t>
+              <a:t>17/04/2026</a:t>
             </a:fld>
             <a:endParaRPr lang="fr-FR"/>
           </a:p>
@@ -3351,7 +3435,7 @@
           <a:p>
             <a:fld id="{588505E2-0C4C-443F-8F57-41958F504CA2}" type="datetimeFigureOut">
               <a:rPr lang="fr-FR" smtClean="0"/>
-              <a:t>16/04/2026</a:t>
+              <a:t>17/04/2026</a:t>
             </a:fld>
             <a:endParaRPr lang="fr-FR"/>
           </a:p>
@@ -4364,10 +4448,10 @@
       </p:grpSpPr>
       <p:grpSp>
         <p:nvGrpSpPr>
-          <p:cNvPr id="12" name="Groupe 11">
+          <p:cNvPr id="2" name="Groupe 1">
             <a:extLst>
               <a:ext uri="{FF2B5EF4-FFF2-40B4-BE49-F238E27FC236}">
-                <a16:creationId xmlns:a16="http://schemas.microsoft.com/office/drawing/2014/main" id="{8750ED07-E860-B188-9520-BF4EC262CCE3}"/>
+                <a16:creationId xmlns:a16="http://schemas.microsoft.com/office/drawing/2014/main" id="{8A31D2A7-0931-C6F5-43C9-4C7E7CA75397}"/>
               </a:ext>
             </a:extLst>
           </p:cNvPr>
@@ -4376,9 +4460,9 @@
         </p:nvGrpSpPr>
         <p:grpSpPr>
           <a:xfrm>
-            <a:off x="1546939" y="962184"/>
+            <a:off x="1662234" y="846176"/>
             <a:ext cx="2124000" cy="3312000"/>
-            <a:chOff x="1546939" y="962184"/>
+            <a:chOff x="1662234" y="846176"/>
             <a:chExt cx="2124000" cy="3312000"/>
           </a:xfrm>
         </p:grpSpPr>
@@ -4396,7 +4480,7 @@
           </p:nvSpPr>
           <p:spPr>
             <a:xfrm>
-              <a:off x="1546939" y="962184"/>
+              <a:off x="1662234" y="846176"/>
               <a:ext cx="2124000" cy="3312000"/>
             </a:xfrm>
             <a:prstGeom prst="rect">
@@ -4449,7 +4533,7 @@
           </p:nvSpPr>
           <p:spPr>
             <a:xfrm>
-              <a:off x="1978939" y="962184"/>
+              <a:off x="2094234" y="846176"/>
               <a:ext cx="1260000" cy="432000"/>
             </a:xfrm>
             <a:prstGeom prst="rect">
@@ -4520,7 +4604,7 @@
           </p:nvSpPr>
           <p:spPr>
             <a:xfrm>
-              <a:off x="1635025" y="3803579"/>
+              <a:off x="1750320" y="3687571"/>
               <a:ext cx="360000" cy="360000"/>
             </a:xfrm>
             <a:prstGeom prst="donut">
@@ -4582,7 +4666,7 @@
           </p:nvSpPr>
           <p:spPr>
             <a:xfrm rot="5400000">
-              <a:off x="3016044" y="3229983"/>
+              <a:off x="3131339" y="3113975"/>
               <a:ext cx="396000" cy="360000"/>
             </a:xfrm>
             <a:prstGeom prst="hexagon">
@@ -4649,7 +4733,7 @@
           </p:nvSpPr>
           <p:spPr>
             <a:xfrm rot="5400000">
-              <a:off x="2606769" y="3229983"/>
+              <a:off x="2722064" y="3113975"/>
               <a:ext cx="396000" cy="360000"/>
             </a:xfrm>
             <a:prstGeom prst="hexagon">
@@ -4716,7 +4800,7 @@
           </p:nvSpPr>
           <p:spPr>
             <a:xfrm rot="5400000">
-              <a:off x="2197494" y="3239916"/>
+              <a:off x="2312789" y="3123908"/>
               <a:ext cx="396000" cy="360000"/>
             </a:xfrm>
             <a:prstGeom prst="hexagon">
@@ -4783,7 +4867,7 @@
           </p:nvSpPr>
           <p:spPr>
             <a:xfrm rot="5400000">
-              <a:off x="1783991" y="3239916"/>
+              <a:off x="1899286" y="3123908"/>
               <a:ext cx="396000" cy="360000"/>
             </a:xfrm>
             <a:prstGeom prst="hexagon">
@@ -4837,8 +4921,8 @@
           </p:nvSpPr>
           <p:spPr>
             <a:xfrm>
-              <a:off x="1606914" y="1488710"/>
-              <a:ext cx="2007000" cy="461665"/>
+              <a:off x="1835831" y="1390705"/>
+              <a:ext cx="1787130" cy="369332"/>
             </a:xfrm>
             <a:prstGeom prst="rect">
               <a:avLst/>
@@ -4846,7 +4930,7 @@
             <a:noFill/>
           </p:spPr>
           <p:txBody>
-            <a:bodyPr wrap="square" rtlCol="0">
+            <a:bodyPr wrap="square" lIns="0" tIns="0" rIns="0" bIns="0" rtlCol="0">
               <a:spAutoFit/>
             </a:bodyPr>
             <a:lstStyle/>
@@ -4906,7 +4990,7 @@
           </p:blipFill>
           <p:spPr>
             <a:xfrm>
-              <a:off x="1635025" y="2008763"/>
+              <a:off x="1787034" y="1845483"/>
               <a:ext cx="1133030" cy="981962"/>
             </a:xfrm>
             <a:prstGeom prst="rect">
@@ -4928,8 +5012,8 @@
           </p:nvSpPr>
           <p:spPr>
             <a:xfrm>
-              <a:off x="2718223" y="2010094"/>
-              <a:ext cx="928114" cy="830997"/>
+              <a:off x="3010819" y="1872568"/>
+              <a:ext cx="705079" cy="738664"/>
             </a:xfrm>
             <a:prstGeom prst="rect">
               <a:avLst/>
@@ -4937,7 +5021,7 @@
             <a:noFill/>
           </p:spPr>
           <p:txBody>
-            <a:bodyPr wrap="square" rtlCol="0">
+            <a:bodyPr wrap="square" lIns="0" tIns="0" rIns="0" bIns="0" rtlCol="0">
               <a:spAutoFit/>
             </a:bodyPr>
             <a:lstStyle/>
@@ -4975,7 +5059,7 @@
           </p:nvSpPr>
           <p:spPr>
             <a:xfrm>
-              <a:off x="1943935" y="3138287"/>
+              <a:off x="2059230" y="3022279"/>
               <a:ext cx="1324503" cy="284795"/>
             </a:xfrm>
             <a:custGeom>
@@ -5227,7 +5311,7 @@
           </p:nvSpPr>
           <p:spPr>
             <a:xfrm>
-              <a:off x="1546939" y="962184"/>
+              <a:off x="1662234" y="846176"/>
               <a:ext cx="432000" cy="432000"/>
             </a:xfrm>
             <a:prstGeom prst="rect">
@@ -5299,7 +5383,7 @@
           </p:nvSpPr>
           <p:spPr>
             <a:xfrm>
-              <a:off x="3238939" y="962184"/>
+              <a:off x="3354234" y="846176"/>
               <a:ext cx="432000" cy="432000"/>
             </a:xfrm>
             <a:prstGeom prst="rect">
@@ -5360,10 +5444,10 @@
       </p:grpSp>
       <p:grpSp>
         <p:nvGrpSpPr>
-          <p:cNvPr id="16" name="Groupe 15">
+          <p:cNvPr id="3" name="Groupe 2">
             <a:extLst>
               <a:ext uri="{FF2B5EF4-FFF2-40B4-BE49-F238E27FC236}">
-                <a16:creationId xmlns:a16="http://schemas.microsoft.com/office/drawing/2014/main" id="{30552921-2C6A-F56F-3E7D-F3AB285B67A9}"/>
+                <a16:creationId xmlns:a16="http://schemas.microsoft.com/office/drawing/2014/main" id="{309444BD-D480-F5EE-956E-822004A9883D}"/>
               </a:ext>
             </a:extLst>
           </p:cNvPr>
@@ -5372,10 +5456,10 @@
         </p:nvGrpSpPr>
         <p:grpSpPr>
           <a:xfrm>
-            <a:off x="4734800" y="969777"/>
-            <a:ext cx="2124000" cy="3315044"/>
-            <a:chOff x="4734800" y="969777"/>
-            <a:chExt cx="2124000" cy="3315044"/>
+            <a:off x="4193876" y="846176"/>
+            <a:ext cx="2125698" cy="3312000"/>
+            <a:chOff x="4350090" y="851601"/>
+            <a:chExt cx="2125698" cy="3312000"/>
           </a:xfrm>
         </p:grpSpPr>
         <p:sp>
@@ -5392,7 +5476,7 @@
           </p:nvSpPr>
           <p:spPr>
             <a:xfrm>
-              <a:off x="4734800" y="972821"/>
+              <a:off x="4351104" y="851601"/>
               <a:ext cx="2124000" cy="3312000"/>
             </a:xfrm>
             <a:prstGeom prst="rect">
@@ -5445,7 +5529,7 @@
           </p:nvSpPr>
           <p:spPr>
             <a:xfrm>
-              <a:off x="4805272" y="3803579"/>
+              <a:off x="4421576" y="3682359"/>
               <a:ext cx="360000" cy="360000"/>
             </a:xfrm>
             <a:prstGeom prst="donut">
@@ -5507,7 +5591,7 @@
           </p:nvSpPr>
           <p:spPr>
             <a:xfrm rot="5400000">
-              <a:off x="5992527" y="3213110"/>
+              <a:off x="5608831" y="3091890"/>
               <a:ext cx="396000" cy="360000"/>
             </a:xfrm>
             <a:prstGeom prst="hexagon">
@@ -5574,7 +5658,7 @@
           </p:nvSpPr>
           <p:spPr>
             <a:xfrm rot="5400000">
-              <a:off x="5583252" y="3213110"/>
+              <a:off x="5199556" y="3091890"/>
               <a:ext cx="396000" cy="360000"/>
             </a:xfrm>
             <a:prstGeom prst="hexagon">
@@ -5641,7 +5725,7 @@
           </p:nvSpPr>
           <p:spPr>
             <a:xfrm rot="5400000">
-              <a:off x="5173977" y="3211585"/>
+              <a:off x="4790281" y="3090365"/>
               <a:ext cx="396000" cy="360000"/>
             </a:xfrm>
             <a:prstGeom prst="hexagon">
@@ -5695,8 +5779,8 @@
           </p:nvSpPr>
           <p:spPr>
             <a:xfrm>
-              <a:off x="4777161" y="1488710"/>
-              <a:ext cx="2007000" cy="461665"/>
+              <a:off x="4494971" y="1390522"/>
+              <a:ext cx="1882719" cy="369332"/>
             </a:xfrm>
             <a:prstGeom prst="rect">
               <a:avLst/>
@@ -5704,7 +5788,7 @@
             <a:noFill/>
           </p:spPr>
           <p:txBody>
-            <a:bodyPr wrap="square" rtlCol="0">
+            <a:bodyPr wrap="square" lIns="0" tIns="0" rIns="0" bIns="0" rtlCol="0">
               <a:spAutoFit/>
             </a:bodyPr>
             <a:lstStyle/>
@@ -5760,7 +5844,7 @@
           </p:blipFill>
           <p:spPr>
             <a:xfrm>
-              <a:off x="4805272" y="2008763"/>
+              <a:off x="4471920" y="1843750"/>
               <a:ext cx="1133030" cy="981962"/>
             </a:xfrm>
             <a:prstGeom prst="rect">
@@ -5782,8 +5866,8 @@
           </p:nvSpPr>
           <p:spPr>
             <a:xfrm>
-              <a:off x="5880849" y="2010094"/>
-              <a:ext cx="962435" cy="830997"/>
+              <a:off x="5725766" y="1843750"/>
+              <a:ext cx="626631" cy="738664"/>
             </a:xfrm>
             <a:prstGeom prst="rect">
               <a:avLst/>
@@ -5791,7 +5875,7 @@
             <a:noFill/>
           </p:spPr>
           <p:txBody>
-            <a:bodyPr wrap="square" rtlCol="0">
+            <a:bodyPr wrap="square" lIns="0" tIns="0" rIns="0" bIns="0" rtlCol="0">
               <a:spAutoFit/>
             </a:bodyPr>
             <a:lstStyle/>
@@ -5825,7 +5909,7 @@
           </p:nvSpPr>
           <p:spPr>
             <a:xfrm>
-              <a:off x="5367590" y="3175213"/>
+              <a:off x="4983894" y="3053993"/>
               <a:ext cx="904875" cy="290522"/>
             </a:xfrm>
             <a:custGeom>
@@ -5951,7 +6035,7 @@
           </p:nvSpPr>
           <p:spPr>
             <a:xfrm>
-              <a:off x="4734800" y="969777"/>
+              <a:off x="4350090" y="851666"/>
               <a:ext cx="432000" cy="432000"/>
             </a:xfrm>
             <a:prstGeom prst="rect">
@@ -6023,7 +6107,7 @@
           </p:nvSpPr>
           <p:spPr>
             <a:xfrm>
-              <a:off x="6426800" y="971415"/>
+              <a:off x="6043788" y="851664"/>
               <a:ext cx="432000" cy="432000"/>
             </a:xfrm>
             <a:prstGeom prst="rect">
@@ -6095,7 +6179,7 @@
           </p:nvSpPr>
           <p:spPr>
             <a:xfrm>
-              <a:off x="5166800" y="971415"/>
+              <a:off x="4783788" y="851666"/>
               <a:ext cx="1260000" cy="432000"/>
             </a:xfrm>
             <a:prstGeom prst="rect">
@@ -6155,10 +6239,10 @@
       </p:grpSp>
       <p:grpSp>
         <p:nvGrpSpPr>
-          <p:cNvPr id="17" name="Groupe 16">
+          <p:cNvPr id="13" name="Groupe 12">
             <a:extLst>
               <a:ext uri="{FF2B5EF4-FFF2-40B4-BE49-F238E27FC236}">
-                <a16:creationId xmlns:a16="http://schemas.microsoft.com/office/drawing/2014/main" id="{22BBF95C-D5A1-150A-3F94-062BFC33A19B}"/>
+                <a16:creationId xmlns:a16="http://schemas.microsoft.com/office/drawing/2014/main" id="{1CCB6775-8B51-D13F-E939-7B7902CC35E2}"/>
               </a:ext>
             </a:extLst>
           </p:cNvPr>
@@ -6167,9 +6251,9 @@
         </p:nvGrpSpPr>
         <p:grpSpPr>
           <a:xfrm>
-            <a:off x="8058180" y="972821"/>
+            <a:off x="6727546" y="846176"/>
             <a:ext cx="2124000" cy="3312000"/>
-            <a:chOff x="8058180" y="972821"/>
+            <a:chOff x="6981743" y="846176"/>
             <a:chExt cx="2124000" cy="3312000"/>
           </a:xfrm>
         </p:grpSpPr>
@@ -6187,7 +6271,7 @@
           </p:nvSpPr>
           <p:spPr>
             <a:xfrm>
-              <a:off x="8058180" y="972821"/>
+              <a:off x="6981743" y="846176"/>
               <a:ext cx="2124000" cy="3312000"/>
             </a:xfrm>
             <a:prstGeom prst="rect">
@@ -6240,7 +6324,7 @@
           </p:nvSpPr>
           <p:spPr>
             <a:xfrm>
-              <a:off x="8138922" y="3803579"/>
+              <a:off x="7062485" y="3676934"/>
               <a:ext cx="360000" cy="360000"/>
             </a:xfrm>
             <a:prstGeom prst="donut">
@@ -6302,7 +6386,7 @@
           </p:nvSpPr>
           <p:spPr>
             <a:xfrm rot="5400000">
-              <a:off x="9197717" y="3211585"/>
+              <a:off x="8121280" y="3084940"/>
               <a:ext cx="396000" cy="360000"/>
             </a:xfrm>
             <a:prstGeom prst="hexagon">
@@ -6369,7 +6453,7 @@
           </p:nvSpPr>
           <p:spPr>
             <a:xfrm rot="5400000">
-              <a:off x="8775076" y="3209980"/>
+              <a:off x="7698639" y="3083335"/>
               <a:ext cx="396000" cy="360000"/>
             </a:xfrm>
             <a:prstGeom prst="hexagon">
@@ -6425,7 +6509,7 @@
           </p:nvCxnSpPr>
           <p:spPr>
             <a:xfrm>
-              <a:off x="8971452" y="3382876"/>
+              <a:off x="7895015" y="3256231"/>
               <a:ext cx="481421" cy="12683"/>
             </a:xfrm>
             <a:prstGeom prst="straightConnector1">
@@ -6464,8 +6548,8 @@
           </p:nvSpPr>
           <p:spPr>
             <a:xfrm>
-              <a:off x="8110811" y="1488710"/>
-              <a:ext cx="2007000" cy="461665"/>
+              <a:off x="7167614" y="1389077"/>
+              <a:ext cx="1818049" cy="369332"/>
             </a:xfrm>
             <a:prstGeom prst="rect">
               <a:avLst/>
@@ -6473,7 +6557,7 @@
             <a:noFill/>
           </p:spPr>
           <p:txBody>
-            <a:bodyPr wrap="square" rtlCol="0">
+            <a:bodyPr wrap="square" lIns="0" tIns="0" rIns="0" bIns="0" rtlCol="0">
               <a:spAutoFit/>
             </a:bodyPr>
             <a:lstStyle/>
@@ -6533,7 +6617,7 @@
           </p:blipFill>
           <p:spPr>
             <a:xfrm>
-              <a:off x="8138922" y="2008763"/>
+              <a:off x="7150124" y="1825443"/>
               <a:ext cx="1133030" cy="981962"/>
             </a:xfrm>
             <a:prstGeom prst="rect">
@@ -6555,8 +6639,8 @@
           </p:nvSpPr>
           <p:spPr>
             <a:xfrm>
-              <a:off x="9214499" y="2010094"/>
-              <a:ext cx="944821" cy="830997"/>
+              <a:off x="8362282" y="1841910"/>
+              <a:ext cx="622921" cy="738664"/>
             </a:xfrm>
             <a:prstGeom prst="rect">
               <a:avLst/>
@@ -6564,7 +6648,7 @@
             <a:noFill/>
           </p:spPr>
           <p:txBody>
-            <a:bodyPr wrap="square" rtlCol="0">
+            <a:bodyPr wrap="square" lIns="0" tIns="0" rIns="0" bIns="0" rtlCol="0">
               <a:spAutoFit/>
             </a:bodyPr>
             <a:lstStyle/>
@@ -6598,7 +6682,7 @@
           </p:nvSpPr>
           <p:spPr>
             <a:xfrm>
-              <a:off x="8058180" y="972821"/>
+              <a:off x="6981743" y="846176"/>
               <a:ext cx="432000" cy="432000"/>
             </a:xfrm>
             <a:prstGeom prst="rect">
@@ -6670,7 +6754,7 @@
           </p:nvSpPr>
           <p:spPr>
             <a:xfrm>
-              <a:off x="8490180" y="972821"/>
+              <a:off x="7413743" y="846176"/>
               <a:ext cx="1260000" cy="432000"/>
             </a:xfrm>
             <a:prstGeom prst="rect">
@@ -6741,7 +6825,7 @@
           </p:nvSpPr>
           <p:spPr>
             <a:xfrm>
-              <a:off x="9750180" y="972821"/>
+              <a:off x="8673743" y="846176"/>
               <a:ext cx="432000" cy="432000"/>
             </a:xfrm>
             <a:prstGeom prst="rect">
@@ -6838,10 +6922,10 @@
       </p:grpSpPr>
       <p:grpSp>
         <p:nvGrpSpPr>
-          <p:cNvPr id="17" name="Groupe 16">
+          <p:cNvPr id="2" name="Groupe 1">
             <a:extLst>
               <a:ext uri="{FF2B5EF4-FFF2-40B4-BE49-F238E27FC236}">
-                <a16:creationId xmlns:a16="http://schemas.microsoft.com/office/drawing/2014/main" id="{7C74C304-0CA8-6A42-3C56-5C1BC3567F3E}"/>
+                <a16:creationId xmlns:a16="http://schemas.microsoft.com/office/drawing/2014/main" id="{6D01CDA7-31D3-189B-9672-74E273BE0D64}"/>
               </a:ext>
             </a:extLst>
           </p:cNvPr>
@@ -6850,9 +6934,9 @@
         </p:nvGrpSpPr>
         <p:grpSpPr>
           <a:xfrm>
-            <a:off x="1950838" y="1304582"/>
+            <a:off x="1550802" y="1195955"/>
             <a:ext cx="2124000" cy="3312000"/>
-            <a:chOff x="1950838" y="1304582"/>
+            <a:chOff x="1960940" y="1298764"/>
             <a:chExt cx="2124000" cy="3312000"/>
           </a:xfrm>
         </p:grpSpPr>
@@ -6870,7 +6954,7 @@
           </p:nvSpPr>
           <p:spPr>
             <a:xfrm>
-              <a:off x="1950838" y="1304582"/>
+              <a:off x="1960940" y="1298764"/>
               <a:ext cx="2124000" cy="3312000"/>
             </a:xfrm>
             <a:prstGeom prst="rect">
@@ -6923,7 +7007,7 @@
           </p:nvSpPr>
           <p:spPr>
             <a:xfrm>
-              <a:off x="2382838" y="1306963"/>
+              <a:off x="2392940" y="1301145"/>
               <a:ext cx="1260000" cy="432000"/>
             </a:xfrm>
             <a:prstGeom prst="rect">
@@ -6978,33 +7062,14 @@
             <a:p>
               <a:pPr algn="ctr"/>
               <a:r>
-                <a:rPr lang="fr-FR" sz="1200" b="1" dirty="0">
+                <a:rPr lang="en-US" sz="1200" b="1" noProof="0" dirty="0">
                   <a:solidFill>
                     <a:schemeClr val="bg1"/>
                   </a:solidFill>
                   <a:latin typeface="Segoe UI" panose="020B0502040204020203" pitchFamily="34" charset="0"/>
                   <a:cs typeface="Segoe UI" panose="020B0502040204020203" pitchFamily="34" charset="0"/>
                 </a:rPr>
-                <a:t>Recruter</a:t>
-              </a:r>
-              <a:br>
-                <a:rPr lang="fr-FR" sz="1200" b="1" dirty="0">
-                  <a:solidFill>
-                    <a:schemeClr val="bg1"/>
-                  </a:solidFill>
-                  <a:latin typeface="Segoe UI" panose="020B0502040204020203" pitchFamily="34" charset="0"/>
-                  <a:cs typeface="Segoe UI" panose="020B0502040204020203" pitchFamily="34" charset="0"/>
-                </a:rPr>
-              </a:br>
-              <a:r>
-                <a:rPr lang="fr-FR" sz="1200" b="1" dirty="0">
-                  <a:solidFill>
-                    <a:schemeClr val="bg1"/>
-                  </a:solidFill>
-                  <a:latin typeface="Segoe UI" panose="020B0502040204020203" pitchFamily="34" charset="0"/>
-                  <a:cs typeface="Segoe UI" panose="020B0502040204020203" pitchFamily="34" charset="0"/>
-                </a:rPr>
-                <a:t>Troupes</a:t>
+                <a:t>Recruit Troops</a:t>
               </a:r>
             </a:p>
           </p:txBody>
@@ -7023,7 +7088,7 @@
           </p:nvSpPr>
           <p:spPr>
             <a:xfrm>
-              <a:off x="2059001" y="4172085"/>
+              <a:off x="2069103" y="4166267"/>
               <a:ext cx="360000" cy="360000"/>
             </a:xfrm>
             <a:prstGeom prst="donut">
@@ -7085,7 +7150,7 @@
           </p:nvSpPr>
           <p:spPr>
             <a:xfrm rot="5400000">
-              <a:off x="3529621" y="3589687"/>
+              <a:off x="3539723" y="3583869"/>
               <a:ext cx="396000" cy="360000"/>
             </a:xfrm>
             <a:prstGeom prst="hexagon">
@@ -7139,7 +7204,7 @@
           </p:nvSpPr>
           <p:spPr>
             <a:xfrm>
-              <a:off x="2110784" y="3589687"/>
+              <a:off x="2120886" y="3583869"/>
               <a:ext cx="360000" cy="360000"/>
             </a:xfrm>
             <a:prstGeom prst="ellipse">
@@ -7194,7 +7259,7 @@
           </p:nvSpPr>
           <p:spPr>
             <a:xfrm>
-              <a:off x="2477110" y="3589687"/>
+              <a:off x="2487212" y="3583869"/>
               <a:ext cx="360000" cy="360000"/>
             </a:xfrm>
             <a:prstGeom prst="ellipse">
@@ -7249,7 +7314,7 @@
           </p:nvSpPr>
           <p:spPr>
             <a:xfrm>
-              <a:off x="2839930" y="3589687"/>
+              <a:off x="2850032" y="3583869"/>
               <a:ext cx="360000" cy="360000"/>
             </a:xfrm>
             <a:prstGeom prst="ellipse">
@@ -7306,7 +7371,7 @@
           </p:nvCxnSpPr>
           <p:spPr>
             <a:xfrm>
-              <a:off x="3242191" y="3769687"/>
+              <a:off x="3252293" y="3763869"/>
               <a:ext cx="568633" cy="0"/>
             </a:xfrm>
             <a:prstGeom prst="straightConnector1">
@@ -7345,8 +7410,8 @@
           </p:nvSpPr>
           <p:spPr>
             <a:xfrm>
-              <a:off x="2031494" y="1832423"/>
-              <a:ext cx="1944120" cy="646331"/>
+              <a:off x="2131254" y="1835097"/>
+              <a:ext cx="1260000" cy="553998"/>
             </a:xfrm>
             <a:prstGeom prst="rect">
               <a:avLst/>
@@ -7354,20 +7419,20 @@
             <a:noFill/>
           </p:spPr>
           <p:txBody>
-            <a:bodyPr wrap="square" rtlCol="0">
+            <a:bodyPr wrap="square" lIns="0" tIns="0" rIns="0" bIns="0" rtlCol="0">
               <a:spAutoFit/>
             </a:bodyPr>
             <a:lstStyle/>
             <a:p>
               <a:r>
-                <a:rPr lang="fr-FR" sz="1200" b="1" dirty="0">
+                <a:rPr lang="en-US" sz="1200" b="1" noProof="0" dirty="0">
                   <a:solidFill>
                     <a:schemeClr val="bg1"/>
                   </a:solidFill>
                   <a:latin typeface="Segoe UI" panose="020B0502040204020203" pitchFamily="34" charset="0"/>
                   <a:cs typeface="Segoe UI" panose="020B0502040204020203" pitchFamily="34" charset="0"/>
                 </a:rPr>
-                <a:t>Recruter 3 troupes vers la tuile de commandement</a:t>
+                <a:t>Recruit 3 troops to your Command Tile</a:t>
               </a:r>
             </a:p>
           </p:txBody>
@@ -7386,8 +7451,8 @@
           </p:nvSpPr>
           <p:spPr>
             <a:xfrm>
-              <a:off x="2059001" y="2509327"/>
-              <a:ext cx="1944120" cy="461665"/>
+              <a:off x="2131254" y="2667110"/>
+              <a:ext cx="1834935" cy="184666"/>
             </a:xfrm>
             <a:prstGeom prst="rect">
               <a:avLst/>
@@ -7395,20 +7460,20 @@
             <a:noFill/>
           </p:spPr>
           <p:txBody>
-            <a:bodyPr wrap="square" rtlCol="0">
+            <a:bodyPr wrap="square" lIns="0" tIns="0" rIns="0" bIns="0" rtlCol="0">
               <a:spAutoFit/>
             </a:bodyPr>
             <a:lstStyle/>
             <a:p>
               <a:r>
-                <a:rPr lang="fr-FR" sz="1200" b="1" dirty="0">
+                <a:rPr lang="en-US" sz="1200" b="1" noProof="0" dirty="0">
                   <a:solidFill>
                     <a:schemeClr val="bg1"/>
                   </a:solidFill>
                   <a:latin typeface="Segoe UI" panose="020B0502040204020203" pitchFamily="34" charset="0"/>
                   <a:cs typeface="Segoe UI" panose="020B0502040204020203" pitchFamily="34" charset="0"/>
                 </a:rPr>
-                <a:t>Plus 1 troupe si c’est une « tuile 1 »</a:t>
+                <a:t>+1 troop if it is a "Tile 1”</a:t>
               </a:r>
             </a:p>
           </p:txBody>
@@ -7427,8 +7492,8 @@
           </p:nvSpPr>
           <p:spPr>
             <a:xfrm>
-              <a:off x="2045914" y="3005054"/>
-              <a:ext cx="1296933" cy="461665"/>
+              <a:off x="2180299" y="3065920"/>
+              <a:ext cx="1421185" cy="184666"/>
             </a:xfrm>
             <a:prstGeom prst="rect">
               <a:avLst/>
@@ -7436,20 +7501,20 @@
             <a:noFill/>
           </p:spPr>
           <p:txBody>
-            <a:bodyPr wrap="square" rtlCol="0">
+            <a:bodyPr wrap="square" lIns="0" tIns="0" rIns="0" bIns="0" rtlCol="0">
               <a:spAutoFit/>
             </a:bodyPr>
             <a:lstStyle/>
             <a:p>
               <a:r>
-                <a:rPr lang="fr-FR" sz="1200" b="1" dirty="0">
+                <a:rPr lang="en-US" sz="1200" b="1" noProof="0" dirty="0">
                   <a:solidFill>
                     <a:schemeClr val="bg1"/>
                   </a:solidFill>
                   <a:latin typeface="Segoe UI" panose="020B0502040204020203" pitchFamily="34" charset="0"/>
                   <a:cs typeface="Segoe UI" panose="020B0502040204020203" pitchFamily="34" charset="0"/>
                 </a:rPr>
-                <a:t>Résoudre les affrontements</a:t>
+                <a:t>Resolve any battles</a:t>
               </a:r>
             </a:p>
           </p:txBody>
@@ -7468,7 +7533,7 @@
           </p:nvSpPr>
           <p:spPr>
             <a:xfrm rot="5400000">
-              <a:off x="2516039" y="4167650"/>
+              <a:off x="2526141" y="4161832"/>
               <a:ext cx="390567" cy="368869"/>
             </a:xfrm>
             <a:prstGeom prst="hexagon">
@@ -7535,7 +7600,7 @@
           </p:nvSpPr>
           <p:spPr>
             <a:xfrm>
-              <a:off x="2665817" y="4332304"/>
+              <a:off x="2675919" y="4326486"/>
               <a:ext cx="91844" cy="124982"/>
             </a:xfrm>
             <a:prstGeom prst="rect">
@@ -7589,7 +7654,7 @@
           </p:nvSpPr>
           <p:spPr>
             <a:xfrm>
-              <a:off x="2663776" y="4238712"/>
+              <a:off x="2673878" y="4232894"/>
               <a:ext cx="91844" cy="91844"/>
             </a:xfrm>
             <a:prstGeom prst="ellipse">
@@ -7643,7 +7708,7 @@
           </p:nvSpPr>
           <p:spPr>
             <a:xfrm rot="5400000">
-              <a:off x="2992554" y="4162368"/>
+              <a:off x="3002656" y="4156550"/>
               <a:ext cx="396000" cy="374000"/>
             </a:xfrm>
             <a:prstGeom prst="hexagon">
@@ -7710,7 +7775,7 @@
           </p:nvSpPr>
           <p:spPr>
             <a:xfrm>
-              <a:off x="3064206" y="4260635"/>
+              <a:off x="3074308" y="4254817"/>
               <a:ext cx="93122" cy="177465"/>
             </a:xfrm>
             <a:prstGeom prst="rect">
@@ -7779,7 +7844,7 @@
           </p:blipFill>
           <p:spPr>
             <a:xfrm>
-              <a:off x="3195160" y="4248535"/>
+              <a:off x="3205262" y="4242717"/>
               <a:ext cx="120894" cy="189565"/>
             </a:xfrm>
             <a:prstGeom prst="rect">
@@ -7801,7 +7866,7 @@
           </p:nvSpPr>
           <p:spPr>
             <a:xfrm>
-              <a:off x="1950838" y="1306963"/>
+              <a:off x="1960940" y="1301145"/>
               <a:ext cx="432000" cy="432000"/>
             </a:xfrm>
             <a:prstGeom prst="rect">
@@ -7882,7 +7947,7 @@
           </p:nvSpPr>
           <p:spPr>
             <a:xfrm>
-              <a:off x="3642838" y="1305286"/>
+              <a:off x="3652940" y="1299468"/>
               <a:ext cx="432000" cy="432000"/>
             </a:xfrm>
             <a:prstGeom prst="rect">
@@ -7986,7 +8051,7 @@
           </p:blipFill>
           <p:spPr>
             <a:xfrm>
-              <a:off x="3353936" y="2768847"/>
+              <a:off x="3377724" y="1846676"/>
               <a:ext cx="540000" cy="540000"/>
             </a:xfrm>
             <a:prstGeom prst="rect">
@@ -7997,10 +8062,10 @@
       </p:grpSp>
       <p:grpSp>
         <p:nvGrpSpPr>
-          <p:cNvPr id="18" name="Groupe 17">
+          <p:cNvPr id="13" name="Groupe 12">
             <a:extLst>
               <a:ext uri="{FF2B5EF4-FFF2-40B4-BE49-F238E27FC236}">
-                <a16:creationId xmlns:a16="http://schemas.microsoft.com/office/drawing/2014/main" id="{69263384-E41E-D53A-AD4B-3A40FC4D059F}"/>
+                <a16:creationId xmlns:a16="http://schemas.microsoft.com/office/drawing/2014/main" id="{0B0678DB-38EE-D9A1-4D9A-9A2D1C876699}"/>
               </a:ext>
             </a:extLst>
           </p:cNvPr>
@@ -8009,9 +8074,9 @@
         </p:nvGrpSpPr>
         <p:grpSpPr>
           <a:xfrm>
-            <a:off x="4559727" y="1303898"/>
+            <a:off x="4082553" y="1195271"/>
             <a:ext cx="2124000" cy="3312684"/>
-            <a:chOff x="4559727" y="1303898"/>
+            <a:chOff x="4539212" y="1298764"/>
             <a:chExt cx="2124000" cy="3312684"/>
           </a:xfrm>
         </p:grpSpPr>
@@ -8029,7 +8094,7 @@
           </p:nvSpPr>
           <p:spPr>
             <a:xfrm>
-              <a:off x="4559727" y="1304582"/>
+              <a:off x="4539212" y="1299448"/>
               <a:ext cx="2124000" cy="3312000"/>
             </a:xfrm>
             <a:prstGeom prst="rect">
@@ -8082,7 +8147,7 @@
           </p:nvSpPr>
           <p:spPr>
             <a:xfrm>
-              <a:off x="4672107" y="4152421"/>
+              <a:off x="4651592" y="4147287"/>
               <a:ext cx="360000" cy="360000"/>
             </a:xfrm>
             <a:prstGeom prst="donut">
@@ -8144,7 +8209,7 @@
           </p:nvSpPr>
           <p:spPr>
             <a:xfrm rot="5400000">
-              <a:off x="5934454" y="3569793"/>
+              <a:off x="5913939" y="3564659"/>
               <a:ext cx="396000" cy="360000"/>
             </a:xfrm>
             <a:prstGeom prst="hexagon">
@@ -8198,7 +8263,7 @@
           </p:nvSpPr>
           <p:spPr>
             <a:xfrm>
-              <a:off x="4881943" y="3569793"/>
+              <a:off x="4861428" y="3564659"/>
               <a:ext cx="360000" cy="360000"/>
             </a:xfrm>
             <a:prstGeom prst="ellipse">
@@ -8253,7 +8318,7 @@
           </p:nvSpPr>
           <p:spPr>
             <a:xfrm>
-              <a:off x="5244763" y="3569793"/>
+              <a:off x="5224248" y="3564659"/>
               <a:ext cx="360000" cy="360000"/>
             </a:xfrm>
             <a:prstGeom prst="ellipse">
@@ -8310,7 +8375,7 @@
           </p:nvCxnSpPr>
           <p:spPr>
             <a:xfrm>
-              <a:off x="5647024" y="3749793"/>
+              <a:off x="5626509" y="3744659"/>
               <a:ext cx="568633" cy="0"/>
             </a:xfrm>
             <a:prstGeom prst="straightConnector1">
@@ -8349,8 +8414,8 @@
           </p:nvSpPr>
           <p:spPr>
             <a:xfrm>
-              <a:off x="4644600" y="1812759"/>
-              <a:ext cx="1944120" cy="646331"/>
+              <a:off x="4717470" y="1842780"/>
+              <a:ext cx="1260000" cy="553998"/>
             </a:xfrm>
             <a:prstGeom prst="rect">
               <a:avLst/>
@@ -8358,20 +8423,20 @@
             <a:noFill/>
           </p:spPr>
           <p:txBody>
-            <a:bodyPr wrap="square" rtlCol="0">
+            <a:bodyPr wrap="square" lIns="0" tIns="0" rIns="0" bIns="0" rtlCol="0">
               <a:spAutoFit/>
             </a:bodyPr>
             <a:lstStyle/>
             <a:p>
               <a:r>
-                <a:rPr lang="fr-FR" sz="1200" b="1" dirty="0">
+                <a:rPr lang="en-US" sz="1200" b="1" dirty="0">
                   <a:solidFill>
                     <a:schemeClr val="bg1"/>
                   </a:solidFill>
                   <a:latin typeface="Segoe UI" panose="020B0502040204020203" pitchFamily="34" charset="0"/>
                   <a:cs typeface="Segoe UI" panose="020B0502040204020203" pitchFamily="34" charset="0"/>
                 </a:rPr>
-                <a:t>Recruter 2 troupes vers la tuile de commandement</a:t>
+                <a:t>Recruit 2 troops to your Command Tile</a:t>
               </a:r>
             </a:p>
           </p:txBody>
@@ -8390,8 +8455,8 @@
           </p:nvSpPr>
           <p:spPr>
             <a:xfrm>
-              <a:off x="4672107" y="2489663"/>
-              <a:ext cx="1944120" cy="461665"/>
+              <a:off x="4651592" y="2649758"/>
+              <a:ext cx="1820347" cy="184666"/>
             </a:xfrm>
             <a:prstGeom prst="rect">
               <a:avLst/>
@@ -8399,20 +8464,20 @@
             <a:noFill/>
           </p:spPr>
           <p:txBody>
-            <a:bodyPr wrap="square" rtlCol="0">
+            <a:bodyPr wrap="square" lIns="0" tIns="0" rIns="0" bIns="0" rtlCol="0">
               <a:spAutoFit/>
             </a:bodyPr>
             <a:lstStyle/>
             <a:p>
               <a:r>
-                <a:rPr lang="fr-FR" sz="1200" b="1" dirty="0">
+                <a:rPr lang="en-US" sz="1200" b="1" dirty="0">
                   <a:solidFill>
                     <a:schemeClr val="bg1"/>
                   </a:solidFill>
                   <a:latin typeface="Segoe UI" panose="020B0502040204020203" pitchFamily="34" charset="0"/>
                   <a:cs typeface="Segoe UI" panose="020B0502040204020203" pitchFamily="34" charset="0"/>
                 </a:rPr>
-                <a:t>Plus 1 troupe si c’est une « tuile 1 »</a:t>
+                <a:t>+1 troop if it is a "Tile 1”</a:t>
               </a:r>
             </a:p>
           </p:txBody>
@@ -8431,8 +8496,8 @@
           </p:nvSpPr>
           <p:spPr>
             <a:xfrm>
-              <a:off x="4688332" y="3028886"/>
-              <a:ext cx="1296933" cy="461665"/>
+              <a:off x="4731399" y="3061402"/>
+              <a:ext cx="1407668" cy="184666"/>
             </a:xfrm>
             <a:prstGeom prst="rect">
               <a:avLst/>
@@ -8440,20 +8505,20 @@
             <a:noFill/>
           </p:spPr>
           <p:txBody>
-            <a:bodyPr wrap="square" rtlCol="0">
+            <a:bodyPr wrap="square" lIns="0" tIns="0" rIns="0" bIns="0" rtlCol="0">
               <a:spAutoFit/>
             </a:bodyPr>
             <a:lstStyle/>
             <a:p>
               <a:r>
-                <a:rPr lang="fr-FR" sz="1200" b="1" dirty="0">
+                <a:rPr lang="en-US" sz="1200" b="1" dirty="0">
                   <a:solidFill>
                     <a:schemeClr val="bg1"/>
                   </a:solidFill>
                   <a:latin typeface="Segoe UI" panose="020B0502040204020203" pitchFamily="34" charset="0"/>
                   <a:cs typeface="Segoe UI" panose="020B0502040204020203" pitchFamily="34" charset="0"/>
                 </a:rPr>
-                <a:t>Résoudre les affrontements</a:t>
+                <a:t>Resolve any battles</a:t>
               </a:r>
             </a:p>
           </p:txBody>
@@ -8472,7 +8537,7 @@
           </p:nvGrpSpPr>
           <p:grpSpPr>
             <a:xfrm>
-              <a:off x="5139974" y="4133226"/>
+              <a:off x="5119459" y="4128092"/>
               <a:ext cx="368869" cy="390567"/>
               <a:chOff x="1576316" y="4917631"/>
               <a:chExt cx="722925" cy="765450"/>
@@ -8668,7 +8733,7 @@
           </p:nvGrpSpPr>
           <p:grpSpPr>
             <a:xfrm>
-              <a:off x="5616640" y="4127793"/>
+              <a:off x="5596125" y="4122659"/>
               <a:ext cx="374000" cy="396000"/>
               <a:chOff x="3406027" y="4917631"/>
               <a:chExt cx="722925" cy="765450"/>
@@ -8847,7 +8912,7 @@
           </p:nvSpPr>
           <p:spPr>
             <a:xfrm>
-              <a:off x="4559727" y="1304582"/>
+              <a:off x="4539212" y="1299448"/>
               <a:ext cx="432000" cy="432000"/>
             </a:xfrm>
             <a:prstGeom prst="rect">
@@ -8928,7 +8993,7 @@
           </p:nvSpPr>
           <p:spPr>
             <a:xfrm>
-              <a:off x="6251727" y="1304582"/>
+              <a:off x="6231212" y="1299448"/>
               <a:ext cx="432000" cy="432000"/>
             </a:xfrm>
             <a:prstGeom prst="rect">
@@ -9009,7 +9074,7 @@
           </p:nvSpPr>
           <p:spPr>
             <a:xfrm>
-              <a:off x="4991727" y="1303898"/>
+              <a:off x="4971212" y="1298764"/>
               <a:ext cx="1260000" cy="432000"/>
             </a:xfrm>
             <a:prstGeom prst="rect">
@@ -9064,33 +9129,14 @@
             <a:p>
               <a:pPr algn="ctr"/>
               <a:r>
-                <a:rPr lang="fr-FR" sz="1200" b="1" dirty="0">
+                <a:rPr lang="en-US" sz="1200" b="1" noProof="0" dirty="0">
                   <a:solidFill>
                     <a:schemeClr val="bg1"/>
                   </a:solidFill>
                   <a:latin typeface="Segoe UI" panose="020B0502040204020203" pitchFamily="34" charset="0"/>
                   <a:cs typeface="Segoe UI" panose="020B0502040204020203" pitchFamily="34" charset="0"/>
                 </a:rPr>
-                <a:t>Recruter</a:t>
-              </a:r>
-              <a:br>
-                <a:rPr lang="fr-FR" sz="1200" b="1" dirty="0">
-                  <a:solidFill>
-                    <a:schemeClr val="bg1"/>
-                  </a:solidFill>
-                  <a:latin typeface="Segoe UI" panose="020B0502040204020203" pitchFamily="34" charset="0"/>
-                  <a:cs typeface="Segoe UI" panose="020B0502040204020203" pitchFamily="34" charset="0"/>
-                </a:rPr>
-              </a:br>
-              <a:r>
-                <a:rPr lang="fr-FR" sz="1200" b="1" dirty="0">
-                  <a:solidFill>
-                    <a:schemeClr val="bg1"/>
-                  </a:solidFill>
-                  <a:latin typeface="Segoe UI" panose="020B0502040204020203" pitchFamily="34" charset="0"/>
-                  <a:cs typeface="Segoe UI" panose="020B0502040204020203" pitchFamily="34" charset="0"/>
-                </a:rPr>
-                <a:t>Troupes</a:t>
+                <a:t>Recruit Troops</a:t>
               </a:r>
             </a:p>
           </p:txBody>
@@ -9132,7 +9178,7 @@
           </p:blipFill>
           <p:spPr>
             <a:xfrm>
-              <a:off x="5952454" y="2789636"/>
+              <a:off x="5968958" y="1837304"/>
               <a:ext cx="540000" cy="540000"/>
             </a:xfrm>
             <a:prstGeom prst="rect">
@@ -9143,10 +9189,10 @@
       </p:grpSp>
       <p:grpSp>
         <p:nvGrpSpPr>
-          <p:cNvPr id="19" name="Groupe 18">
+          <p:cNvPr id="14" name="Groupe 13">
             <a:extLst>
               <a:ext uri="{FF2B5EF4-FFF2-40B4-BE49-F238E27FC236}">
-                <a16:creationId xmlns:a16="http://schemas.microsoft.com/office/drawing/2014/main" id="{DAD352C7-A8F0-3ED6-78A8-D0A5EBF24402}"/>
+                <a16:creationId xmlns:a16="http://schemas.microsoft.com/office/drawing/2014/main" id="{E2DB6CB4-1B3A-0049-7F5C-80BD8446F5C1}"/>
               </a:ext>
             </a:extLst>
           </p:cNvPr>
@@ -9155,9 +9201,9 @@
         </p:nvGrpSpPr>
         <p:grpSpPr>
           <a:xfrm>
-            <a:off x="7168616" y="1303898"/>
+            <a:off x="6614304" y="1204301"/>
             <a:ext cx="2124000" cy="3312684"/>
-            <a:chOff x="7168616" y="1303898"/>
+            <a:chOff x="7160621" y="1298080"/>
             <a:chExt cx="2124000" cy="3312684"/>
           </a:xfrm>
         </p:grpSpPr>
@@ -9175,7 +9221,7 @@
           </p:nvSpPr>
           <p:spPr>
             <a:xfrm>
-              <a:off x="7168616" y="1304582"/>
+              <a:off x="7160621" y="1298764"/>
               <a:ext cx="2124000" cy="3312000"/>
             </a:xfrm>
             <a:prstGeom prst="rect">
@@ -9228,7 +9274,7 @@
           </p:nvSpPr>
           <p:spPr>
             <a:xfrm>
-              <a:off x="7280996" y="4143246"/>
+              <a:off x="7273001" y="4137428"/>
               <a:ext cx="360000" cy="360000"/>
             </a:xfrm>
             <a:prstGeom prst="donut">
@@ -9290,7 +9336,7 @@
           </p:nvSpPr>
           <p:spPr>
             <a:xfrm rot="5400000">
-              <a:off x="8344170" y="3533443"/>
+              <a:off x="8336175" y="3527625"/>
               <a:ext cx="396000" cy="360000"/>
             </a:xfrm>
             <a:prstGeom prst="hexagon">
@@ -9344,7 +9390,7 @@
           </p:nvSpPr>
           <p:spPr>
             <a:xfrm>
-              <a:off x="7654479" y="3533443"/>
+              <a:off x="7646484" y="3527625"/>
               <a:ext cx="360000" cy="360000"/>
             </a:xfrm>
             <a:prstGeom prst="ellipse">
@@ -9401,7 +9447,7 @@
           </p:nvCxnSpPr>
           <p:spPr>
             <a:xfrm>
-              <a:off x="8056740" y="3713443"/>
+              <a:off x="8048745" y="3707625"/>
               <a:ext cx="568633" cy="0"/>
             </a:xfrm>
             <a:prstGeom prst="straightConnector1">
@@ -9440,8 +9486,8 @@
           </p:nvSpPr>
           <p:spPr>
             <a:xfrm>
-              <a:off x="7253489" y="1803584"/>
-              <a:ext cx="1944120" cy="461665"/>
+              <a:off x="7376484" y="1842780"/>
+              <a:ext cx="1260000" cy="553998"/>
             </a:xfrm>
             <a:prstGeom prst="rect">
               <a:avLst/>
@@ -9449,20 +9495,20 @@
             <a:noFill/>
           </p:spPr>
           <p:txBody>
-            <a:bodyPr wrap="square" rtlCol="0">
+            <a:bodyPr wrap="square" lIns="0" tIns="0" rIns="0" bIns="0" rtlCol="0">
               <a:spAutoFit/>
             </a:bodyPr>
             <a:lstStyle/>
             <a:p>
               <a:r>
-                <a:rPr lang="fr-FR" sz="1200" b="1" dirty="0">
+                <a:rPr lang="en-US" sz="1200" b="1" dirty="0">
                   <a:solidFill>
                     <a:schemeClr val="bg1"/>
                   </a:solidFill>
                   <a:latin typeface="Segoe UI" panose="020B0502040204020203" pitchFamily="34" charset="0"/>
                   <a:cs typeface="Segoe UI" panose="020B0502040204020203" pitchFamily="34" charset="0"/>
                 </a:rPr>
-                <a:t>Recruter 1 troupe vers la tuile de commandement</a:t>
+                <a:t>Recruit 1 troop to your Command Tile</a:t>
               </a:r>
             </a:p>
           </p:txBody>
@@ -9481,8 +9527,8 @@
           </p:nvSpPr>
           <p:spPr>
             <a:xfrm>
-              <a:off x="7280996" y="2480488"/>
-              <a:ext cx="1944120" cy="461665"/>
+              <a:off x="7281817" y="2608545"/>
+              <a:ext cx="1786804" cy="184666"/>
             </a:xfrm>
             <a:prstGeom prst="rect">
               <a:avLst/>
@@ -9490,20 +9536,20 @@
             <a:noFill/>
           </p:spPr>
           <p:txBody>
-            <a:bodyPr wrap="square" rtlCol="0">
+            <a:bodyPr wrap="square" lIns="0" tIns="0" rIns="0" bIns="0" rtlCol="0">
               <a:spAutoFit/>
             </a:bodyPr>
             <a:lstStyle/>
             <a:p>
               <a:r>
-                <a:rPr lang="fr-FR" sz="1200" b="1" dirty="0">
+                <a:rPr lang="en-US" sz="1200" b="1" dirty="0">
                   <a:solidFill>
                     <a:schemeClr val="bg1"/>
                   </a:solidFill>
                   <a:latin typeface="Segoe UI" panose="020B0502040204020203" pitchFamily="34" charset="0"/>
                   <a:cs typeface="Segoe UI" panose="020B0502040204020203" pitchFamily="34" charset="0"/>
                 </a:rPr>
-                <a:t>Plus 1 troupe si c’est une « tuile 1 »</a:t>
+                <a:t>+1 troop if it is a "Tile 1”</a:t>
               </a:r>
             </a:p>
           </p:txBody>
@@ -9522,8 +9568,8 @@
           </p:nvSpPr>
           <p:spPr>
             <a:xfrm>
-              <a:off x="7280996" y="3034299"/>
-              <a:ext cx="1296933" cy="461665"/>
+              <a:off x="7364868" y="3061402"/>
+              <a:ext cx="1441174" cy="184666"/>
             </a:xfrm>
             <a:prstGeom prst="rect">
               <a:avLst/>
@@ -9531,20 +9577,20 @@
             <a:noFill/>
           </p:spPr>
           <p:txBody>
-            <a:bodyPr wrap="square" rtlCol="0">
+            <a:bodyPr wrap="square" lIns="0" tIns="0" rIns="0" bIns="0" rtlCol="0">
               <a:spAutoFit/>
             </a:bodyPr>
             <a:lstStyle/>
             <a:p>
               <a:r>
-                <a:rPr lang="fr-FR" sz="1200" b="1" dirty="0">
+                <a:rPr lang="en-US" sz="1200" b="1" dirty="0">
                   <a:solidFill>
                     <a:schemeClr val="bg1"/>
                   </a:solidFill>
                   <a:latin typeface="Segoe UI" panose="020B0502040204020203" pitchFamily="34" charset="0"/>
                   <a:cs typeface="Segoe UI" panose="020B0502040204020203" pitchFamily="34" charset="0"/>
                 </a:rPr>
-                <a:t>Résoudre les affrontements</a:t>
+                <a:t>Resolve any battles</a:t>
               </a:r>
             </a:p>
           </p:txBody>
@@ -9563,7 +9609,7 @@
           </p:nvGrpSpPr>
           <p:grpSpPr>
             <a:xfrm>
-              <a:off x="7753376" y="4133226"/>
+              <a:off x="7745381" y="4127408"/>
               <a:ext cx="368869" cy="390567"/>
               <a:chOff x="1576316" y="4917631"/>
               <a:chExt cx="722925" cy="765450"/>
@@ -9759,7 +9805,7 @@
           </p:nvGrpSpPr>
           <p:grpSpPr>
             <a:xfrm>
-              <a:off x="8230042" y="4127793"/>
+              <a:off x="8222047" y="4121975"/>
               <a:ext cx="374000" cy="396000"/>
               <a:chOff x="3406027" y="4917631"/>
               <a:chExt cx="722925" cy="765450"/>
@@ -9938,7 +9984,7 @@
           </p:nvSpPr>
           <p:spPr>
             <a:xfrm>
-              <a:off x="7168616" y="1303898"/>
+              <a:off x="7160621" y="1298080"/>
               <a:ext cx="432000" cy="432000"/>
             </a:xfrm>
             <a:prstGeom prst="rect">
@@ -10019,7 +10065,7 @@
           </p:nvSpPr>
           <p:spPr>
             <a:xfrm>
-              <a:off x="8860616" y="1303898"/>
+              <a:off x="8852621" y="1298080"/>
               <a:ext cx="432000" cy="432000"/>
             </a:xfrm>
             <a:prstGeom prst="rect">
@@ -10100,7 +10146,7 @@
           </p:nvSpPr>
           <p:spPr>
             <a:xfrm>
-              <a:off x="7600616" y="1303898"/>
+              <a:off x="7592621" y="1298080"/>
               <a:ext cx="1260000" cy="432000"/>
             </a:xfrm>
             <a:prstGeom prst="rect">
@@ -10155,33 +10201,14 @@
             <a:p>
               <a:pPr algn="ctr"/>
               <a:r>
-                <a:rPr lang="fr-FR" sz="1200" b="1" dirty="0">
+                <a:rPr lang="en-US" sz="1200" b="1" noProof="0" dirty="0">
                   <a:solidFill>
                     <a:schemeClr val="bg1"/>
                   </a:solidFill>
                   <a:latin typeface="Segoe UI" panose="020B0502040204020203" pitchFamily="34" charset="0"/>
                   <a:cs typeface="Segoe UI" panose="020B0502040204020203" pitchFamily="34" charset="0"/>
                 </a:rPr>
-                <a:t>Recruter</a:t>
-              </a:r>
-              <a:br>
-                <a:rPr lang="fr-FR" sz="1200" b="1" dirty="0">
-                  <a:solidFill>
-                    <a:schemeClr val="bg1"/>
-                  </a:solidFill>
-                  <a:latin typeface="Segoe UI" panose="020B0502040204020203" pitchFamily="34" charset="0"/>
-                  <a:cs typeface="Segoe UI" panose="020B0502040204020203" pitchFamily="34" charset="0"/>
-                </a:rPr>
-              </a:br>
-              <a:r>
-                <a:rPr lang="fr-FR" sz="1200" b="1" dirty="0">
-                  <a:solidFill>
-                    <a:schemeClr val="bg1"/>
-                  </a:solidFill>
-                  <a:latin typeface="Segoe UI" panose="020B0502040204020203" pitchFamily="34" charset="0"/>
-                  <a:cs typeface="Segoe UI" panose="020B0502040204020203" pitchFamily="34" charset="0"/>
-                </a:rPr>
-                <a:t>Troupes</a:t>
+                <a:t>Recruit Troops</a:t>
               </a:r>
             </a:p>
           </p:txBody>
@@ -10223,7 +10250,7 @@
           </p:blipFill>
           <p:spPr>
             <a:xfrm>
-              <a:off x="8604042" y="2754722"/>
+              <a:off x="8582621" y="1849095"/>
               <a:ext cx="540000" cy="540000"/>
             </a:xfrm>
             <a:prstGeom prst="rect">
@@ -10270,10 +10297,10 @@
       </p:grpSpPr>
       <p:grpSp>
         <p:nvGrpSpPr>
-          <p:cNvPr id="25" name="Groupe 24">
+          <p:cNvPr id="14" name="Groupe 13">
             <a:extLst>
               <a:ext uri="{FF2B5EF4-FFF2-40B4-BE49-F238E27FC236}">
-                <a16:creationId xmlns:a16="http://schemas.microsoft.com/office/drawing/2014/main" id="{26CB4421-58FE-89FB-402F-73CEAFF27C61}"/>
+                <a16:creationId xmlns:a16="http://schemas.microsoft.com/office/drawing/2014/main" id="{52A7337C-67AE-5B3F-13EC-5F4D8A79BE57}"/>
               </a:ext>
             </a:extLst>
           </p:cNvPr>
@@ -10282,9 +10309,9 @@
         </p:nvGrpSpPr>
         <p:grpSpPr>
           <a:xfrm>
-            <a:off x="8284080" y="1428694"/>
+            <a:off x="6247564" y="1445132"/>
             <a:ext cx="2124000" cy="3312600"/>
-            <a:chOff x="4362394" y="1431551"/>
+            <a:chOff x="6690056" y="1421374"/>
             <a:chExt cx="2124000" cy="3312600"/>
           </a:xfrm>
         </p:grpSpPr>
@@ -10302,14 +10329,14 @@
           </p:nvSpPr>
           <p:spPr>
             <a:xfrm>
-              <a:off x="4362394" y="1432151"/>
+              <a:off x="6690056" y="1421974"/>
               <a:ext cx="2124000" cy="3312000"/>
             </a:xfrm>
             <a:prstGeom prst="rect">
               <a:avLst/>
             </a:prstGeom>
             <a:blipFill dpi="0" rotWithShape="1">
-              <a:blip r:embed="rId2">
+              <a:blip r:embed="rId3">
                 <a:alphaModFix amt="75000"/>
               </a:blip>
               <a:srcRect/>
@@ -10355,19 +10382,19 @@
           </p:nvSpPr>
           <p:spPr>
             <a:xfrm>
-              <a:off x="4794394" y="1431769"/>
+              <a:off x="7122056" y="1421592"/>
               <a:ext cx="1260000" cy="432000"/>
             </a:xfrm>
             <a:prstGeom prst="rect">
               <a:avLst/>
             </a:prstGeom>
             <a:blipFill dpi="0" rotWithShape="1">
-              <a:blip r:embed="rId3">
+              <a:blip r:embed="rId4">
                 <a:alphaModFix amt="50000"/>
                 <a:extLst>
                   <a:ext uri="{BEBA8EAE-BF5A-486C-A8C5-ECC9F3942E4B}">
                     <a14:imgProps xmlns:a14="http://schemas.microsoft.com/office/drawing/2010/main">
-                      <a14:imgLayer r:embed="rId4">
+                      <a14:imgLayer r:embed="rId5">
                         <a14:imgEffect>
                           <a14:artisticWatercolorSponge/>
                         </a14:imgEffect>
@@ -10410,14 +10437,14 @@
             <a:p>
               <a:pPr algn="ctr"/>
               <a:r>
-                <a:rPr lang="fr-FR" sz="1200" b="1" dirty="0">
+                <a:rPr lang="en-US" sz="1200" b="1" noProof="0" dirty="0">
                   <a:solidFill>
                     <a:schemeClr val="bg1"/>
                   </a:solidFill>
                   <a:latin typeface="Segoe UI" panose="020B0502040204020203" pitchFamily="34" charset="0"/>
                   <a:cs typeface="Segoe UI" panose="020B0502040204020203" pitchFamily="34" charset="0"/>
                 </a:rPr>
-                <a:t>Disperser Troupes</a:t>
+                <a:t>Disperse Troops</a:t>
               </a:r>
             </a:p>
           </p:txBody>
@@ -10436,8 +10463,8 @@
           </p:nvSpPr>
           <p:spPr>
             <a:xfrm>
-              <a:off x="4538247" y="1960994"/>
-              <a:ext cx="1846986" cy="830997"/>
+              <a:off x="6860724" y="1990995"/>
+              <a:ext cx="1332768" cy="738664"/>
             </a:xfrm>
             <a:prstGeom prst="rect">
               <a:avLst/>
@@ -10445,21 +10472,28 @@
             <a:noFill/>
           </p:spPr>
           <p:txBody>
-            <a:bodyPr wrap="square" rtlCol="0">
+            <a:bodyPr wrap="square" lIns="0" tIns="0" rIns="0" bIns="0" rtlCol="0">
               <a:spAutoFit/>
             </a:bodyPr>
             <a:lstStyle/>
             <a:p>
               <a:r>
-                <a:rPr lang="fr-FR" sz="1200" b="1" dirty="0">
+                <a:rPr lang="en-US" sz="1200" b="1" dirty="0">
                   <a:solidFill>
                     <a:schemeClr val="bg1"/>
                   </a:solidFill>
                   <a:latin typeface="Segoe UI" panose="020B0502040204020203" pitchFamily="34" charset="0"/>
                   <a:cs typeface="Segoe UI" panose="020B0502040204020203" pitchFamily="34" charset="0"/>
                 </a:rPr>
-                <a:t>Disperser en ligne droite des troupes depuis la tuile de commandement</a:t>
+                <a:t>Disperse troops in a straight line from the Command Tile</a:t>
               </a:r>
+              <a:endParaRPr lang="fr-FR" sz="1200" b="1" dirty="0">
+                <a:solidFill>
+                  <a:schemeClr val="bg1"/>
+                </a:solidFill>
+                <a:latin typeface="Segoe UI" panose="020B0502040204020203" pitchFamily="34" charset="0"/>
+                <a:cs typeface="Segoe UI" panose="020B0502040204020203" pitchFamily="34" charset="0"/>
+              </a:endParaRPr>
             </a:p>
           </p:txBody>
         </p:sp>
@@ -10477,7 +10511,7 @@
           </p:nvSpPr>
           <p:spPr>
             <a:xfrm>
-              <a:off x="4424904" y="4295135"/>
+              <a:off x="6752566" y="4284958"/>
               <a:ext cx="360000" cy="360000"/>
             </a:xfrm>
             <a:prstGeom prst="donut">
@@ -10486,7 +10520,7 @@
               </a:avLst>
             </a:prstGeom>
             <a:blipFill>
-              <a:blip r:embed="rId5"/>
+              <a:blip r:embed="rId6"/>
               <a:tile tx="0" ty="0" sx="100000" sy="100000" flip="none" algn="tl"/>
             </a:blipFill>
             <a:ln w="12700"/>
@@ -10539,18 +10573,18 @@
           </p:nvSpPr>
           <p:spPr>
             <a:xfrm rot="5400000">
-              <a:off x="5847830" y="3509432"/>
+              <a:off x="8175492" y="3499255"/>
               <a:ext cx="396000" cy="360000"/>
             </a:xfrm>
             <a:prstGeom prst="hexagon">
               <a:avLst/>
             </a:prstGeom>
             <a:blipFill>
-              <a:blip r:embed="rId6">
+              <a:blip r:embed="rId7">
                 <a:extLst>
                   <a:ext uri="{BEBA8EAE-BF5A-486C-A8C5-ECC9F3942E4B}">
                     <a14:imgProps xmlns:a14="http://schemas.microsoft.com/office/drawing/2010/main">
-                      <a14:imgLayer r:embed="rId7">
+                      <a14:imgLayer r:embed="rId8">
                         <a14:imgEffect>
                           <a14:brightnessContrast bright="-20000" contrast="-40000"/>
                         </a14:imgEffect>
@@ -10606,18 +10640,18 @@
           </p:nvSpPr>
           <p:spPr>
             <a:xfrm rot="5400000">
-              <a:off x="5438555" y="3509432"/>
+              <a:off x="7766217" y="3499255"/>
               <a:ext cx="396000" cy="360000"/>
             </a:xfrm>
             <a:prstGeom prst="hexagon">
               <a:avLst/>
             </a:prstGeom>
             <a:blipFill>
-              <a:blip r:embed="rId6">
+              <a:blip r:embed="rId7">
                 <a:extLst>
                   <a:ext uri="{BEBA8EAE-BF5A-486C-A8C5-ECC9F3942E4B}">
                     <a14:imgProps xmlns:a14="http://schemas.microsoft.com/office/drawing/2010/main">
-                      <a14:imgLayer r:embed="rId7">
+                      <a14:imgLayer r:embed="rId8">
                         <a14:imgEffect>
                           <a14:brightnessContrast bright="-20000" contrast="-40000"/>
                         </a14:imgEffect>
@@ -10673,18 +10707,18 @@
           </p:nvSpPr>
           <p:spPr>
             <a:xfrm rot="5400000">
-              <a:off x="5029280" y="3519365"/>
+              <a:off x="7356942" y="3509188"/>
               <a:ext cx="396000" cy="360000"/>
             </a:xfrm>
             <a:prstGeom prst="hexagon">
               <a:avLst/>
             </a:prstGeom>
             <a:blipFill>
-              <a:blip r:embed="rId6">
+              <a:blip r:embed="rId7">
                 <a:extLst>
                   <a:ext uri="{BEBA8EAE-BF5A-486C-A8C5-ECC9F3942E4B}">
                     <a14:imgProps xmlns:a14="http://schemas.microsoft.com/office/drawing/2010/main">
-                      <a14:imgLayer r:embed="rId7">
+                      <a14:imgLayer r:embed="rId8">
                         <a14:imgEffect>
                           <a14:brightnessContrast bright="-20000" contrast="-40000"/>
                         </a14:imgEffect>
@@ -10740,7 +10774,7 @@
           </p:nvSpPr>
           <p:spPr>
             <a:xfrm rot="5400000">
-              <a:off x="4615777" y="3519365"/>
+              <a:off x="6943439" y="3509188"/>
               <a:ext cx="396000" cy="360000"/>
             </a:xfrm>
             <a:prstGeom prst="hexagon">
@@ -10796,7 +10830,7 @@
           </p:nvCxnSpPr>
           <p:spPr>
             <a:xfrm>
-              <a:off x="4833677" y="3693406"/>
+              <a:off x="7161339" y="3683229"/>
               <a:ext cx="1269309" cy="0"/>
             </a:xfrm>
             <a:prstGeom prst="straightConnector1">
@@ -10837,7 +10871,7 @@
           </p:nvCxnSpPr>
           <p:spPr>
             <a:xfrm>
-              <a:off x="4835599" y="3696492"/>
+              <a:off x="7163261" y="3686315"/>
               <a:ext cx="898091" cy="0"/>
             </a:xfrm>
             <a:prstGeom prst="straightConnector1">
@@ -10878,7 +10912,7 @@
           </p:nvCxnSpPr>
           <p:spPr>
             <a:xfrm>
-              <a:off x="4835599" y="3696492"/>
+              <a:off x="7163261" y="3686315"/>
               <a:ext cx="498112" cy="0"/>
             </a:xfrm>
             <a:prstGeom prst="straightConnector1">
@@ -10917,14 +10951,14 @@
           </p:nvSpPr>
           <p:spPr>
             <a:xfrm>
-              <a:off x="4723777" y="3612492"/>
+              <a:off x="7051439" y="3602315"/>
               <a:ext cx="180000" cy="180000"/>
             </a:xfrm>
             <a:prstGeom prst="ellipse">
               <a:avLst/>
             </a:prstGeom>
             <a:blipFill>
-              <a:blip r:embed="rId8"/>
+              <a:blip r:embed="rId9"/>
               <a:tile tx="0" ty="0" sx="100000" sy="100000" flip="none" algn="tl"/>
             </a:blipFill>
             <a:ln w="12700">
@@ -10972,8 +11006,8 @@
           </p:nvSpPr>
           <p:spPr>
             <a:xfrm>
-              <a:off x="4556364" y="2810665"/>
-              <a:ext cx="1296933" cy="461665"/>
+              <a:off x="6860724" y="3048911"/>
+              <a:ext cx="1498030" cy="184666"/>
             </a:xfrm>
             <a:prstGeom prst="rect">
               <a:avLst/>
@@ -10981,20 +11015,20 @@
             <a:noFill/>
           </p:spPr>
           <p:txBody>
-            <a:bodyPr wrap="square" rtlCol="0">
+            <a:bodyPr wrap="square" lIns="0" tIns="0" rIns="0" bIns="0" rtlCol="0">
               <a:spAutoFit/>
             </a:bodyPr>
             <a:lstStyle/>
             <a:p>
               <a:r>
-                <a:rPr lang="fr-FR" sz="1200" b="1" dirty="0">
+                <a:rPr lang="en-US" sz="1200" b="1" noProof="0" dirty="0">
                   <a:solidFill>
                     <a:schemeClr val="bg1"/>
                   </a:solidFill>
                   <a:latin typeface="Segoe UI" panose="020B0502040204020203" pitchFamily="34" charset="0"/>
                   <a:cs typeface="Segoe UI" panose="020B0502040204020203" pitchFamily="34" charset="0"/>
                 </a:rPr>
-                <a:t>Résoudre les affrontements</a:t>
+                <a:t>Resolve any battles</a:t>
               </a:r>
             </a:p>
           </p:txBody>
@@ -11013,18 +11047,18 @@
           </p:nvSpPr>
           <p:spPr>
             <a:xfrm rot="5400000">
-              <a:off x="4842650" y="4286159"/>
+              <a:off x="7170312" y="4275982"/>
               <a:ext cx="390567" cy="368869"/>
             </a:xfrm>
             <a:prstGeom prst="hexagon">
               <a:avLst/>
             </a:prstGeom>
             <a:blipFill>
-              <a:blip r:embed="rId9">
+              <a:blip r:embed="rId10">
                 <a:extLst>
                   <a:ext uri="{BEBA8EAE-BF5A-486C-A8C5-ECC9F3942E4B}">
                     <a14:imgProps xmlns:a14="http://schemas.microsoft.com/office/drawing/2010/main">
-                      <a14:imgLayer r:embed="rId10">
+                      <a14:imgLayer r:embed="rId11">
                         <a14:imgEffect>
                           <a14:artisticGlass/>
                         </a14:imgEffect>
@@ -11080,7 +11114,7 @@
           </p:nvSpPr>
           <p:spPr>
             <a:xfrm>
-              <a:off x="4992428" y="4450813"/>
+              <a:off x="7320090" y="4440636"/>
               <a:ext cx="91844" cy="124982"/>
             </a:xfrm>
             <a:prstGeom prst="rect">
@@ -11134,7 +11168,7 @@
           </p:nvSpPr>
           <p:spPr>
             <a:xfrm>
-              <a:off x="4990387" y="4357221"/>
+              <a:off x="7318049" y="4347044"/>
               <a:ext cx="91844" cy="91844"/>
             </a:xfrm>
             <a:prstGeom prst="ellipse">
@@ -11188,7 +11222,7 @@
           </p:nvGrpSpPr>
           <p:grpSpPr>
             <a:xfrm>
-              <a:off x="5288677" y="4280401"/>
+              <a:off x="7616339" y="4270224"/>
               <a:ext cx="373999" cy="396000"/>
               <a:chOff x="5288677" y="4280401"/>
               <a:chExt cx="373999" cy="396000"/>
@@ -11215,11 +11249,11 @@
                 <a:avLst/>
               </a:prstGeom>
               <a:blipFill>
-                <a:blip r:embed="rId9">
+                <a:blip r:embed="rId10">
                   <a:extLst>
                     <a:ext uri="{BEBA8EAE-BF5A-486C-A8C5-ECC9F3942E4B}">
                       <a14:imgProps xmlns:a14="http://schemas.microsoft.com/office/drawing/2010/main">
-                        <a14:imgLayer r:embed="rId10">
+                        <a14:imgLayer r:embed="rId11">
                           <a14:imgEffect>
                             <a14:artisticGlass/>
                           </a14:imgEffect>
@@ -11330,18 +11364,18 @@
           </p:nvSpPr>
           <p:spPr>
             <a:xfrm rot="5400000">
-              <a:off x="5717986" y="4286310"/>
+              <a:off x="8045648" y="4276133"/>
               <a:ext cx="396000" cy="374000"/>
             </a:xfrm>
             <a:prstGeom prst="hexagon">
               <a:avLst/>
             </a:prstGeom>
             <a:blipFill>
-              <a:blip r:embed="rId9">
+              <a:blip r:embed="rId10">
                 <a:extLst>
                   <a:ext uri="{BEBA8EAE-BF5A-486C-A8C5-ECC9F3942E4B}">
                     <a14:imgProps xmlns:a14="http://schemas.microsoft.com/office/drawing/2010/main">
-                      <a14:imgLayer r:embed="rId10">
+                      <a14:imgLayer r:embed="rId11">
                         <a14:imgEffect>
                           <a14:artisticGlass/>
                         </a14:imgEffect>
@@ -11397,7 +11431,7 @@
           </p:nvSpPr>
           <p:spPr>
             <a:xfrm>
-              <a:off x="5789638" y="4384577"/>
+              <a:off x="8117300" y="4374400"/>
               <a:ext cx="93122" cy="177465"/>
             </a:xfrm>
             <a:prstGeom prst="rect">
@@ -11455,7 +11489,7 @@
             <a:blip>
               <a:extLst>
                 <a:ext uri="{96DAC541-7B7A-43D3-8B79-37D633B846F1}">
-                  <asvg:svgBlip xmlns:asvg="http://schemas.microsoft.com/office/drawing/2016/SVG/main" r:embed="rId11"/>
+                  <asvg:svgBlip xmlns:asvg="http://schemas.microsoft.com/office/drawing/2016/SVG/main" r:embed="rId12"/>
                 </a:ext>
               </a:extLst>
             </a:blip>
@@ -11466,7 +11500,7 @@
           </p:blipFill>
           <p:spPr>
             <a:xfrm>
-              <a:off x="5920592" y="4372477"/>
+              <a:off x="8248254" y="4362300"/>
               <a:ext cx="120894" cy="189565"/>
             </a:xfrm>
             <a:prstGeom prst="rect">
@@ -11488,19 +11522,19 @@
           </p:nvSpPr>
           <p:spPr>
             <a:xfrm>
-              <a:off x="4362394" y="1431551"/>
+              <a:off x="6690056" y="1421374"/>
               <a:ext cx="432000" cy="432000"/>
             </a:xfrm>
             <a:prstGeom prst="rect">
               <a:avLst/>
             </a:prstGeom>
             <a:blipFill dpi="0" rotWithShape="1">
-              <a:blip r:embed="rId3">
+              <a:blip r:embed="rId4">
                 <a:alphaModFix amt="50000"/>
                 <a:extLst>
                   <a:ext uri="{BEBA8EAE-BF5A-486C-A8C5-ECC9F3942E4B}">
                     <a14:imgProps xmlns:a14="http://schemas.microsoft.com/office/drawing/2010/main">
-                      <a14:imgLayer r:embed="rId4">
+                      <a14:imgLayer r:embed="rId5">
                         <a14:imgEffect>
                           <a14:artisticWatercolorSponge/>
                         </a14:imgEffect>
@@ -11569,19 +11603,19 @@
           </p:nvSpPr>
           <p:spPr>
             <a:xfrm>
-              <a:off x="6054394" y="1432769"/>
+              <a:off x="8382056" y="1422592"/>
               <a:ext cx="432000" cy="432000"/>
             </a:xfrm>
             <a:prstGeom prst="rect">
               <a:avLst/>
             </a:prstGeom>
             <a:blipFill dpi="0" rotWithShape="1">
-              <a:blip r:embed="rId3">
+              <a:blip r:embed="rId4">
                 <a:alphaModFix amt="50000"/>
                 <a:extLst>
                   <a:ext uri="{BEBA8EAE-BF5A-486C-A8C5-ECC9F3942E4B}">
                     <a14:imgProps xmlns:a14="http://schemas.microsoft.com/office/drawing/2010/main">
-                      <a14:imgLayer r:embed="rId4">
+                      <a14:imgLayer r:embed="rId5">
                         <a14:imgEffect>
                           <a14:artisticWatercolorSponge/>
                         </a14:imgEffect>
@@ -11651,11 +11685,11 @@
             <p:nvPr/>
           </p:nvPicPr>
           <p:blipFill>
-            <a:blip r:embed="rId12">
+            <a:blip r:embed="rId13">
               <a:extLst>
                 <a:ext uri="{BEBA8EAE-BF5A-486C-A8C5-ECC9F3942E4B}">
                   <a14:imgProps xmlns:a14="http://schemas.microsoft.com/office/drawing/2010/main">
-                    <a14:imgLayer r:embed="rId13">
+                    <a14:imgLayer r:embed="rId14">
                       <a14:imgEffect>
                         <a14:brightnessContrast contrast="40000"/>
                       </a14:imgEffect>
@@ -11673,7 +11707,7 @@
           </p:blipFill>
           <p:spPr>
             <a:xfrm>
-              <a:off x="5826000" y="2601711"/>
+              <a:off x="8088754" y="2226080"/>
               <a:ext cx="540000" cy="540000"/>
             </a:xfrm>
             <a:prstGeom prst="rect">
@@ -11684,10 +11718,10 @@
       </p:grpSp>
       <p:grpSp>
         <p:nvGrpSpPr>
-          <p:cNvPr id="114" name="Groupe 113">
+          <p:cNvPr id="13" name="Groupe 12">
             <a:extLst>
               <a:ext uri="{FF2B5EF4-FFF2-40B4-BE49-F238E27FC236}">
-                <a16:creationId xmlns:a16="http://schemas.microsoft.com/office/drawing/2014/main" id="{00830897-E65E-2748-86FD-61EECF9763D9}"/>
+                <a16:creationId xmlns:a16="http://schemas.microsoft.com/office/drawing/2014/main" id="{EC309F8B-7C90-63DD-51D0-8B40565C3202}"/>
               </a:ext>
             </a:extLst>
           </p:cNvPr>
@@ -11696,9 +11730,9 @@
         </p:nvGrpSpPr>
         <p:grpSpPr>
           <a:xfrm>
-            <a:off x="5725584" y="1428972"/>
+            <a:off x="3637601" y="1445132"/>
             <a:ext cx="2124000" cy="3312643"/>
-            <a:chOff x="5724348" y="1377054"/>
+            <a:chOff x="3927214" y="1421031"/>
             <a:chExt cx="2124000" cy="3312643"/>
           </a:xfrm>
         </p:grpSpPr>
@@ -11716,14 +11750,14 @@
           </p:nvSpPr>
           <p:spPr>
             <a:xfrm>
-              <a:off x="5724348" y="1377697"/>
+              <a:off x="3927214" y="1421674"/>
               <a:ext cx="2124000" cy="3312000"/>
             </a:xfrm>
             <a:prstGeom prst="rect">
               <a:avLst/>
             </a:prstGeom>
             <a:blipFill dpi="0" rotWithShape="1">
-              <a:blip r:embed="rId2">
+              <a:blip r:embed="rId3">
                 <a:alphaModFix amt="75000"/>
               </a:blip>
               <a:srcRect/>
@@ -11769,19 +11803,19 @@
           </p:nvSpPr>
           <p:spPr>
             <a:xfrm>
-              <a:off x="6156348" y="1377054"/>
+              <a:off x="4359214" y="1421031"/>
               <a:ext cx="1260000" cy="432000"/>
             </a:xfrm>
             <a:prstGeom prst="rect">
               <a:avLst/>
             </a:prstGeom>
             <a:blipFill dpi="0" rotWithShape="1">
-              <a:blip r:embed="rId3">
+              <a:blip r:embed="rId4">
                 <a:alphaModFix amt="50000"/>
                 <a:extLst>
                   <a:ext uri="{BEBA8EAE-BF5A-486C-A8C5-ECC9F3942E4B}">
                     <a14:imgProps xmlns:a14="http://schemas.microsoft.com/office/drawing/2010/main">
-                      <a14:imgLayer r:embed="rId4">
+                      <a14:imgLayer r:embed="rId5">
                         <a14:imgEffect>
                           <a14:artisticWatercolorSponge/>
                         </a14:imgEffect>
@@ -11824,14 +11858,14 @@
             <a:p>
               <a:pPr algn="ctr"/>
               <a:r>
-                <a:rPr lang="fr-FR" sz="1200" b="1" dirty="0">
+                <a:rPr lang="en-US" sz="1200" b="1" noProof="0" dirty="0">
                   <a:solidFill>
                     <a:schemeClr val="bg1"/>
                   </a:solidFill>
                   <a:latin typeface="Segoe UI" panose="020B0502040204020203" pitchFamily="34" charset="0"/>
                   <a:cs typeface="Segoe UI" panose="020B0502040204020203" pitchFamily="34" charset="0"/>
                 </a:rPr>
-                <a:t>Concentrer Troupes</a:t>
+                <a:t>Concentrate Troops</a:t>
               </a:r>
             </a:p>
           </p:txBody>
@@ -11850,7 +11884,7 @@
           </p:nvSpPr>
           <p:spPr>
             <a:xfrm>
-              <a:off x="5816649" y="4156265"/>
+              <a:off x="4019515" y="4200242"/>
               <a:ext cx="360000" cy="360000"/>
             </a:xfrm>
             <a:prstGeom prst="donut">
@@ -11859,7 +11893,7 @@
               </a:avLst>
             </a:prstGeom>
             <a:blipFill>
-              <a:blip r:embed="rId5"/>
+              <a:blip r:embed="rId6"/>
               <a:tile tx="0" ty="0" sx="100000" sy="100000" flip="none" algn="tl"/>
             </a:blipFill>
             <a:ln w="12700"/>
@@ -11912,18 +11946,18 @@
           </p:nvSpPr>
           <p:spPr>
             <a:xfrm rot="5400000">
-              <a:off x="7166197" y="3393894"/>
+              <a:off x="5369063" y="3437871"/>
               <a:ext cx="396000" cy="360000"/>
             </a:xfrm>
             <a:prstGeom prst="hexagon">
               <a:avLst/>
             </a:prstGeom>
             <a:blipFill>
-              <a:blip r:embed="rId6">
+              <a:blip r:embed="rId7">
                 <a:extLst>
                   <a:ext uri="{BEBA8EAE-BF5A-486C-A8C5-ECC9F3942E4B}">
                     <a14:imgProps xmlns:a14="http://schemas.microsoft.com/office/drawing/2010/main">
-                      <a14:imgLayer r:embed="rId7">
+                      <a14:imgLayer r:embed="rId8">
                         <a14:imgEffect>
                           <a14:brightnessContrast bright="-20000" contrast="-40000"/>
                         </a14:imgEffect>
@@ -11979,18 +12013,18 @@
           </p:nvSpPr>
           <p:spPr>
             <a:xfrm rot="5400000">
-              <a:off x="6756922" y="3393894"/>
+              <a:off x="4959788" y="3437871"/>
               <a:ext cx="396000" cy="360000"/>
             </a:xfrm>
             <a:prstGeom prst="hexagon">
               <a:avLst/>
             </a:prstGeom>
             <a:blipFill>
-              <a:blip r:embed="rId6">
+              <a:blip r:embed="rId7">
                 <a:extLst>
                   <a:ext uri="{BEBA8EAE-BF5A-486C-A8C5-ECC9F3942E4B}">
                     <a14:imgProps xmlns:a14="http://schemas.microsoft.com/office/drawing/2010/main">
-                      <a14:imgLayer r:embed="rId7">
+                      <a14:imgLayer r:embed="rId8">
                         <a14:imgEffect>
                           <a14:brightnessContrast bright="-20000" contrast="-40000"/>
                         </a14:imgEffect>
@@ -12046,18 +12080,18 @@
           </p:nvSpPr>
           <p:spPr>
             <a:xfrm rot="5400000">
-              <a:off x="6347647" y="3403827"/>
+              <a:off x="4550513" y="3447804"/>
               <a:ext cx="396000" cy="360000"/>
             </a:xfrm>
             <a:prstGeom prst="hexagon">
               <a:avLst/>
             </a:prstGeom>
             <a:blipFill>
-              <a:blip r:embed="rId6">
+              <a:blip r:embed="rId7">
                 <a:extLst>
                   <a:ext uri="{BEBA8EAE-BF5A-486C-A8C5-ECC9F3942E4B}">
                     <a14:imgProps xmlns:a14="http://schemas.microsoft.com/office/drawing/2010/main">
-                      <a14:imgLayer r:embed="rId7">
+                      <a14:imgLayer r:embed="rId8">
                         <a14:imgEffect>
                           <a14:brightnessContrast bright="-20000" contrast="-40000"/>
                         </a14:imgEffect>
@@ -12113,7 +12147,7 @@
           </p:nvSpPr>
           <p:spPr>
             <a:xfrm rot="5400000">
-              <a:off x="5934144" y="3403827"/>
+              <a:off x="4137010" y="3447804"/>
               <a:ext cx="396000" cy="360000"/>
             </a:xfrm>
             <a:prstGeom prst="hexagon">
@@ -12169,7 +12203,7 @@
           </p:nvCxnSpPr>
           <p:spPr>
             <a:xfrm flipH="1">
-              <a:off x="6051472" y="3577868"/>
+              <a:off x="4254338" y="3621845"/>
               <a:ext cx="1303580" cy="0"/>
             </a:xfrm>
             <a:prstGeom prst="straightConnector1">
@@ -12208,14 +12242,14 @@
           </p:nvSpPr>
           <p:spPr>
             <a:xfrm>
-              <a:off x="6455647" y="3493827"/>
+              <a:off x="4658513" y="3537804"/>
               <a:ext cx="180000" cy="180000"/>
             </a:xfrm>
             <a:prstGeom prst="ellipse">
               <a:avLst/>
             </a:prstGeom>
             <a:blipFill>
-              <a:blip r:embed="rId8"/>
+              <a:blip r:embed="rId9"/>
               <a:tile tx="0" ty="0" sx="100000" sy="100000" flip="none" algn="tl"/>
             </a:blipFill>
             <a:ln w="12700">
@@ -12263,14 +12297,14 @@
           </p:nvSpPr>
           <p:spPr>
             <a:xfrm>
-              <a:off x="6864533" y="3493827"/>
+              <a:off x="5067399" y="3537804"/>
               <a:ext cx="180000" cy="180000"/>
             </a:xfrm>
             <a:prstGeom prst="ellipse">
               <a:avLst/>
             </a:prstGeom>
             <a:blipFill>
-              <a:blip r:embed="rId8"/>
+              <a:blip r:embed="rId9"/>
               <a:tile tx="0" ty="0" sx="100000" sy="100000" flip="none" algn="tl"/>
             </a:blipFill>
             <a:ln w="12700">
@@ -12318,14 +12352,14 @@
           </p:nvSpPr>
           <p:spPr>
             <a:xfrm>
-              <a:off x="7274014" y="3483894"/>
+              <a:off x="5476880" y="3527871"/>
               <a:ext cx="180000" cy="180000"/>
             </a:xfrm>
             <a:prstGeom prst="ellipse">
               <a:avLst/>
             </a:prstGeom>
             <a:blipFill>
-              <a:blip r:embed="rId8"/>
+              <a:blip r:embed="rId9"/>
               <a:tile tx="0" ty="0" sx="100000" sy="100000" flip="none" algn="tl"/>
             </a:blipFill>
             <a:ln w="12700">
@@ -12373,8 +12407,8 @@
           </p:nvSpPr>
           <p:spPr>
             <a:xfrm>
-              <a:off x="5869699" y="1879795"/>
-              <a:ext cx="1846986" cy="830997"/>
+              <a:off x="4082288" y="2019556"/>
+              <a:ext cx="1404315" cy="738664"/>
             </a:xfrm>
             <a:prstGeom prst="rect">
               <a:avLst/>
@@ -12382,20 +12416,20 @@
             <a:noFill/>
           </p:spPr>
           <p:txBody>
-            <a:bodyPr wrap="square" rtlCol="0">
+            <a:bodyPr wrap="square" lIns="0" tIns="0" rIns="0" bIns="0" rtlCol="0">
               <a:spAutoFit/>
             </a:bodyPr>
             <a:lstStyle/>
             <a:p>
               <a:r>
-                <a:rPr lang="fr-FR" sz="1200" b="1" dirty="0">
+                <a:rPr lang="en-US" sz="1200" b="1" noProof="0" dirty="0">
                   <a:solidFill>
                     <a:schemeClr val="bg1"/>
                   </a:solidFill>
                   <a:latin typeface="Segoe UI" panose="020B0502040204020203" pitchFamily="34" charset="0"/>
                   <a:cs typeface="Segoe UI" panose="020B0502040204020203" pitchFamily="34" charset="0"/>
                 </a:rPr>
-                <a:t>Concentrer en ligne droite des troupes vers la tuile de commandement</a:t>
+                <a:t>Concentrate troops in a straight line toward the Command Tile</a:t>
               </a:r>
             </a:p>
           </p:txBody>
@@ -12414,8 +12448,8 @@
           </p:nvSpPr>
           <p:spPr>
             <a:xfrm>
-              <a:off x="5869699" y="2747790"/>
-              <a:ext cx="1260513" cy="461665"/>
+              <a:off x="4110397" y="3009914"/>
+              <a:ext cx="1453998" cy="257369"/>
             </a:xfrm>
             <a:prstGeom prst="rect">
               <a:avLst/>
@@ -12423,20 +12457,20 @@
             <a:noFill/>
           </p:spPr>
           <p:txBody>
-            <a:bodyPr wrap="square" rtlCol="0">
+            <a:bodyPr wrap="square" lIns="0" tIns="0" rIns="0" bIns="72000" rtlCol="0">
               <a:spAutoFit/>
             </a:bodyPr>
             <a:lstStyle/>
             <a:p>
               <a:r>
-                <a:rPr lang="fr-FR" sz="1200" b="1" dirty="0">
+                <a:rPr lang="en-US" sz="1200" b="1" noProof="0" dirty="0">
                   <a:solidFill>
                     <a:schemeClr val="bg1"/>
                   </a:solidFill>
                   <a:latin typeface="Segoe UI" panose="020B0502040204020203" pitchFamily="34" charset="0"/>
                   <a:cs typeface="Segoe UI" panose="020B0502040204020203" pitchFamily="34" charset="0"/>
                 </a:rPr>
-                <a:t>Résoudre les affrontements</a:t>
+                <a:t>Resolve any battles</a:t>
               </a:r>
             </a:p>
           </p:txBody>
@@ -12455,7 +12489,7 @@
           </p:nvGrpSpPr>
           <p:grpSpPr>
             <a:xfrm>
-              <a:off x="6264547" y="4140656"/>
+              <a:off x="4467413" y="4184633"/>
               <a:ext cx="368869" cy="390567"/>
               <a:chOff x="7775361" y="4195110"/>
               <a:chExt cx="368869" cy="390567"/>
@@ -12482,11 +12516,11 @@
                 <a:avLst/>
               </a:prstGeom>
               <a:blipFill>
-                <a:blip r:embed="rId9">
+                <a:blip r:embed="rId10">
                   <a:extLst>
                     <a:ext uri="{BEBA8EAE-BF5A-486C-A8C5-ECC9F3942E4B}">
                       <a14:imgProps xmlns:a14="http://schemas.microsoft.com/office/drawing/2010/main">
-                        <a14:imgLayer r:embed="rId10">
+                        <a14:imgLayer r:embed="rId11">
                           <a14:imgEffect>
                             <a14:artisticGlass/>
                           </a14:imgEffect>
@@ -12651,7 +12685,7 @@
           </p:nvGrpSpPr>
           <p:grpSpPr>
             <a:xfrm>
-              <a:off x="6716978" y="4142927"/>
+              <a:off x="4919844" y="4186904"/>
               <a:ext cx="373999" cy="396000"/>
               <a:chOff x="8227792" y="4197381"/>
               <a:chExt cx="373999" cy="396000"/>
@@ -12678,11 +12712,11 @@
                 <a:avLst/>
               </a:prstGeom>
               <a:blipFill>
-                <a:blip r:embed="rId9">
+                <a:blip r:embed="rId10">
                   <a:extLst>
                     <a:ext uri="{BEBA8EAE-BF5A-486C-A8C5-ECC9F3942E4B}">
                       <a14:imgProps xmlns:a14="http://schemas.microsoft.com/office/drawing/2010/main">
-                        <a14:imgLayer r:embed="rId10">
+                        <a14:imgLayer r:embed="rId11">
                           <a14:imgEffect>
                             <a14:artisticGlass/>
                           </a14:imgEffect>
@@ -12793,7 +12827,7 @@
           </p:nvGrpSpPr>
           <p:grpSpPr>
             <a:xfrm>
-              <a:off x="7169923" y="4145902"/>
+              <a:off x="5372789" y="4189879"/>
               <a:ext cx="374000" cy="396000"/>
               <a:chOff x="8680737" y="4200356"/>
               <a:chExt cx="374000" cy="396000"/>
@@ -12820,11 +12854,11 @@
                 <a:avLst/>
               </a:prstGeom>
               <a:blipFill>
-                <a:blip r:embed="rId9">
+                <a:blip r:embed="rId10">
                   <a:extLst>
                     <a:ext uri="{BEBA8EAE-BF5A-486C-A8C5-ECC9F3942E4B}">
                       <a14:imgProps xmlns:a14="http://schemas.microsoft.com/office/drawing/2010/main">
-                        <a14:imgLayer r:embed="rId10">
+                        <a14:imgLayer r:embed="rId11">
                           <a14:imgEffect>
                             <a14:artisticGlass/>
                           </a14:imgEffect>
@@ -12938,7 +12972,7 @@
               <a:blip>
                 <a:extLst>
                   <a:ext uri="{96DAC541-7B7A-43D3-8B79-37D633B846F1}">
-                    <asvg:svgBlip xmlns:asvg="http://schemas.microsoft.com/office/drawing/2016/SVG/main" r:embed="rId11"/>
+                    <asvg:svgBlip xmlns:asvg="http://schemas.microsoft.com/office/drawing/2016/SVG/main" r:embed="rId12"/>
                   </a:ext>
                 </a:extLst>
               </a:blip>
@@ -12972,19 +13006,19 @@
           </p:nvSpPr>
           <p:spPr>
             <a:xfrm>
-              <a:off x="5724348" y="1378288"/>
+              <a:off x="3927214" y="1422265"/>
               <a:ext cx="432000" cy="432000"/>
             </a:xfrm>
             <a:prstGeom prst="rect">
               <a:avLst/>
             </a:prstGeom>
             <a:blipFill dpi="0" rotWithShape="1">
-              <a:blip r:embed="rId3">
+              <a:blip r:embed="rId4">
                 <a:alphaModFix amt="50000"/>
                 <a:extLst>
                   <a:ext uri="{BEBA8EAE-BF5A-486C-A8C5-ECC9F3942E4B}">
                     <a14:imgProps xmlns:a14="http://schemas.microsoft.com/office/drawing/2010/main">
-                      <a14:imgLayer r:embed="rId4">
+                      <a14:imgLayer r:embed="rId5">
                         <a14:imgEffect>
                           <a14:artisticWatercolorSponge/>
                         </a14:imgEffect>
@@ -13053,19 +13087,19 @@
           </p:nvSpPr>
           <p:spPr>
             <a:xfrm>
-              <a:off x="7416348" y="1377054"/>
+              <a:off x="5619214" y="1421031"/>
               <a:ext cx="432000" cy="432000"/>
             </a:xfrm>
             <a:prstGeom prst="rect">
               <a:avLst/>
             </a:prstGeom>
             <a:blipFill dpi="0" rotWithShape="1">
-              <a:blip r:embed="rId3">
+              <a:blip r:embed="rId4">
                 <a:alphaModFix amt="50000"/>
                 <a:extLst>
                   <a:ext uri="{BEBA8EAE-BF5A-486C-A8C5-ECC9F3942E4B}">
                     <a14:imgProps xmlns:a14="http://schemas.microsoft.com/office/drawing/2010/main">
-                      <a14:imgLayer r:embed="rId4">
+                      <a14:imgLayer r:embed="rId5">
                         <a14:imgEffect>
                           <a14:artisticWatercolorSponge/>
                         </a14:imgEffect>
@@ -13135,11 +13169,11 @@
             <p:nvPr/>
           </p:nvPicPr>
           <p:blipFill>
-            <a:blip r:embed="rId12">
+            <a:blip r:embed="rId13">
               <a:extLst>
                 <a:ext uri="{BEBA8EAE-BF5A-486C-A8C5-ECC9F3942E4B}">
                   <a14:imgProps xmlns:a14="http://schemas.microsoft.com/office/drawing/2010/main">
-                    <a14:imgLayer r:embed="rId13">
+                    <a14:imgLayer r:embed="rId14">
                       <a14:imgEffect>
                         <a14:brightnessContrast contrast="40000"/>
                       </a14:imgEffect>
@@ -13157,7 +13191,7 @@
           </p:blipFill>
           <p:spPr>
             <a:xfrm>
-              <a:off x="7178214" y="2518907"/>
+              <a:off x="5349214" y="2226080"/>
               <a:ext cx="540000" cy="540000"/>
             </a:xfrm>
             <a:prstGeom prst="rect">
@@ -13168,10 +13202,10 @@
       </p:grpSp>
       <p:grpSp>
         <p:nvGrpSpPr>
-          <p:cNvPr id="12" name="Groupe 11">
+          <p:cNvPr id="7" name="Groupe 6">
             <a:extLst>
               <a:ext uri="{FF2B5EF4-FFF2-40B4-BE49-F238E27FC236}">
-                <a16:creationId xmlns:a16="http://schemas.microsoft.com/office/drawing/2014/main" id="{621A0E50-51D0-10A6-9B45-E9366FE3269F}"/>
+                <a16:creationId xmlns:a16="http://schemas.microsoft.com/office/drawing/2014/main" id="{5929E30B-3DC9-F9DB-1587-181EC6E47A01}"/>
               </a:ext>
             </a:extLst>
           </p:cNvPr>
@@ -13180,9 +13214,9 @@
         </p:nvGrpSpPr>
         <p:grpSpPr>
           <a:xfrm>
-            <a:off x="583316" y="1428694"/>
+            <a:off x="1040256" y="1446501"/>
             <a:ext cx="2124887" cy="3312766"/>
-            <a:chOff x="1537763" y="1464756"/>
+            <a:chOff x="1040256" y="1446501"/>
             <a:chExt cx="2124887" cy="3312766"/>
           </a:xfrm>
         </p:grpSpPr>
@@ -13200,14 +13234,14 @@
           </p:nvSpPr>
           <p:spPr>
             <a:xfrm>
-              <a:off x="1537763" y="1465522"/>
+              <a:off x="1040256" y="1447267"/>
               <a:ext cx="2124000" cy="3312000"/>
             </a:xfrm>
             <a:prstGeom prst="rect">
               <a:avLst/>
             </a:prstGeom>
             <a:blipFill dpi="0" rotWithShape="1">
-              <a:blip r:embed="rId2">
+              <a:blip r:embed="rId3">
                 <a:alphaModFix amt="75000"/>
               </a:blip>
               <a:srcRect/>
@@ -13253,19 +13287,19 @@
           </p:nvSpPr>
           <p:spPr>
             <a:xfrm>
-              <a:off x="1969764" y="1464756"/>
+              <a:off x="1472257" y="1446501"/>
               <a:ext cx="1259999" cy="432000"/>
             </a:xfrm>
             <a:prstGeom prst="rect">
               <a:avLst/>
             </a:prstGeom>
             <a:blipFill dpi="0" rotWithShape="1">
-              <a:blip r:embed="rId3">
+              <a:blip r:embed="rId4">
                 <a:alphaModFix amt="50000"/>
                 <a:extLst>
                   <a:ext uri="{BEBA8EAE-BF5A-486C-A8C5-ECC9F3942E4B}">
                     <a14:imgProps xmlns:a14="http://schemas.microsoft.com/office/drawing/2010/main">
-                      <a14:imgLayer r:embed="rId4">
+                      <a14:imgLayer r:embed="rId5">
                         <a14:imgEffect>
                           <a14:artisticWatercolorSponge/>
                         </a14:imgEffect>
@@ -13308,14 +13342,14 @@
             <a:p>
               <a:pPr algn="ctr"/>
               <a:r>
-                <a:rPr lang="fr-FR" sz="1200" b="1" dirty="0">
+                <a:rPr lang="en-US" sz="1200" b="1" noProof="0" dirty="0">
                   <a:solidFill>
                     <a:schemeClr val="bg1"/>
                   </a:solidFill>
                   <a:latin typeface="Segoe UI" panose="020B0502040204020203" pitchFamily="34" charset="0"/>
                   <a:cs typeface="Segoe UI" panose="020B0502040204020203" pitchFamily="34" charset="0"/>
                 </a:rPr>
-                <a:t>Construire donjon</a:t>
+                <a:t>Build Keep</a:t>
               </a:r>
             </a:p>
           </p:txBody>
@@ -13334,7 +13368,7 @@
           </p:nvSpPr>
           <p:spPr>
             <a:xfrm>
-              <a:off x="1640654" y="4297549"/>
+              <a:off x="1143147" y="4279294"/>
               <a:ext cx="360000" cy="360000"/>
             </a:xfrm>
             <a:prstGeom prst="donut">
@@ -13343,7 +13377,7 @@
               </a:avLst>
             </a:prstGeom>
             <a:blipFill>
-              <a:blip r:embed="rId5"/>
+              <a:blip r:embed="rId6"/>
               <a:tile tx="0" ty="0" sx="100000" sy="100000" flip="none" algn="tl"/>
             </a:blipFill>
             <a:ln w="12700"/>
@@ -13396,7 +13430,7 @@
           </p:nvSpPr>
           <p:spPr>
             <a:xfrm rot="5400000">
-              <a:off x="1755725" y="3320523"/>
+              <a:off x="1258218" y="3302268"/>
               <a:ext cx="648000" cy="612000"/>
             </a:xfrm>
             <a:prstGeom prst="hexagon">
@@ -13450,14 +13484,14 @@
           </p:nvSpPr>
           <p:spPr>
             <a:xfrm>
-              <a:off x="1989725" y="3391444"/>
+              <a:off x="1492218" y="3373189"/>
               <a:ext cx="180000" cy="180000"/>
             </a:xfrm>
             <a:prstGeom prst="ellipse">
               <a:avLst/>
             </a:prstGeom>
             <a:blipFill>
-              <a:blip r:embed="rId8"/>
+              <a:blip r:embed="rId9"/>
               <a:tile tx="0" ty="0" sx="100000" sy="100000" flip="none" algn="tl"/>
             </a:blipFill>
             <a:ln w="12700">
@@ -13505,14 +13539,14 @@
           </p:nvSpPr>
           <p:spPr>
             <a:xfrm>
-              <a:off x="2119242" y="3610970"/>
+              <a:off x="1621735" y="3592715"/>
               <a:ext cx="180000" cy="180000"/>
             </a:xfrm>
             <a:prstGeom prst="ellipse">
               <a:avLst/>
             </a:prstGeom>
             <a:blipFill>
-              <a:blip r:embed="rId8"/>
+              <a:blip r:embed="rId9"/>
               <a:tile tx="0" ty="0" sx="100000" sy="100000" flip="none" algn="tl"/>
             </a:blipFill>
             <a:ln w="12700">
@@ -13560,14 +13594,14 @@
           </p:nvSpPr>
           <p:spPr>
             <a:xfrm>
-              <a:off x="1848595" y="3605466"/>
+              <a:off x="1351088" y="3587211"/>
               <a:ext cx="180000" cy="180000"/>
             </a:xfrm>
             <a:prstGeom prst="ellipse">
               <a:avLst/>
             </a:prstGeom>
             <a:blipFill>
-              <a:blip r:embed="rId8"/>
+              <a:blip r:embed="rId9"/>
               <a:tile tx="0" ty="0" sx="100000" sy="100000" flip="none" algn="tl"/>
             </a:blipFill>
             <a:ln w="12700">
@@ -13615,7 +13649,7 @@
           </p:nvSpPr>
           <p:spPr>
             <a:xfrm rot="5400000">
-              <a:off x="2814838" y="3321356"/>
+              <a:off x="2317331" y="3303101"/>
               <a:ext cx="648000" cy="612000"/>
             </a:xfrm>
             <a:prstGeom prst="hexagon">
@@ -13669,14 +13703,14 @@
           </p:nvSpPr>
           <p:spPr>
             <a:xfrm>
-              <a:off x="3059451" y="3433495"/>
+              <a:off x="2561944" y="3415240"/>
               <a:ext cx="180000" cy="360000"/>
             </a:xfrm>
             <a:prstGeom prst="rect">
               <a:avLst/>
             </a:prstGeom>
             <a:blipFill>
-              <a:blip r:embed="rId8"/>
+              <a:blip r:embed="rId9"/>
               <a:tile tx="0" ty="0" sx="100000" sy="100000" flip="none" algn="tl"/>
             </a:blipFill>
             <a:ln w="12700">
@@ -13724,8 +13758,8 @@
           </p:nvSpPr>
           <p:spPr>
             <a:xfrm>
-              <a:off x="1607355" y="1968526"/>
-              <a:ext cx="1612957" cy="1015663"/>
+              <a:off x="1261184" y="2131241"/>
+              <a:ext cx="1301855" cy="738664"/>
             </a:xfrm>
             <a:prstGeom prst="rect">
               <a:avLst/>
@@ -13733,40 +13767,28 @@
             <a:noFill/>
           </p:spPr>
           <p:txBody>
-            <a:bodyPr wrap="square" rtlCol="0">
+            <a:bodyPr wrap="square" lIns="0" tIns="0" rIns="0" bIns="0" rtlCol="0">
               <a:spAutoFit/>
             </a:bodyPr>
             <a:lstStyle/>
             <a:p>
               <a:r>
-                <a:rPr lang="fr-FR" sz="1200" b="1" dirty="0">
+                <a:rPr lang="en-US" sz="1200" b="1" dirty="0">
                   <a:solidFill>
                     <a:schemeClr val="bg1"/>
                   </a:solidFill>
                   <a:latin typeface="Segoe UI" panose="020B0502040204020203" pitchFamily="34" charset="0"/>
                   <a:cs typeface="Segoe UI" panose="020B0502040204020203" pitchFamily="34" charset="0"/>
                 </a:rPr>
-                <a:t>Défausser 3 troupes de la tuile de commandement pour construire</a:t>
+                <a:t>Discard 3 troops from Command Tile to Cemetery to place a Keep</a:t>
               </a:r>
-              <a:br>
-                <a:rPr lang="fr-FR" sz="1200" b="1" dirty="0">
-                  <a:solidFill>
-                    <a:schemeClr val="bg1"/>
-                  </a:solidFill>
-                  <a:latin typeface="Segoe UI" panose="020B0502040204020203" pitchFamily="34" charset="0"/>
-                  <a:cs typeface="Segoe UI" panose="020B0502040204020203" pitchFamily="34" charset="0"/>
-                </a:rPr>
-              </a:br>
-              <a:r>
-                <a:rPr lang="fr-FR" sz="1200" b="1" dirty="0">
-                  <a:solidFill>
-                    <a:schemeClr val="bg1"/>
-                  </a:solidFill>
-                  <a:latin typeface="Segoe UI" panose="020B0502040204020203" pitchFamily="34" charset="0"/>
-                  <a:cs typeface="Segoe UI" panose="020B0502040204020203" pitchFamily="34" charset="0"/>
-                </a:rPr>
-                <a:t>un donjon</a:t>
-              </a:r>
+              <a:endParaRPr lang="fr-FR" sz="1200" b="1" dirty="0">
+                <a:solidFill>
+                  <a:schemeClr val="bg1"/>
+                </a:solidFill>
+                <a:latin typeface="Segoe UI" panose="020B0502040204020203" pitchFamily="34" charset="0"/>
+                <a:cs typeface="Segoe UI" panose="020B0502040204020203" pitchFamily="34" charset="0"/>
+              </a:endParaRPr>
             </a:p>
           </p:txBody>
         </p:sp>
@@ -13786,7 +13808,7 @@
           </p:nvCxnSpPr>
           <p:spPr>
             <a:xfrm>
-              <a:off x="2476114" y="3616275"/>
+              <a:off x="1978607" y="3598020"/>
               <a:ext cx="281448" cy="7387"/>
             </a:xfrm>
             <a:prstGeom prst="straightConnector1">
@@ -13828,18 +13850,18 @@
           </p:nvSpPr>
           <p:spPr>
             <a:xfrm rot="5400000">
-              <a:off x="2092696" y="4297360"/>
+              <a:off x="1595189" y="4279105"/>
               <a:ext cx="390567" cy="368869"/>
             </a:xfrm>
             <a:prstGeom prst="hexagon">
               <a:avLst/>
             </a:prstGeom>
             <a:blipFill>
-              <a:blip r:embed="rId9">
+              <a:blip r:embed="rId10">
                 <a:extLst>
                   <a:ext uri="{BEBA8EAE-BF5A-486C-A8C5-ECC9F3942E4B}">
                     <a14:imgProps xmlns:a14="http://schemas.microsoft.com/office/drawing/2010/main">
-                      <a14:imgLayer r:embed="rId10">
+                      <a14:imgLayer r:embed="rId11">
                         <a14:imgEffect>
                           <a14:artisticGlass/>
                         </a14:imgEffect>
@@ -13895,7 +13917,7 @@
           </p:nvSpPr>
           <p:spPr>
             <a:xfrm>
-              <a:off x="2242474" y="4462014"/>
+              <a:off x="1744967" y="4443759"/>
               <a:ext cx="91844" cy="124982"/>
             </a:xfrm>
             <a:prstGeom prst="rect">
@@ -13949,7 +13971,7 @@
           </p:nvSpPr>
           <p:spPr>
             <a:xfrm>
-              <a:off x="2240433" y="4368422"/>
+              <a:off x="1742926" y="4350167"/>
               <a:ext cx="91844" cy="91844"/>
             </a:xfrm>
             <a:prstGeom prst="ellipse">
@@ -14003,19 +14025,19 @@
           </p:nvSpPr>
           <p:spPr>
             <a:xfrm>
-              <a:off x="1537763" y="1467957"/>
+              <a:off x="1040256" y="1449702"/>
               <a:ext cx="432000" cy="432000"/>
             </a:xfrm>
             <a:prstGeom prst="rect">
               <a:avLst/>
             </a:prstGeom>
             <a:blipFill dpi="0" rotWithShape="1">
-              <a:blip r:embed="rId3">
+              <a:blip r:embed="rId4">
                 <a:alphaModFix amt="50000"/>
                 <a:extLst>
                   <a:ext uri="{BEBA8EAE-BF5A-486C-A8C5-ECC9F3942E4B}">
                     <a14:imgProps xmlns:a14="http://schemas.microsoft.com/office/drawing/2010/main">
-                      <a14:imgLayer r:embed="rId4">
+                      <a14:imgLayer r:embed="rId5">
                         <a14:imgEffect>
                           <a14:artisticWatercolorSponge/>
                         </a14:imgEffect>
@@ -14081,7 +14103,7 @@
           </p:nvSpPr>
           <p:spPr>
             <a:xfrm>
-              <a:off x="1676973" y="1561092"/>
+              <a:off x="1179466" y="1542837"/>
               <a:ext cx="153581" cy="245730"/>
             </a:xfrm>
             <a:prstGeom prst="rect">
@@ -14135,19 +14157,19 @@
           </p:nvSpPr>
           <p:spPr>
             <a:xfrm>
-              <a:off x="3230650" y="1465522"/>
+              <a:off x="2733143" y="1447267"/>
               <a:ext cx="432000" cy="432000"/>
             </a:xfrm>
             <a:prstGeom prst="rect">
               <a:avLst/>
             </a:prstGeom>
             <a:blipFill dpi="0" rotWithShape="1">
-              <a:blip r:embed="rId3">
+              <a:blip r:embed="rId4">
                 <a:alphaModFix amt="50000"/>
                 <a:extLst>
                   <a:ext uri="{BEBA8EAE-BF5A-486C-A8C5-ECC9F3942E4B}">
                     <a14:imgProps xmlns:a14="http://schemas.microsoft.com/office/drawing/2010/main">
-                      <a14:imgLayer r:embed="rId4">
+                      <a14:imgLayer r:embed="rId5">
                         <a14:imgEffect>
                           <a14:artisticWatercolorSponge/>
                         </a14:imgEffect>
@@ -14213,7 +14235,7 @@
           </p:nvSpPr>
           <p:spPr>
             <a:xfrm>
-              <a:off x="3369860" y="1558657"/>
+              <a:off x="2872353" y="1540402"/>
               <a:ext cx="153581" cy="245730"/>
             </a:xfrm>
             <a:prstGeom prst="rect">
@@ -14271,7 +14293,7 @@
             <a:blip>
               <a:extLst>
                 <a:ext uri="{96DAC541-7B7A-43D3-8B79-37D633B846F1}">
-                  <asvg:svgBlip xmlns:asvg="http://schemas.microsoft.com/office/drawing/2016/SVG/main" r:embed="rId14"/>
+                  <asvg:svgBlip xmlns:asvg="http://schemas.microsoft.com/office/drawing/2016/SVG/main" r:embed="rId15"/>
                 </a:ext>
               </a:extLst>
             </a:blip>
@@ -14282,7 +14304,7 @@
           </p:blipFill>
           <p:spPr>
             <a:xfrm>
-              <a:off x="3172545" y="2080248"/>
+              <a:off x="2593617" y="2135647"/>
               <a:ext cx="375375" cy="837672"/>
             </a:xfrm>
             <a:prstGeom prst="rect">
@@ -14290,2014 +14312,6 @@
             </a:prstGeom>
           </p:spPr>
         </p:pic>
-      </p:grpSp>
-      <p:grpSp>
-        <p:nvGrpSpPr>
-          <p:cNvPr id="113" name="Groupe 112">
-            <a:extLst>
-              <a:ext uri="{FF2B5EF4-FFF2-40B4-BE49-F238E27FC236}">
-                <a16:creationId xmlns:a16="http://schemas.microsoft.com/office/drawing/2014/main" id="{76305CE6-BD74-EED8-6B91-ECFB588D84AE}"/>
-              </a:ext>
-            </a:extLst>
-          </p:cNvPr>
-          <p:cNvGrpSpPr/>
-          <p:nvPr/>
-        </p:nvGrpSpPr>
-        <p:grpSpPr>
-          <a:xfrm>
-            <a:off x="3168983" y="1428994"/>
-            <a:ext cx="2124000" cy="3312600"/>
-            <a:chOff x="3152197" y="1377054"/>
-            <a:chExt cx="2124000" cy="3312600"/>
-          </a:xfrm>
-        </p:grpSpPr>
-        <p:sp>
-          <p:nvSpPr>
-            <p:cNvPr id="13" name="Rectangle 12">
-              <a:extLst>
-                <a:ext uri="{FF2B5EF4-FFF2-40B4-BE49-F238E27FC236}">
-                  <a16:creationId xmlns:a16="http://schemas.microsoft.com/office/drawing/2014/main" id="{52A96650-6338-C965-A822-5029031CC6DC}"/>
-                </a:ext>
-              </a:extLst>
-            </p:cNvPr>
-            <p:cNvSpPr/>
-            <p:nvPr/>
-          </p:nvSpPr>
-          <p:spPr>
-            <a:xfrm>
-              <a:off x="3152197" y="1377654"/>
-              <a:ext cx="2124000" cy="3312000"/>
-            </a:xfrm>
-            <a:prstGeom prst="rect">
-              <a:avLst/>
-            </a:prstGeom>
-            <a:blipFill dpi="0" rotWithShape="1">
-              <a:blip r:embed="rId2">
-                <a:alphaModFix amt="75000"/>
-              </a:blip>
-              <a:srcRect/>
-              <a:tile tx="0" ty="0" sx="100000" sy="100000" flip="none" algn="tl"/>
-            </a:blipFill>
-          </p:spPr>
-          <p:style>
-            <a:lnRef idx="2">
-              <a:schemeClr val="accent1">
-                <a:shade val="15000"/>
-              </a:schemeClr>
-            </a:lnRef>
-            <a:fillRef idx="1">
-              <a:schemeClr val="accent1"/>
-            </a:fillRef>
-            <a:effectRef idx="0">
-              <a:schemeClr val="accent1"/>
-            </a:effectRef>
-            <a:fontRef idx="minor">
-              <a:schemeClr val="lt1"/>
-            </a:fontRef>
-          </p:style>
-          <p:txBody>
-            <a:bodyPr rtlCol="0" anchor="ctr"/>
-            <a:lstStyle/>
-            <a:p>
-              <a:pPr algn="ctr"/>
-              <a:endParaRPr lang="fr-FR"/>
-            </a:p>
-          </p:txBody>
-        </p:sp>
-        <p:sp>
-          <p:nvSpPr>
-            <p:cNvPr id="16" name="Rectangle 15">
-              <a:extLst>
-                <a:ext uri="{FF2B5EF4-FFF2-40B4-BE49-F238E27FC236}">
-                  <a16:creationId xmlns:a16="http://schemas.microsoft.com/office/drawing/2014/main" id="{506753A5-C82D-B253-9945-D200D8D25323}"/>
-                </a:ext>
-              </a:extLst>
-            </p:cNvPr>
-            <p:cNvSpPr/>
-            <p:nvPr/>
-          </p:nvSpPr>
-          <p:spPr>
-            <a:xfrm>
-              <a:off x="3584197" y="1377272"/>
-              <a:ext cx="1260000" cy="432000"/>
-            </a:xfrm>
-            <a:prstGeom prst="rect">
-              <a:avLst/>
-            </a:prstGeom>
-            <a:blipFill dpi="0" rotWithShape="1">
-              <a:blip r:embed="rId3">
-                <a:alphaModFix amt="50000"/>
-                <a:extLst>
-                  <a:ext uri="{BEBA8EAE-BF5A-486C-A8C5-ECC9F3942E4B}">
-                    <a14:imgProps xmlns:a14="http://schemas.microsoft.com/office/drawing/2010/main">
-                      <a14:imgLayer r:embed="rId4">
-                        <a14:imgEffect>
-                          <a14:artisticWatercolorSponge/>
-                        </a14:imgEffect>
-                        <a14:imgEffect>
-                          <a14:brightnessContrast bright="-40000" contrast="20000"/>
-                        </a14:imgEffect>
-                      </a14:imgLayer>
-                    </a14:imgProps>
-                  </a:ext>
-                </a:extLst>
-              </a:blip>
-              <a:srcRect/>
-              <a:tile tx="0" ty="0" sx="100000" sy="100000" flip="none" algn="tl"/>
-            </a:blipFill>
-            <a:ln>
-              <a:solidFill>
-                <a:schemeClr val="tx1"/>
-              </a:solidFill>
-            </a:ln>
-          </p:spPr>
-          <p:style>
-            <a:lnRef idx="2">
-              <a:schemeClr val="accent1">
-                <a:shade val="15000"/>
-              </a:schemeClr>
-            </a:lnRef>
-            <a:fillRef idx="1">
-              <a:schemeClr val="accent1"/>
-            </a:fillRef>
-            <a:effectRef idx="0">
-              <a:schemeClr val="accent1"/>
-            </a:effectRef>
-            <a:fontRef idx="minor">
-              <a:schemeClr val="lt1"/>
-            </a:fontRef>
-          </p:style>
-          <p:txBody>
-            <a:bodyPr rtlCol="0" anchor="ctr"/>
-            <a:lstStyle/>
-            <a:p>
-              <a:pPr algn="ctr"/>
-              <a:r>
-                <a:rPr lang="fr-FR" sz="1200" b="1" dirty="0">
-                  <a:solidFill>
-                    <a:schemeClr val="bg1"/>
-                  </a:solidFill>
-                  <a:latin typeface="Segoe UI" panose="020B0502040204020203" pitchFamily="34" charset="0"/>
-                  <a:cs typeface="Segoe UI" panose="020B0502040204020203" pitchFamily="34" charset="0"/>
-                </a:rPr>
-                <a:t>Déplacer</a:t>
-              </a:r>
-              <a:br>
-                <a:rPr lang="fr-FR" sz="1200" b="1" dirty="0">
-                  <a:solidFill>
-                    <a:schemeClr val="bg1"/>
-                  </a:solidFill>
-                  <a:latin typeface="Segoe UI" panose="020B0502040204020203" pitchFamily="34" charset="0"/>
-                  <a:cs typeface="Segoe UI" panose="020B0502040204020203" pitchFamily="34" charset="0"/>
-                </a:rPr>
-              </a:br>
-              <a:r>
-                <a:rPr lang="fr-FR" sz="1200" b="1" dirty="0">
-                  <a:solidFill>
-                    <a:schemeClr val="bg1"/>
-                  </a:solidFill>
-                  <a:latin typeface="Segoe UI" panose="020B0502040204020203" pitchFamily="34" charset="0"/>
-                  <a:cs typeface="Segoe UI" panose="020B0502040204020203" pitchFamily="34" charset="0"/>
-                </a:rPr>
-                <a:t>Troupes</a:t>
-              </a:r>
-            </a:p>
-          </p:txBody>
-        </p:sp>
-        <p:sp>
-          <p:nvSpPr>
-            <p:cNvPr id="17" name="ZoneTexte 16">
-              <a:extLst>
-                <a:ext uri="{FF2B5EF4-FFF2-40B4-BE49-F238E27FC236}">
-                  <a16:creationId xmlns:a16="http://schemas.microsoft.com/office/drawing/2014/main" id="{C6637799-A5F0-47C8-A229-54D6E170AF4C}"/>
-                </a:ext>
-              </a:extLst>
-            </p:cNvPr>
-            <p:cNvSpPr txBox="1"/>
-            <p:nvPr/>
-          </p:nvSpPr>
-          <p:spPr>
-            <a:xfrm>
-              <a:off x="3227224" y="1860393"/>
-              <a:ext cx="1956665" cy="830997"/>
-            </a:xfrm>
-            <a:prstGeom prst="rect">
-              <a:avLst/>
-            </a:prstGeom>
-            <a:noFill/>
-          </p:spPr>
-          <p:txBody>
-            <a:bodyPr wrap="square" rtlCol="0">
-              <a:spAutoFit/>
-            </a:bodyPr>
-            <a:lstStyle/>
-            <a:p>
-              <a:r>
-                <a:rPr lang="fr-FR" sz="1200" b="1" dirty="0">
-                  <a:solidFill>
-                    <a:schemeClr val="bg1"/>
-                  </a:solidFill>
-                  <a:latin typeface="Segoe UI" panose="020B0502040204020203" pitchFamily="34" charset="0"/>
-                  <a:cs typeface="Segoe UI" panose="020B0502040204020203" pitchFamily="34" charset="0"/>
-                </a:rPr>
-                <a:t>Disperser</a:t>
-              </a:r>
-              <a:r>
-                <a:rPr lang="fr-FR" sz="1200" b="1" dirty="0">
-                  <a:solidFill>
-                    <a:srgbClr val="FFC000"/>
-                  </a:solidFill>
-                  <a:latin typeface="Segoe UI" panose="020B0502040204020203" pitchFamily="34" charset="0"/>
-                  <a:cs typeface="Segoe UI" panose="020B0502040204020203" pitchFamily="34" charset="0"/>
-                </a:rPr>
-                <a:t>/Concentrer </a:t>
-              </a:r>
-              <a:r>
-                <a:rPr lang="fr-FR" sz="1200" b="1" dirty="0">
-                  <a:solidFill>
-                    <a:schemeClr val="bg1"/>
-                  </a:solidFill>
-                  <a:latin typeface="Segoe UI" panose="020B0502040204020203" pitchFamily="34" charset="0"/>
-                  <a:cs typeface="Segoe UI" panose="020B0502040204020203" pitchFamily="34" charset="0"/>
-                </a:rPr>
-                <a:t>en ligne droite des troupes depuis</a:t>
-              </a:r>
-              <a:r>
-                <a:rPr lang="fr-FR" sz="1200" b="1" dirty="0">
-                  <a:solidFill>
-                    <a:srgbClr val="FFC000"/>
-                  </a:solidFill>
-                  <a:latin typeface="Segoe UI" panose="020B0502040204020203" pitchFamily="34" charset="0"/>
-                  <a:cs typeface="Segoe UI" panose="020B0502040204020203" pitchFamily="34" charset="0"/>
-                </a:rPr>
-                <a:t>/vers </a:t>
-              </a:r>
-              <a:r>
-                <a:rPr lang="fr-FR" sz="1200" b="1" dirty="0">
-                  <a:solidFill>
-                    <a:schemeClr val="bg1"/>
-                  </a:solidFill>
-                  <a:latin typeface="Segoe UI" panose="020B0502040204020203" pitchFamily="34" charset="0"/>
-                  <a:cs typeface="Segoe UI" panose="020B0502040204020203" pitchFamily="34" charset="0"/>
-                </a:rPr>
-                <a:t>la tuile de commandement</a:t>
-              </a:r>
-            </a:p>
-          </p:txBody>
-        </p:sp>
-        <p:sp>
-          <p:nvSpPr>
-            <p:cNvPr id="18" name="Cercle : creux 17">
-              <a:extLst>
-                <a:ext uri="{FF2B5EF4-FFF2-40B4-BE49-F238E27FC236}">
-                  <a16:creationId xmlns:a16="http://schemas.microsoft.com/office/drawing/2014/main" id="{85795305-0810-41DE-4F69-A2023AC272EE}"/>
-                </a:ext>
-              </a:extLst>
-            </p:cNvPr>
-            <p:cNvSpPr/>
-            <p:nvPr/>
-          </p:nvSpPr>
-          <p:spPr>
-            <a:xfrm>
-              <a:off x="3214707" y="4240638"/>
-              <a:ext cx="360000" cy="360000"/>
-            </a:xfrm>
-            <a:prstGeom prst="donut">
-              <a:avLst>
-                <a:gd name="adj" fmla="val 15271"/>
-              </a:avLst>
-            </a:prstGeom>
-            <a:blipFill>
-              <a:blip r:embed="rId5"/>
-              <a:tile tx="0" ty="0" sx="100000" sy="100000" flip="none" algn="tl"/>
-            </a:blipFill>
-            <a:ln w="12700"/>
-          </p:spPr>
-          <p:style>
-            <a:lnRef idx="2">
-              <a:schemeClr val="dk1">
-                <a:shade val="15000"/>
-              </a:schemeClr>
-            </a:lnRef>
-            <a:fillRef idx="1">
-              <a:schemeClr val="dk1"/>
-            </a:fillRef>
-            <a:effectRef idx="0">
-              <a:schemeClr val="dk1"/>
-            </a:effectRef>
-            <a:fontRef idx="minor">
-              <a:schemeClr val="lt1"/>
-            </a:fontRef>
-          </p:style>
-          <p:txBody>
-            <a:bodyPr rtlCol="0" anchor="ctr"/>
-            <a:lstStyle/>
-            <a:p>
-              <a:pPr algn="ctr"/>
-              <a:r>
-                <a:rPr lang="fr-FR" b="1" dirty="0">
-                  <a:solidFill>
-                    <a:schemeClr val="bg1"/>
-                  </a:solidFill>
-                  <a:latin typeface="Segoe UI" panose="020B0502040204020203" pitchFamily="34" charset="0"/>
-                  <a:cs typeface="Segoe UI" panose="020B0502040204020203" pitchFamily="34" charset="0"/>
-                </a:rPr>
-                <a:t>1</a:t>
-              </a:r>
-            </a:p>
-          </p:txBody>
-        </p:sp>
-        <p:grpSp>
-          <p:nvGrpSpPr>
-            <p:cNvPr id="110" name="Groupe 109">
-              <a:extLst>
-                <a:ext uri="{FF2B5EF4-FFF2-40B4-BE49-F238E27FC236}">
-                  <a16:creationId xmlns:a16="http://schemas.microsoft.com/office/drawing/2014/main" id="{1689C847-B266-7325-47F2-24864D823EE2}"/>
-                </a:ext>
-              </a:extLst>
-            </p:cNvPr>
-            <p:cNvGrpSpPr/>
-            <p:nvPr/>
-          </p:nvGrpSpPr>
-          <p:grpSpPr>
-            <a:xfrm>
-              <a:off x="3349730" y="3222293"/>
-              <a:ext cx="1592053" cy="405933"/>
-              <a:chOff x="3369594" y="3325288"/>
-              <a:chExt cx="1592053" cy="405933"/>
-            </a:xfrm>
-          </p:grpSpPr>
-          <p:sp>
-            <p:nvSpPr>
-              <p:cNvPr id="21" name="Hexagone 20">
-                <a:extLst>
-                  <a:ext uri="{FF2B5EF4-FFF2-40B4-BE49-F238E27FC236}">
-                    <a16:creationId xmlns:a16="http://schemas.microsoft.com/office/drawing/2014/main" id="{E623FA65-9F3F-6561-380C-FA92A62B9B76}"/>
-                  </a:ext>
-                </a:extLst>
-              </p:cNvPr>
-              <p:cNvSpPr/>
-              <p:nvPr/>
-            </p:nvSpPr>
-            <p:spPr>
-              <a:xfrm rot="5400000">
-                <a:off x="4583647" y="3343288"/>
-                <a:ext cx="396000" cy="360000"/>
-              </a:xfrm>
-              <a:prstGeom prst="hexagon">
-                <a:avLst/>
-              </a:prstGeom>
-              <a:blipFill>
-                <a:blip r:embed="rId6">
-                  <a:extLst>
-                    <a:ext uri="{BEBA8EAE-BF5A-486C-A8C5-ECC9F3942E4B}">
-                      <a14:imgProps xmlns:a14="http://schemas.microsoft.com/office/drawing/2010/main">
-                        <a14:imgLayer r:embed="rId7">
-                          <a14:imgEffect>
-                            <a14:brightnessContrast bright="-20000" contrast="-40000"/>
-                          </a14:imgEffect>
-                        </a14:imgLayer>
-                      </a14:imgProps>
-                    </a:ext>
-                  </a:extLst>
-                </a:blip>
-                <a:tile tx="0" ty="0" sx="100000" sy="100000" flip="none" algn="tl"/>
-              </a:blipFill>
-              <a:ln w="12700">
-                <a:solidFill>
-                  <a:schemeClr val="tx1"/>
-                </a:solidFill>
-              </a:ln>
-            </p:spPr>
-            <p:style>
-              <a:lnRef idx="2">
-                <a:schemeClr val="accent1">
-                  <a:shade val="15000"/>
-                </a:schemeClr>
-              </a:lnRef>
-              <a:fillRef idx="1">
-                <a:schemeClr val="accent1"/>
-              </a:fillRef>
-              <a:effectRef idx="0">
-                <a:schemeClr val="accent1"/>
-              </a:effectRef>
-              <a:fontRef idx="minor">
-                <a:schemeClr val="lt1"/>
-              </a:fontRef>
-            </p:style>
-            <p:txBody>
-              <a:bodyPr rtlCol="0" anchor="ctr"/>
-              <a:lstStyle/>
-              <a:p>
-                <a:pPr algn="ctr"/>
-                <a:endParaRPr lang="fr-FR"/>
-              </a:p>
-            </p:txBody>
-          </p:sp>
-          <p:sp>
-            <p:nvSpPr>
-              <p:cNvPr id="24" name="Hexagone 23">
-                <a:extLst>
-                  <a:ext uri="{FF2B5EF4-FFF2-40B4-BE49-F238E27FC236}">
-                    <a16:creationId xmlns:a16="http://schemas.microsoft.com/office/drawing/2014/main" id="{B807D213-2629-3659-B228-C391CB1AAEAC}"/>
-                  </a:ext>
-                </a:extLst>
-              </p:cNvPr>
-              <p:cNvSpPr/>
-              <p:nvPr/>
-            </p:nvSpPr>
-            <p:spPr>
-              <a:xfrm rot="5400000">
-                <a:off x="4174372" y="3343288"/>
-                <a:ext cx="396000" cy="360000"/>
-              </a:xfrm>
-              <a:prstGeom prst="hexagon">
-                <a:avLst/>
-              </a:prstGeom>
-              <a:blipFill>
-                <a:blip r:embed="rId6">
-                  <a:extLst>
-                    <a:ext uri="{BEBA8EAE-BF5A-486C-A8C5-ECC9F3942E4B}">
-                      <a14:imgProps xmlns:a14="http://schemas.microsoft.com/office/drawing/2010/main">
-                        <a14:imgLayer r:embed="rId7">
-                          <a14:imgEffect>
-                            <a14:brightnessContrast bright="-20000" contrast="-40000"/>
-                          </a14:imgEffect>
-                        </a14:imgLayer>
-                      </a14:imgProps>
-                    </a:ext>
-                  </a:extLst>
-                </a:blip>
-                <a:tile tx="0" ty="0" sx="100000" sy="100000" flip="none" algn="tl"/>
-              </a:blipFill>
-              <a:ln w="12700">
-                <a:solidFill>
-                  <a:schemeClr val="tx1"/>
-                </a:solidFill>
-              </a:ln>
-            </p:spPr>
-            <p:style>
-              <a:lnRef idx="2">
-                <a:schemeClr val="accent1">
-                  <a:shade val="15000"/>
-                </a:schemeClr>
-              </a:lnRef>
-              <a:fillRef idx="1">
-                <a:schemeClr val="accent1"/>
-              </a:fillRef>
-              <a:effectRef idx="0">
-                <a:schemeClr val="accent1"/>
-              </a:effectRef>
-              <a:fontRef idx="minor">
-                <a:schemeClr val="lt1"/>
-              </a:fontRef>
-            </p:style>
-            <p:txBody>
-              <a:bodyPr rtlCol="0" anchor="ctr"/>
-              <a:lstStyle/>
-              <a:p>
-                <a:pPr algn="ctr"/>
-                <a:endParaRPr lang="fr-FR"/>
-              </a:p>
-            </p:txBody>
-          </p:sp>
-          <p:sp>
-            <p:nvSpPr>
-              <p:cNvPr id="29" name="Hexagone 28">
-                <a:extLst>
-                  <a:ext uri="{FF2B5EF4-FFF2-40B4-BE49-F238E27FC236}">
-                    <a16:creationId xmlns:a16="http://schemas.microsoft.com/office/drawing/2014/main" id="{71C32418-B647-C696-341E-F8C554281360}"/>
-                  </a:ext>
-                </a:extLst>
-              </p:cNvPr>
-              <p:cNvSpPr/>
-              <p:nvPr/>
-            </p:nvSpPr>
-            <p:spPr>
-              <a:xfrm rot="5400000">
-                <a:off x="3765097" y="3353221"/>
-                <a:ext cx="396000" cy="360000"/>
-              </a:xfrm>
-              <a:prstGeom prst="hexagon">
-                <a:avLst/>
-              </a:prstGeom>
-              <a:blipFill>
-                <a:blip r:embed="rId6">
-                  <a:extLst>
-                    <a:ext uri="{BEBA8EAE-BF5A-486C-A8C5-ECC9F3942E4B}">
-                      <a14:imgProps xmlns:a14="http://schemas.microsoft.com/office/drawing/2010/main">
-                        <a14:imgLayer r:embed="rId7">
-                          <a14:imgEffect>
-                            <a14:brightnessContrast bright="-20000" contrast="-40000"/>
-                          </a14:imgEffect>
-                        </a14:imgLayer>
-                      </a14:imgProps>
-                    </a:ext>
-                  </a:extLst>
-                </a:blip>
-                <a:tile tx="0" ty="0" sx="100000" sy="100000" flip="none" algn="tl"/>
-              </a:blipFill>
-              <a:ln w="12700">
-                <a:solidFill>
-                  <a:schemeClr val="tx1"/>
-                </a:solidFill>
-              </a:ln>
-            </p:spPr>
-            <p:style>
-              <a:lnRef idx="2">
-                <a:schemeClr val="accent1">
-                  <a:shade val="15000"/>
-                </a:schemeClr>
-              </a:lnRef>
-              <a:fillRef idx="1">
-                <a:schemeClr val="accent1"/>
-              </a:fillRef>
-              <a:effectRef idx="0">
-                <a:schemeClr val="accent1"/>
-              </a:effectRef>
-              <a:fontRef idx="minor">
-                <a:schemeClr val="lt1"/>
-              </a:fontRef>
-            </p:style>
-            <p:txBody>
-              <a:bodyPr rtlCol="0" anchor="ctr"/>
-              <a:lstStyle/>
-              <a:p>
-                <a:pPr algn="ctr"/>
-                <a:endParaRPr lang="fr-FR"/>
-              </a:p>
-            </p:txBody>
-          </p:sp>
-          <p:sp>
-            <p:nvSpPr>
-              <p:cNvPr id="33" name="Hexagone 32">
-                <a:extLst>
-                  <a:ext uri="{FF2B5EF4-FFF2-40B4-BE49-F238E27FC236}">
-                    <a16:creationId xmlns:a16="http://schemas.microsoft.com/office/drawing/2014/main" id="{77F92EA8-3433-367B-00B8-58DEBBF07D4F}"/>
-                  </a:ext>
-                </a:extLst>
-              </p:cNvPr>
-              <p:cNvSpPr/>
-              <p:nvPr/>
-            </p:nvSpPr>
-            <p:spPr>
-              <a:xfrm rot="5400000">
-                <a:off x="3351594" y="3353221"/>
-                <a:ext cx="396000" cy="360000"/>
-              </a:xfrm>
-              <a:prstGeom prst="hexagon">
-                <a:avLst/>
-              </a:prstGeom>
-              <a:solidFill>
-                <a:schemeClr val="bg1"/>
-              </a:solidFill>
-              <a:ln w="12700">
-                <a:solidFill>
-                  <a:schemeClr val="tx1"/>
-                </a:solidFill>
-              </a:ln>
-            </p:spPr>
-            <p:style>
-              <a:lnRef idx="2">
-                <a:schemeClr val="accent1">
-                  <a:shade val="15000"/>
-                </a:schemeClr>
-              </a:lnRef>
-              <a:fillRef idx="1">
-                <a:schemeClr val="accent1"/>
-              </a:fillRef>
-              <a:effectRef idx="0">
-                <a:schemeClr val="accent1"/>
-              </a:effectRef>
-              <a:fontRef idx="minor">
-                <a:schemeClr val="lt1"/>
-              </a:fontRef>
-            </p:style>
-            <p:txBody>
-              <a:bodyPr rtlCol="0" anchor="ctr"/>
-              <a:lstStyle/>
-              <a:p>
-                <a:pPr algn="ctr"/>
-                <a:endParaRPr lang="fr-FR"/>
-              </a:p>
-            </p:txBody>
-          </p:sp>
-          <p:cxnSp>
-            <p:nvCxnSpPr>
-              <p:cNvPr id="36" name="Connecteur droit avec flèche 35">
-                <a:extLst>
-                  <a:ext uri="{FF2B5EF4-FFF2-40B4-BE49-F238E27FC236}">
-                    <a16:creationId xmlns:a16="http://schemas.microsoft.com/office/drawing/2014/main" id="{736882CF-9DC7-3AD3-A901-225A6A5369D8}"/>
-                  </a:ext>
-                </a:extLst>
-              </p:cNvPr>
-              <p:cNvCxnSpPr>
-                <a:cxnSpLocks/>
-              </p:cNvCxnSpPr>
-              <p:nvPr/>
-            </p:nvCxnSpPr>
-            <p:spPr>
-              <a:xfrm>
-                <a:off x="3569494" y="3527262"/>
-                <a:ext cx="1269309" cy="0"/>
-              </a:xfrm>
-              <a:prstGeom prst="straightConnector1">
-                <a:avLst/>
-              </a:prstGeom>
-              <a:ln w="57150">
-                <a:solidFill>
-                  <a:schemeClr val="tx1"/>
-                </a:solidFill>
-                <a:tailEnd type="triangle"/>
-              </a:ln>
-            </p:spPr>
-            <p:style>
-              <a:lnRef idx="2">
-                <a:schemeClr val="dk1"/>
-              </a:lnRef>
-              <a:fillRef idx="0">
-                <a:schemeClr val="dk1"/>
-              </a:fillRef>
-              <a:effectRef idx="1">
-                <a:schemeClr val="dk1"/>
-              </a:effectRef>
-              <a:fontRef idx="minor">
-                <a:schemeClr val="tx1"/>
-              </a:fontRef>
-            </p:style>
-          </p:cxnSp>
-          <p:cxnSp>
-            <p:nvCxnSpPr>
-              <p:cNvPr id="40" name="Connecteur droit avec flèche 39">
-                <a:extLst>
-                  <a:ext uri="{FF2B5EF4-FFF2-40B4-BE49-F238E27FC236}">
-                    <a16:creationId xmlns:a16="http://schemas.microsoft.com/office/drawing/2014/main" id="{99EB6A6A-F4C8-7000-15FA-EDF9378269CE}"/>
-                  </a:ext>
-                </a:extLst>
-              </p:cNvPr>
-              <p:cNvCxnSpPr>
-                <a:cxnSpLocks/>
-              </p:cNvCxnSpPr>
-              <p:nvPr/>
-            </p:nvCxnSpPr>
-            <p:spPr>
-              <a:xfrm>
-                <a:off x="3571416" y="3530348"/>
-                <a:ext cx="898091" cy="0"/>
-              </a:xfrm>
-              <a:prstGeom prst="straightConnector1">
-                <a:avLst/>
-              </a:prstGeom>
-              <a:ln w="57150">
-                <a:solidFill>
-                  <a:schemeClr val="tx1"/>
-                </a:solidFill>
-                <a:tailEnd type="triangle"/>
-              </a:ln>
-            </p:spPr>
-            <p:style>
-              <a:lnRef idx="2">
-                <a:schemeClr val="dk1"/>
-              </a:lnRef>
-              <a:fillRef idx="0">
-                <a:schemeClr val="dk1"/>
-              </a:fillRef>
-              <a:effectRef idx="1">
-                <a:schemeClr val="dk1"/>
-              </a:effectRef>
-              <a:fontRef idx="minor">
-                <a:schemeClr val="tx1"/>
-              </a:fontRef>
-            </p:style>
-          </p:cxnSp>
-          <p:cxnSp>
-            <p:nvCxnSpPr>
-              <p:cNvPr id="44" name="Connecteur droit avec flèche 43">
-                <a:extLst>
-                  <a:ext uri="{FF2B5EF4-FFF2-40B4-BE49-F238E27FC236}">
-                    <a16:creationId xmlns:a16="http://schemas.microsoft.com/office/drawing/2014/main" id="{C95CD993-F2EC-0B30-5C9F-F069E221074B}"/>
-                  </a:ext>
-                </a:extLst>
-              </p:cNvPr>
-              <p:cNvCxnSpPr>
-                <a:cxnSpLocks/>
-              </p:cNvCxnSpPr>
-              <p:nvPr/>
-            </p:nvCxnSpPr>
-            <p:spPr>
-              <a:xfrm>
-                <a:off x="3571416" y="3530348"/>
-                <a:ext cx="498112" cy="0"/>
-              </a:xfrm>
-              <a:prstGeom prst="straightConnector1">
-                <a:avLst/>
-              </a:prstGeom>
-              <a:ln w="57150">
-                <a:solidFill>
-                  <a:schemeClr val="tx1"/>
-                </a:solidFill>
-                <a:tailEnd type="triangle"/>
-              </a:ln>
-            </p:spPr>
-            <p:style>
-              <a:lnRef idx="2">
-                <a:schemeClr val="dk1"/>
-              </a:lnRef>
-              <a:fillRef idx="0">
-                <a:schemeClr val="dk1"/>
-              </a:fillRef>
-              <a:effectRef idx="1">
-                <a:schemeClr val="dk1"/>
-              </a:effectRef>
-              <a:fontRef idx="minor">
-                <a:schemeClr val="tx1"/>
-              </a:fontRef>
-            </p:style>
-          </p:cxnSp>
-          <p:sp>
-            <p:nvSpPr>
-              <p:cNvPr id="47" name="Ellipse 46">
-                <a:extLst>
-                  <a:ext uri="{FF2B5EF4-FFF2-40B4-BE49-F238E27FC236}">
-                    <a16:creationId xmlns:a16="http://schemas.microsoft.com/office/drawing/2014/main" id="{150349EB-492C-940D-1F8F-8155A4479238}"/>
-                  </a:ext>
-                </a:extLst>
-              </p:cNvPr>
-              <p:cNvSpPr/>
-              <p:nvPr/>
-            </p:nvSpPr>
-            <p:spPr>
-              <a:xfrm>
-                <a:off x="3459594" y="3446348"/>
-                <a:ext cx="180000" cy="180000"/>
-              </a:xfrm>
-              <a:prstGeom prst="ellipse">
-                <a:avLst/>
-              </a:prstGeom>
-              <a:blipFill>
-                <a:blip r:embed="rId8"/>
-                <a:tile tx="0" ty="0" sx="100000" sy="100000" flip="none" algn="tl"/>
-              </a:blipFill>
-              <a:ln w="12700">
-                <a:solidFill>
-                  <a:schemeClr val="tx1"/>
-                </a:solidFill>
-              </a:ln>
-            </p:spPr>
-            <p:style>
-              <a:lnRef idx="2">
-                <a:schemeClr val="dk1">
-                  <a:shade val="15000"/>
-                </a:schemeClr>
-              </a:lnRef>
-              <a:fillRef idx="1">
-                <a:schemeClr val="dk1"/>
-              </a:fillRef>
-              <a:effectRef idx="0">
-                <a:schemeClr val="dk1"/>
-              </a:effectRef>
-              <a:fontRef idx="minor">
-                <a:schemeClr val="lt1"/>
-              </a:fontRef>
-            </p:style>
-            <p:txBody>
-              <a:bodyPr rtlCol="0" anchor="ctr"/>
-              <a:lstStyle/>
-              <a:p>
-                <a:pPr algn="ctr"/>
-                <a:endParaRPr lang="fr-FR"/>
-              </a:p>
-            </p:txBody>
-          </p:sp>
-        </p:grpSp>
-        <p:sp>
-          <p:nvSpPr>
-            <p:cNvPr id="58" name="ZoneTexte 57">
-              <a:extLst>
-                <a:ext uri="{FF2B5EF4-FFF2-40B4-BE49-F238E27FC236}">
-                  <a16:creationId xmlns:a16="http://schemas.microsoft.com/office/drawing/2014/main" id="{F51D4383-C9D9-27BF-16FE-F3D6BD97089C}"/>
-                </a:ext>
-              </a:extLst>
-            </p:cNvPr>
-            <p:cNvSpPr txBox="1"/>
-            <p:nvPr/>
-          </p:nvSpPr>
-          <p:spPr>
-            <a:xfrm>
-              <a:off x="3240355" y="2715144"/>
-              <a:ext cx="1296933" cy="461665"/>
-            </a:xfrm>
-            <a:prstGeom prst="rect">
-              <a:avLst/>
-            </a:prstGeom>
-            <a:noFill/>
-          </p:spPr>
-          <p:txBody>
-            <a:bodyPr wrap="square" rtlCol="0">
-              <a:spAutoFit/>
-            </a:bodyPr>
-            <a:lstStyle/>
-            <a:p>
-              <a:r>
-                <a:rPr lang="fr-FR" sz="1200" b="1" dirty="0">
-                  <a:solidFill>
-                    <a:schemeClr val="bg1"/>
-                  </a:solidFill>
-                  <a:latin typeface="Segoe UI" panose="020B0502040204020203" pitchFamily="34" charset="0"/>
-                  <a:cs typeface="Segoe UI" panose="020B0502040204020203" pitchFamily="34" charset="0"/>
-                </a:rPr>
-                <a:t>Résoudre les affrontements</a:t>
-              </a:r>
-            </a:p>
-          </p:txBody>
-        </p:sp>
-        <p:sp>
-          <p:nvSpPr>
-            <p:cNvPr id="75" name="Hexagone 74">
-              <a:extLst>
-                <a:ext uri="{FF2B5EF4-FFF2-40B4-BE49-F238E27FC236}">
-                  <a16:creationId xmlns:a16="http://schemas.microsoft.com/office/drawing/2014/main" id="{0251A5E2-1C13-CFD0-9521-2EA4F5A79E12}"/>
-                </a:ext>
-              </a:extLst>
-            </p:cNvPr>
-            <p:cNvSpPr/>
-            <p:nvPr/>
-          </p:nvSpPr>
-          <p:spPr>
-            <a:xfrm rot="5400000">
-              <a:off x="3632453" y="4231662"/>
-              <a:ext cx="390567" cy="368869"/>
-            </a:xfrm>
-            <a:prstGeom prst="hexagon">
-              <a:avLst/>
-            </a:prstGeom>
-            <a:blipFill>
-              <a:blip r:embed="rId9">
-                <a:extLst>
-                  <a:ext uri="{BEBA8EAE-BF5A-486C-A8C5-ECC9F3942E4B}">
-                    <a14:imgProps xmlns:a14="http://schemas.microsoft.com/office/drawing/2010/main">
-                      <a14:imgLayer r:embed="rId10">
-                        <a14:imgEffect>
-                          <a14:artisticGlass/>
-                        </a14:imgEffect>
-                      </a14:imgLayer>
-                    </a14:imgProps>
-                  </a:ext>
-                </a:extLst>
-              </a:blip>
-              <a:tile tx="0" ty="0" sx="100000" sy="100000" flip="none" algn="tl"/>
-            </a:blipFill>
-            <a:ln w="12700">
-              <a:solidFill>
-                <a:schemeClr val="tx1"/>
-              </a:solidFill>
-            </a:ln>
-          </p:spPr>
-          <p:style>
-            <a:lnRef idx="2">
-              <a:schemeClr val="accent1">
-                <a:shade val="15000"/>
-              </a:schemeClr>
-            </a:lnRef>
-            <a:fillRef idx="1">
-              <a:schemeClr val="accent1"/>
-            </a:fillRef>
-            <a:effectRef idx="0">
-              <a:schemeClr val="accent1"/>
-            </a:effectRef>
-            <a:fontRef idx="minor">
-              <a:schemeClr val="lt1"/>
-            </a:fontRef>
-          </p:style>
-          <p:txBody>
-            <a:bodyPr rtlCol="0" anchor="ctr"/>
-            <a:lstStyle/>
-            <a:p>
-              <a:pPr algn="ctr"/>
-              <a:endParaRPr lang="fr-FR"/>
-            </a:p>
-          </p:txBody>
-        </p:sp>
-        <p:sp>
-          <p:nvSpPr>
-            <p:cNvPr id="76" name="Rectangle 75">
-              <a:extLst>
-                <a:ext uri="{FF2B5EF4-FFF2-40B4-BE49-F238E27FC236}">
-                  <a16:creationId xmlns:a16="http://schemas.microsoft.com/office/drawing/2014/main" id="{D8990306-6172-B672-2E45-27485F40E252}"/>
-                </a:ext>
-              </a:extLst>
-            </p:cNvPr>
-            <p:cNvSpPr/>
-            <p:nvPr/>
-          </p:nvSpPr>
-          <p:spPr>
-            <a:xfrm>
-              <a:off x="3782231" y="4396316"/>
-              <a:ext cx="91844" cy="124982"/>
-            </a:xfrm>
-            <a:prstGeom prst="rect">
-              <a:avLst/>
-            </a:prstGeom>
-            <a:solidFill>
-              <a:schemeClr val="bg1"/>
-            </a:solidFill>
-            <a:ln w="12700">
-              <a:solidFill>
-                <a:schemeClr val="tx1"/>
-              </a:solidFill>
-            </a:ln>
-          </p:spPr>
-          <p:style>
-            <a:lnRef idx="2">
-              <a:schemeClr val="accent1">
-                <a:shade val="15000"/>
-              </a:schemeClr>
-            </a:lnRef>
-            <a:fillRef idx="1">
-              <a:schemeClr val="accent1"/>
-            </a:fillRef>
-            <a:effectRef idx="0">
-              <a:schemeClr val="accent1"/>
-            </a:effectRef>
-            <a:fontRef idx="minor">
-              <a:schemeClr val="lt1"/>
-            </a:fontRef>
-          </p:style>
-          <p:txBody>
-            <a:bodyPr rtlCol="0" anchor="ctr"/>
-            <a:lstStyle/>
-            <a:p>
-              <a:pPr algn="ctr"/>
-              <a:endParaRPr lang="fr-FR"/>
-            </a:p>
-          </p:txBody>
-        </p:sp>
-        <p:sp>
-          <p:nvSpPr>
-            <p:cNvPr id="81" name="Ellipse 80">
-              <a:extLst>
-                <a:ext uri="{FF2B5EF4-FFF2-40B4-BE49-F238E27FC236}">
-                  <a16:creationId xmlns:a16="http://schemas.microsoft.com/office/drawing/2014/main" id="{60BA55C4-D641-236B-F765-0F396A8689C4}"/>
-                </a:ext>
-              </a:extLst>
-            </p:cNvPr>
-            <p:cNvSpPr/>
-            <p:nvPr/>
-          </p:nvSpPr>
-          <p:spPr>
-            <a:xfrm>
-              <a:off x="3780190" y="4302724"/>
-              <a:ext cx="91844" cy="91844"/>
-            </a:xfrm>
-            <a:prstGeom prst="ellipse">
-              <a:avLst/>
-            </a:prstGeom>
-            <a:solidFill>
-              <a:schemeClr val="bg1"/>
-            </a:solidFill>
-            <a:ln w="12700">
-              <a:solidFill>
-                <a:schemeClr val="tx1"/>
-              </a:solidFill>
-            </a:ln>
-          </p:spPr>
-          <p:style>
-            <a:lnRef idx="2">
-              <a:schemeClr val="dk1">
-                <a:shade val="15000"/>
-              </a:schemeClr>
-            </a:lnRef>
-            <a:fillRef idx="1">
-              <a:schemeClr val="dk1"/>
-            </a:fillRef>
-            <a:effectRef idx="0">
-              <a:schemeClr val="dk1"/>
-            </a:effectRef>
-            <a:fontRef idx="minor">
-              <a:schemeClr val="lt1"/>
-            </a:fontRef>
-          </p:style>
-          <p:txBody>
-            <a:bodyPr rtlCol="0" anchor="ctr"/>
-            <a:lstStyle/>
-            <a:p>
-              <a:pPr algn="ctr"/>
-              <a:endParaRPr lang="fr-FR"/>
-            </a:p>
-          </p:txBody>
-        </p:sp>
-        <p:sp>
-          <p:nvSpPr>
-            <p:cNvPr id="100" name="Hexagone 99">
-              <a:extLst>
-                <a:ext uri="{FF2B5EF4-FFF2-40B4-BE49-F238E27FC236}">
-                  <a16:creationId xmlns:a16="http://schemas.microsoft.com/office/drawing/2014/main" id="{4DAEB8A2-D883-3AE5-4974-BBFCC420530D}"/>
-                </a:ext>
-              </a:extLst>
-            </p:cNvPr>
-            <p:cNvSpPr/>
-            <p:nvPr/>
-          </p:nvSpPr>
-          <p:spPr>
-            <a:xfrm rot="5400000">
-              <a:off x="4067480" y="4236904"/>
-              <a:ext cx="396000" cy="373999"/>
-            </a:xfrm>
-            <a:prstGeom prst="hexagon">
-              <a:avLst/>
-            </a:prstGeom>
-            <a:blipFill>
-              <a:blip r:embed="rId9">
-                <a:extLst>
-                  <a:ext uri="{BEBA8EAE-BF5A-486C-A8C5-ECC9F3942E4B}">
-                    <a14:imgProps xmlns:a14="http://schemas.microsoft.com/office/drawing/2010/main">
-                      <a14:imgLayer r:embed="rId10">
-                        <a14:imgEffect>
-                          <a14:artisticGlass/>
-                        </a14:imgEffect>
-                      </a14:imgLayer>
-                    </a14:imgProps>
-                  </a:ext>
-                </a:extLst>
-              </a:blip>
-              <a:tile tx="0" ty="0" sx="100000" sy="100000" flip="none" algn="tl"/>
-            </a:blipFill>
-            <a:ln w="12700">
-              <a:solidFill>
-                <a:schemeClr val="tx1"/>
-              </a:solidFill>
-            </a:ln>
-          </p:spPr>
-          <p:style>
-            <a:lnRef idx="2">
-              <a:schemeClr val="accent1">
-                <a:shade val="15000"/>
-              </a:schemeClr>
-            </a:lnRef>
-            <a:fillRef idx="1">
-              <a:schemeClr val="accent1"/>
-            </a:fillRef>
-            <a:effectRef idx="0">
-              <a:schemeClr val="accent1"/>
-            </a:effectRef>
-            <a:fontRef idx="minor">
-              <a:schemeClr val="lt1"/>
-            </a:fontRef>
-          </p:style>
-          <p:txBody>
-            <a:bodyPr rtlCol="0" anchor="ctr"/>
-            <a:lstStyle/>
-            <a:p>
-              <a:pPr algn="ctr"/>
-              <a:endParaRPr lang="fr-FR"/>
-            </a:p>
-          </p:txBody>
-        </p:sp>
-        <p:sp>
-          <p:nvSpPr>
-            <p:cNvPr id="101" name="Rectangle 100">
-              <a:extLst>
-                <a:ext uri="{FF2B5EF4-FFF2-40B4-BE49-F238E27FC236}">
-                  <a16:creationId xmlns:a16="http://schemas.microsoft.com/office/drawing/2014/main" id="{F583FF82-982B-BB60-FDAA-E5248049DA6F}"/>
-                </a:ext>
-              </a:extLst>
-            </p:cNvPr>
-            <p:cNvSpPr/>
-            <p:nvPr/>
-          </p:nvSpPr>
-          <p:spPr>
-            <a:xfrm>
-              <a:off x="4208421" y="4335171"/>
-              <a:ext cx="93121" cy="177465"/>
-            </a:xfrm>
-            <a:prstGeom prst="rect">
-              <a:avLst/>
-            </a:prstGeom>
-            <a:solidFill>
-              <a:schemeClr val="bg1"/>
-            </a:solidFill>
-            <a:ln w="12700">
-              <a:solidFill>
-                <a:schemeClr val="tx1"/>
-              </a:solidFill>
-            </a:ln>
-          </p:spPr>
-          <p:style>
-            <a:lnRef idx="2">
-              <a:schemeClr val="accent1">
-                <a:shade val="15000"/>
-              </a:schemeClr>
-            </a:lnRef>
-            <a:fillRef idx="1">
-              <a:schemeClr val="accent1"/>
-            </a:fillRef>
-            <a:effectRef idx="0">
-              <a:schemeClr val="accent1"/>
-            </a:effectRef>
-            <a:fontRef idx="minor">
-              <a:schemeClr val="lt1"/>
-            </a:fontRef>
-          </p:style>
-          <p:txBody>
-            <a:bodyPr rtlCol="0" anchor="ctr"/>
-            <a:lstStyle/>
-            <a:p>
-              <a:pPr algn="ctr"/>
-              <a:endParaRPr lang="fr-FR"/>
-            </a:p>
-          </p:txBody>
-        </p:sp>
-        <p:sp>
-          <p:nvSpPr>
-            <p:cNvPr id="83" name="Hexagone 82">
-              <a:extLst>
-                <a:ext uri="{FF2B5EF4-FFF2-40B4-BE49-F238E27FC236}">
-                  <a16:creationId xmlns:a16="http://schemas.microsoft.com/office/drawing/2014/main" id="{E9727FA2-A160-4828-A2A6-E0CC100A5CFB}"/>
-                </a:ext>
-              </a:extLst>
-            </p:cNvPr>
-            <p:cNvSpPr/>
-            <p:nvPr/>
-          </p:nvSpPr>
-          <p:spPr>
-            <a:xfrm rot="5400000">
-              <a:off x="4507789" y="4231813"/>
-              <a:ext cx="396000" cy="374000"/>
-            </a:xfrm>
-            <a:prstGeom prst="hexagon">
-              <a:avLst/>
-            </a:prstGeom>
-            <a:blipFill>
-              <a:blip r:embed="rId9">
-                <a:extLst>
-                  <a:ext uri="{BEBA8EAE-BF5A-486C-A8C5-ECC9F3942E4B}">
-                    <a14:imgProps xmlns:a14="http://schemas.microsoft.com/office/drawing/2010/main">
-                      <a14:imgLayer r:embed="rId10">
-                        <a14:imgEffect>
-                          <a14:artisticGlass/>
-                        </a14:imgEffect>
-                      </a14:imgLayer>
-                    </a14:imgProps>
-                  </a:ext>
-                </a:extLst>
-              </a:blip>
-              <a:tile tx="0" ty="0" sx="100000" sy="100000" flip="none" algn="tl"/>
-            </a:blipFill>
-            <a:ln w="12700">
-              <a:solidFill>
-                <a:schemeClr val="tx1"/>
-              </a:solidFill>
-            </a:ln>
-          </p:spPr>
-          <p:style>
-            <a:lnRef idx="2">
-              <a:schemeClr val="accent1">
-                <a:shade val="15000"/>
-              </a:schemeClr>
-            </a:lnRef>
-            <a:fillRef idx="1">
-              <a:schemeClr val="accent1"/>
-            </a:fillRef>
-            <a:effectRef idx="0">
-              <a:schemeClr val="accent1"/>
-            </a:effectRef>
-            <a:fontRef idx="minor">
-              <a:schemeClr val="lt1"/>
-            </a:fontRef>
-          </p:style>
-          <p:txBody>
-            <a:bodyPr rtlCol="0" anchor="ctr"/>
-            <a:lstStyle/>
-            <a:p>
-              <a:pPr algn="ctr"/>
-              <a:endParaRPr lang="fr-FR"/>
-            </a:p>
-          </p:txBody>
-        </p:sp>
-        <p:sp>
-          <p:nvSpPr>
-            <p:cNvPr id="84" name="Rectangle 83">
-              <a:extLst>
-                <a:ext uri="{FF2B5EF4-FFF2-40B4-BE49-F238E27FC236}">
-                  <a16:creationId xmlns:a16="http://schemas.microsoft.com/office/drawing/2014/main" id="{9207F287-B272-0AF9-6078-EC1EA7C73DFA}"/>
-                </a:ext>
-              </a:extLst>
-            </p:cNvPr>
-            <p:cNvSpPr/>
-            <p:nvPr/>
-          </p:nvSpPr>
-          <p:spPr>
-            <a:xfrm>
-              <a:off x="4579441" y="4330080"/>
-              <a:ext cx="93122" cy="177465"/>
-            </a:xfrm>
-            <a:prstGeom prst="rect">
-              <a:avLst/>
-            </a:prstGeom>
-            <a:solidFill>
-              <a:schemeClr val="bg1"/>
-            </a:solidFill>
-            <a:ln w="12700">
-              <a:solidFill>
-                <a:schemeClr val="tx1"/>
-              </a:solidFill>
-            </a:ln>
-          </p:spPr>
-          <p:style>
-            <a:lnRef idx="2">
-              <a:schemeClr val="accent1">
-                <a:shade val="15000"/>
-              </a:schemeClr>
-            </a:lnRef>
-            <a:fillRef idx="1">
-              <a:schemeClr val="accent1"/>
-            </a:fillRef>
-            <a:effectRef idx="0">
-              <a:schemeClr val="accent1"/>
-            </a:effectRef>
-            <a:fontRef idx="minor">
-              <a:schemeClr val="lt1"/>
-            </a:fontRef>
-          </p:style>
-          <p:txBody>
-            <a:bodyPr rtlCol="0" anchor="ctr"/>
-            <a:lstStyle/>
-            <a:p>
-              <a:pPr algn="ctr"/>
-              <a:endParaRPr lang="fr-FR"/>
-            </a:p>
-          </p:txBody>
-        </p:sp>
-        <p:pic>
-          <p:nvPicPr>
-            <p:cNvPr id="85" name="Graphique 84" descr="Pion avec un remplissage uni">
-              <a:extLst>
-                <a:ext uri="{FF2B5EF4-FFF2-40B4-BE49-F238E27FC236}">
-                  <a16:creationId xmlns:a16="http://schemas.microsoft.com/office/drawing/2014/main" id="{1376AE10-5A16-81AE-866C-D12F91256BB6}"/>
-                </a:ext>
-              </a:extLst>
-            </p:cNvPr>
-            <p:cNvPicPr>
-              <a:picLocks noChangeAspect="1"/>
-            </p:cNvPicPr>
-            <p:nvPr/>
-          </p:nvPicPr>
-          <p:blipFill>
-            <a:blip>
-              <a:extLst>
-                <a:ext uri="{96DAC541-7B7A-43D3-8B79-37D633B846F1}">
-                  <asvg:svgBlip xmlns:asvg="http://schemas.microsoft.com/office/drawing/2016/SVG/main" r:embed="rId11"/>
-                </a:ext>
-              </a:extLst>
-            </a:blip>
-            <a:srcRect l="28037" t="14617" r="27500" b="15665"/>
-            <a:stretch>
-              <a:fillRect/>
-            </a:stretch>
-          </p:blipFill>
-          <p:spPr>
-            <a:xfrm>
-              <a:off x="4710395" y="4317980"/>
-              <a:ext cx="120894" cy="189565"/>
-            </a:xfrm>
-            <a:prstGeom prst="rect">
-              <a:avLst/>
-            </a:prstGeom>
-          </p:spPr>
-        </p:pic>
-        <p:sp>
-          <p:nvSpPr>
-            <p:cNvPr id="97" name="Rectangle 96">
-              <a:extLst>
-                <a:ext uri="{FF2B5EF4-FFF2-40B4-BE49-F238E27FC236}">
-                  <a16:creationId xmlns:a16="http://schemas.microsoft.com/office/drawing/2014/main" id="{4B74F0ED-0507-5FB0-69CC-3ECC69FF21CD}"/>
-                </a:ext>
-              </a:extLst>
-            </p:cNvPr>
-            <p:cNvSpPr/>
-            <p:nvPr/>
-          </p:nvSpPr>
-          <p:spPr>
-            <a:xfrm>
-              <a:off x="3152197" y="1377054"/>
-              <a:ext cx="432000" cy="432000"/>
-            </a:xfrm>
-            <a:prstGeom prst="rect">
-              <a:avLst/>
-            </a:prstGeom>
-            <a:blipFill dpi="0" rotWithShape="1">
-              <a:blip r:embed="rId3">
-                <a:alphaModFix amt="50000"/>
-                <a:extLst>
-                  <a:ext uri="{BEBA8EAE-BF5A-486C-A8C5-ECC9F3942E4B}">
-                    <a14:imgProps xmlns:a14="http://schemas.microsoft.com/office/drawing/2010/main">
-                      <a14:imgLayer r:embed="rId4">
-                        <a14:imgEffect>
-                          <a14:artisticWatercolorSponge/>
-                        </a14:imgEffect>
-                        <a14:imgEffect>
-                          <a14:brightnessContrast bright="-40000" contrast="20000"/>
-                        </a14:imgEffect>
-                      </a14:imgLayer>
-                    </a14:imgProps>
-                  </a:ext>
-                </a:extLst>
-              </a:blip>
-              <a:srcRect/>
-              <a:tile tx="0" ty="0" sx="100000" sy="100000" flip="none" algn="tl"/>
-            </a:blipFill>
-            <a:ln>
-              <a:solidFill>
-                <a:schemeClr val="tx1"/>
-              </a:solidFill>
-            </a:ln>
-          </p:spPr>
-          <p:style>
-            <a:lnRef idx="2">
-              <a:schemeClr val="accent1">
-                <a:shade val="15000"/>
-              </a:schemeClr>
-            </a:lnRef>
-            <a:fillRef idx="1">
-              <a:schemeClr val="accent1"/>
-            </a:fillRef>
-            <a:effectRef idx="0">
-              <a:schemeClr val="accent1"/>
-            </a:effectRef>
-            <a:fontRef idx="minor">
-              <a:schemeClr val="lt1"/>
-            </a:fontRef>
-          </p:style>
-          <p:txBody>
-            <a:bodyPr lIns="0" tIns="0" rIns="0" bIns="0" rtlCol="0" anchor="ctr"/>
-            <a:lstStyle/>
-            <a:p>
-              <a:pPr algn="ctr"/>
-              <a:r>
-                <a:rPr lang="fr-FR" sz="1600" b="1" dirty="0">
-                  <a:solidFill>
-                    <a:schemeClr val="bg1"/>
-                  </a:solidFill>
-                  <a:latin typeface="Segoe UI" panose="020B0502040204020203" pitchFamily="34" charset="0"/>
-                  <a:cs typeface="Segoe UI" panose="020B0502040204020203" pitchFamily="34" charset="0"/>
-                </a:rPr>
-                <a:t>DC</a:t>
-              </a:r>
-            </a:p>
-          </p:txBody>
-        </p:sp>
-        <p:sp>
-          <p:nvSpPr>
-            <p:cNvPr id="98" name="Rectangle 97">
-              <a:extLst>
-                <a:ext uri="{FF2B5EF4-FFF2-40B4-BE49-F238E27FC236}">
-                  <a16:creationId xmlns:a16="http://schemas.microsoft.com/office/drawing/2014/main" id="{74869369-1BDD-DB37-BABB-FE80513418A5}"/>
-                </a:ext>
-              </a:extLst>
-            </p:cNvPr>
-            <p:cNvSpPr/>
-            <p:nvPr/>
-          </p:nvSpPr>
-          <p:spPr>
-            <a:xfrm>
-              <a:off x="4844197" y="1378272"/>
-              <a:ext cx="432000" cy="432000"/>
-            </a:xfrm>
-            <a:prstGeom prst="rect">
-              <a:avLst/>
-            </a:prstGeom>
-            <a:blipFill dpi="0" rotWithShape="1">
-              <a:blip r:embed="rId3">
-                <a:alphaModFix amt="50000"/>
-                <a:extLst>
-                  <a:ext uri="{BEBA8EAE-BF5A-486C-A8C5-ECC9F3942E4B}">
-                    <a14:imgProps xmlns:a14="http://schemas.microsoft.com/office/drawing/2010/main">
-                      <a14:imgLayer r:embed="rId4">
-                        <a14:imgEffect>
-                          <a14:artisticWatercolorSponge/>
-                        </a14:imgEffect>
-                        <a14:imgEffect>
-                          <a14:brightnessContrast bright="-40000" contrast="20000"/>
-                        </a14:imgEffect>
-                      </a14:imgLayer>
-                    </a14:imgProps>
-                  </a:ext>
-                </a:extLst>
-              </a:blip>
-              <a:srcRect/>
-              <a:tile tx="0" ty="0" sx="100000" sy="100000" flip="none" algn="tl"/>
-            </a:blipFill>
-            <a:ln>
-              <a:solidFill>
-                <a:schemeClr val="tx1"/>
-              </a:solidFill>
-            </a:ln>
-          </p:spPr>
-          <p:style>
-            <a:lnRef idx="2">
-              <a:schemeClr val="accent1">
-                <a:shade val="15000"/>
-              </a:schemeClr>
-            </a:lnRef>
-            <a:fillRef idx="1">
-              <a:schemeClr val="accent1"/>
-            </a:fillRef>
-            <a:effectRef idx="0">
-              <a:schemeClr val="accent1"/>
-            </a:effectRef>
-            <a:fontRef idx="minor">
-              <a:schemeClr val="lt1"/>
-            </a:fontRef>
-          </p:style>
-          <p:txBody>
-            <a:bodyPr lIns="0" tIns="0" rIns="0" bIns="0" rtlCol="0" anchor="ctr"/>
-            <a:lstStyle/>
-            <a:p>
-              <a:pPr algn="ctr"/>
-              <a:r>
-                <a:rPr lang="fr-FR" sz="1600" b="1" dirty="0">
-                  <a:solidFill>
-                    <a:schemeClr val="bg1"/>
-                  </a:solidFill>
-                  <a:latin typeface="Segoe UI" panose="020B0502040204020203" pitchFamily="34" charset="0"/>
-                  <a:cs typeface="Segoe UI" panose="020B0502040204020203" pitchFamily="34" charset="0"/>
-                </a:rPr>
-                <a:t>DC</a:t>
-              </a:r>
-            </a:p>
-          </p:txBody>
-        </p:sp>
-        <p:pic>
-          <p:nvPicPr>
-            <p:cNvPr id="99" name="Image 98">
-              <a:extLst>
-                <a:ext uri="{FF2B5EF4-FFF2-40B4-BE49-F238E27FC236}">
-                  <a16:creationId xmlns:a16="http://schemas.microsoft.com/office/drawing/2014/main" id="{157FC146-F5F8-7814-347A-12270DFE9449}"/>
-                </a:ext>
-              </a:extLst>
-            </p:cNvPr>
-            <p:cNvPicPr>
-              <a:picLocks noChangeAspect="1"/>
-            </p:cNvPicPr>
-            <p:nvPr/>
-          </p:nvPicPr>
-          <p:blipFill>
-            <a:blip r:embed="rId12">
-              <a:extLst>
-                <a:ext uri="{BEBA8EAE-BF5A-486C-A8C5-ECC9F3942E4B}">
-                  <a14:imgProps xmlns:a14="http://schemas.microsoft.com/office/drawing/2010/main">
-                    <a14:imgLayer r:embed="rId13">
-                      <a14:imgEffect>
-                        <a14:brightnessContrast contrast="40000"/>
-                      </a14:imgEffect>
-                    </a14:imgLayer>
-                  </a14:imgProps>
-                </a:ext>
-                <a:ext uri="{28A0092B-C50C-407E-A947-70E740481C1C}">
-                  <a14:useLocalDpi xmlns:a14="http://schemas.microsoft.com/office/drawing/2010/main" val="0"/>
-                </a:ext>
-              </a:extLst>
-            </a:blip>
-            <a:stretch>
-              <a:fillRect/>
-            </a:stretch>
-          </p:blipFill>
-          <p:spPr>
-            <a:xfrm>
-              <a:off x="4457415" y="2538404"/>
-              <a:ext cx="540000" cy="540000"/>
-            </a:xfrm>
-            <a:prstGeom prst="rect">
-              <a:avLst/>
-            </a:prstGeom>
-          </p:spPr>
-        </p:pic>
-        <p:grpSp>
-          <p:nvGrpSpPr>
-            <p:cNvPr id="111" name="Groupe 110">
-              <a:extLst>
-                <a:ext uri="{FF2B5EF4-FFF2-40B4-BE49-F238E27FC236}">
-                  <a16:creationId xmlns:a16="http://schemas.microsoft.com/office/drawing/2014/main" id="{97CE3427-9907-BA58-6DFA-96C09F5E9D73}"/>
-                </a:ext>
-              </a:extLst>
-            </p:cNvPr>
-            <p:cNvGrpSpPr/>
-            <p:nvPr/>
-          </p:nvGrpSpPr>
-          <p:grpSpPr>
-            <a:xfrm>
-              <a:off x="3352321" y="3672739"/>
-              <a:ext cx="1592053" cy="405933"/>
-              <a:chOff x="3577654" y="3804073"/>
-              <a:chExt cx="1592053" cy="405933"/>
-            </a:xfrm>
-          </p:grpSpPr>
-          <p:sp>
-            <p:nvSpPr>
-              <p:cNvPr id="102" name="Hexagone 101">
-                <a:extLst>
-                  <a:ext uri="{FF2B5EF4-FFF2-40B4-BE49-F238E27FC236}">
-                    <a16:creationId xmlns:a16="http://schemas.microsoft.com/office/drawing/2014/main" id="{89DC41F8-9A7A-4EA5-E756-36B1012ED376}"/>
-                  </a:ext>
-                </a:extLst>
-              </p:cNvPr>
-              <p:cNvSpPr/>
-              <p:nvPr/>
-            </p:nvSpPr>
-            <p:spPr>
-              <a:xfrm rot="5400000">
-                <a:off x="4791707" y="3822073"/>
-                <a:ext cx="396000" cy="360000"/>
-              </a:xfrm>
-              <a:prstGeom prst="hexagon">
-                <a:avLst/>
-              </a:prstGeom>
-              <a:blipFill>
-                <a:blip r:embed="rId6">
-                  <a:extLst>
-                    <a:ext uri="{BEBA8EAE-BF5A-486C-A8C5-ECC9F3942E4B}">
-                      <a14:imgProps xmlns:a14="http://schemas.microsoft.com/office/drawing/2010/main">
-                        <a14:imgLayer r:embed="rId7">
-                          <a14:imgEffect>
-                            <a14:brightnessContrast bright="-20000" contrast="-40000"/>
-                          </a14:imgEffect>
-                        </a14:imgLayer>
-                      </a14:imgProps>
-                    </a:ext>
-                  </a:extLst>
-                </a:blip>
-                <a:tile tx="0" ty="0" sx="100000" sy="100000" flip="none" algn="tl"/>
-              </a:blipFill>
-              <a:ln w="12700">
-                <a:solidFill>
-                  <a:schemeClr val="tx1"/>
-                </a:solidFill>
-              </a:ln>
-            </p:spPr>
-            <p:style>
-              <a:lnRef idx="2">
-                <a:schemeClr val="accent1">
-                  <a:shade val="15000"/>
-                </a:schemeClr>
-              </a:lnRef>
-              <a:fillRef idx="1">
-                <a:schemeClr val="accent1"/>
-              </a:fillRef>
-              <a:effectRef idx="0">
-                <a:schemeClr val="accent1"/>
-              </a:effectRef>
-              <a:fontRef idx="minor">
-                <a:schemeClr val="lt1"/>
-              </a:fontRef>
-            </p:style>
-            <p:txBody>
-              <a:bodyPr rtlCol="0" anchor="ctr"/>
-              <a:lstStyle/>
-              <a:p>
-                <a:pPr algn="ctr"/>
-                <a:endParaRPr lang="fr-FR"/>
-              </a:p>
-            </p:txBody>
-          </p:sp>
-          <p:sp>
-            <p:nvSpPr>
-              <p:cNvPr id="103" name="Hexagone 102">
-                <a:extLst>
-                  <a:ext uri="{FF2B5EF4-FFF2-40B4-BE49-F238E27FC236}">
-                    <a16:creationId xmlns:a16="http://schemas.microsoft.com/office/drawing/2014/main" id="{AFDE2005-57BD-32CA-F7A7-43E73961F6F8}"/>
-                  </a:ext>
-                </a:extLst>
-              </p:cNvPr>
-              <p:cNvSpPr/>
-              <p:nvPr/>
-            </p:nvSpPr>
-            <p:spPr>
-              <a:xfrm rot="5400000">
-                <a:off x="4382432" y="3822073"/>
-                <a:ext cx="396000" cy="360000"/>
-              </a:xfrm>
-              <a:prstGeom prst="hexagon">
-                <a:avLst/>
-              </a:prstGeom>
-              <a:blipFill>
-                <a:blip r:embed="rId6">
-                  <a:extLst>
-                    <a:ext uri="{BEBA8EAE-BF5A-486C-A8C5-ECC9F3942E4B}">
-                      <a14:imgProps xmlns:a14="http://schemas.microsoft.com/office/drawing/2010/main">
-                        <a14:imgLayer r:embed="rId7">
-                          <a14:imgEffect>
-                            <a14:brightnessContrast bright="-20000" contrast="-40000"/>
-                          </a14:imgEffect>
-                        </a14:imgLayer>
-                      </a14:imgProps>
-                    </a:ext>
-                  </a:extLst>
-                </a:blip>
-                <a:tile tx="0" ty="0" sx="100000" sy="100000" flip="none" algn="tl"/>
-              </a:blipFill>
-              <a:ln w="12700">
-                <a:solidFill>
-                  <a:schemeClr val="tx1"/>
-                </a:solidFill>
-              </a:ln>
-            </p:spPr>
-            <p:style>
-              <a:lnRef idx="2">
-                <a:schemeClr val="accent1">
-                  <a:shade val="15000"/>
-                </a:schemeClr>
-              </a:lnRef>
-              <a:fillRef idx="1">
-                <a:schemeClr val="accent1"/>
-              </a:fillRef>
-              <a:effectRef idx="0">
-                <a:schemeClr val="accent1"/>
-              </a:effectRef>
-              <a:fontRef idx="minor">
-                <a:schemeClr val="lt1"/>
-              </a:fontRef>
-            </p:style>
-            <p:txBody>
-              <a:bodyPr rtlCol="0" anchor="ctr"/>
-              <a:lstStyle/>
-              <a:p>
-                <a:pPr algn="ctr"/>
-                <a:endParaRPr lang="fr-FR"/>
-              </a:p>
-            </p:txBody>
-          </p:sp>
-          <p:sp>
-            <p:nvSpPr>
-              <p:cNvPr id="104" name="Hexagone 103">
-                <a:extLst>
-                  <a:ext uri="{FF2B5EF4-FFF2-40B4-BE49-F238E27FC236}">
-                    <a16:creationId xmlns:a16="http://schemas.microsoft.com/office/drawing/2014/main" id="{A94DEE98-AD81-70F8-3376-C350A7BDE587}"/>
-                  </a:ext>
-                </a:extLst>
-              </p:cNvPr>
-              <p:cNvSpPr/>
-              <p:nvPr/>
-            </p:nvSpPr>
-            <p:spPr>
-              <a:xfrm rot="5400000">
-                <a:off x="3973157" y="3832006"/>
-                <a:ext cx="396000" cy="360000"/>
-              </a:xfrm>
-              <a:prstGeom prst="hexagon">
-                <a:avLst/>
-              </a:prstGeom>
-              <a:blipFill>
-                <a:blip r:embed="rId6">
-                  <a:extLst>
-                    <a:ext uri="{BEBA8EAE-BF5A-486C-A8C5-ECC9F3942E4B}">
-                      <a14:imgProps xmlns:a14="http://schemas.microsoft.com/office/drawing/2010/main">
-                        <a14:imgLayer r:embed="rId7">
-                          <a14:imgEffect>
-                            <a14:brightnessContrast bright="-20000" contrast="-40000"/>
-                          </a14:imgEffect>
-                        </a14:imgLayer>
-                      </a14:imgProps>
-                    </a:ext>
-                  </a:extLst>
-                </a:blip>
-                <a:tile tx="0" ty="0" sx="100000" sy="100000" flip="none" algn="tl"/>
-              </a:blipFill>
-              <a:ln w="12700">
-                <a:solidFill>
-                  <a:schemeClr val="tx1"/>
-                </a:solidFill>
-              </a:ln>
-            </p:spPr>
-            <p:style>
-              <a:lnRef idx="2">
-                <a:schemeClr val="accent1">
-                  <a:shade val="15000"/>
-                </a:schemeClr>
-              </a:lnRef>
-              <a:fillRef idx="1">
-                <a:schemeClr val="accent1"/>
-              </a:fillRef>
-              <a:effectRef idx="0">
-                <a:schemeClr val="accent1"/>
-              </a:effectRef>
-              <a:fontRef idx="minor">
-                <a:schemeClr val="lt1"/>
-              </a:fontRef>
-            </p:style>
-            <p:txBody>
-              <a:bodyPr rtlCol="0" anchor="ctr"/>
-              <a:lstStyle/>
-              <a:p>
-                <a:pPr algn="ctr"/>
-                <a:endParaRPr lang="fr-FR"/>
-              </a:p>
-            </p:txBody>
-          </p:sp>
-          <p:sp>
-            <p:nvSpPr>
-              <p:cNvPr id="105" name="Hexagone 104">
-                <a:extLst>
-                  <a:ext uri="{FF2B5EF4-FFF2-40B4-BE49-F238E27FC236}">
-                    <a16:creationId xmlns:a16="http://schemas.microsoft.com/office/drawing/2014/main" id="{E38CC7BA-B662-3AE5-5C6E-E52B4A718FB2}"/>
-                  </a:ext>
-                </a:extLst>
-              </p:cNvPr>
-              <p:cNvSpPr/>
-              <p:nvPr/>
-            </p:nvSpPr>
-            <p:spPr>
-              <a:xfrm rot="5400000">
-                <a:off x="3559654" y="3832006"/>
-                <a:ext cx="396000" cy="360000"/>
-              </a:xfrm>
-              <a:prstGeom prst="hexagon">
-                <a:avLst/>
-              </a:prstGeom>
-              <a:solidFill>
-                <a:schemeClr val="bg1"/>
-              </a:solidFill>
-              <a:ln w="12700">
-                <a:solidFill>
-                  <a:schemeClr val="tx1"/>
-                </a:solidFill>
-              </a:ln>
-            </p:spPr>
-            <p:style>
-              <a:lnRef idx="2">
-                <a:schemeClr val="accent1">
-                  <a:shade val="15000"/>
-                </a:schemeClr>
-              </a:lnRef>
-              <a:fillRef idx="1">
-                <a:schemeClr val="accent1"/>
-              </a:fillRef>
-              <a:effectRef idx="0">
-                <a:schemeClr val="accent1"/>
-              </a:effectRef>
-              <a:fontRef idx="minor">
-                <a:schemeClr val="lt1"/>
-              </a:fontRef>
-            </p:style>
-            <p:txBody>
-              <a:bodyPr rtlCol="0" anchor="ctr"/>
-              <a:lstStyle/>
-              <a:p>
-                <a:pPr algn="ctr"/>
-                <a:endParaRPr lang="fr-FR"/>
-              </a:p>
-            </p:txBody>
-          </p:sp>
-          <p:cxnSp>
-            <p:nvCxnSpPr>
-              <p:cNvPr id="106" name="Connecteur droit avec flèche 105">
-                <a:extLst>
-                  <a:ext uri="{FF2B5EF4-FFF2-40B4-BE49-F238E27FC236}">
-                    <a16:creationId xmlns:a16="http://schemas.microsoft.com/office/drawing/2014/main" id="{15B63591-1FDF-B223-9EEA-54AAF01AF616}"/>
-                  </a:ext>
-                </a:extLst>
-              </p:cNvPr>
-              <p:cNvCxnSpPr>
-                <a:cxnSpLocks/>
-              </p:cNvCxnSpPr>
-              <p:nvPr/>
-            </p:nvCxnSpPr>
-            <p:spPr>
-              <a:xfrm flipH="1">
-                <a:off x="3676982" y="4006047"/>
-                <a:ext cx="1303580" cy="0"/>
-              </a:xfrm>
-              <a:prstGeom prst="straightConnector1">
-                <a:avLst/>
-              </a:prstGeom>
-              <a:ln w="57150">
-                <a:solidFill>
-                  <a:srgbClr val="FFC000"/>
-                </a:solidFill>
-                <a:tailEnd type="triangle"/>
-              </a:ln>
-            </p:spPr>
-            <p:style>
-              <a:lnRef idx="2">
-                <a:schemeClr val="dk1"/>
-              </a:lnRef>
-              <a:fillRef idx="0">
-                <a:schemeClr val="dk1"/>
-              </a:fillRef>
-              <a:effectRef idx="1">
-                <a:schemeClr val="dk1"/>
-              </a:effectRef>
-              <a:fontRef idx="minor">
-                <a:schemeClr val="tx1"/>
-              </a:fontRef>
-            </p:style>
-          </p:cxnSp>
-          <p:sp>
-            <p:nvSpPr>
-              <p:cNvPr id="107" name="Ellipse 106">
-                <a:extLst>
-                  <a:ext uri="{FF2B5EF4-FFF2-40B4-BE49-F238E27FC236}">
-                    <a16:creationId xmlns:a16="http://schemas.microsoft.com/office/drawing/2014/main" id="{146CEDAA-20AE-84D0-205A-4F2ACD93A7BB}"/>
-                  </a:ext>
-                </a:extLst>
-              </p:cNvPr>
-              <p:cNvSpPr/>
-              <p:nvPr/>
-            </p:nvSpPr>
-            <p:spPr>
-              <a:xfrm>
-                <a:off x="4081157" y="3922006"/>
-                <a:ext cx="180000" cy="180000"/>
-              </a:xfrm>
-              <a:prstGeom prst="ellipse">
-                <a:avLst/>
-              </a:prstGeom>
-              <a:blipFill>
-                <a:blip r:embed="rId8"/>
-                <a:tile tx="0" ty="0" sx="100000" sy="100000" flip="none" algn="tl"/>
-              </a:blipFill>
-              <a:ln w="12700">
-                <a:solidFill>
-                  <a:schemeClr val="tx1"/>
-                </a:solidFill>
-              </a:ln>
-            </p:spPr>
-            <p:style>
-              <a:lnRef idx="2">
-                <a:schemeClr val="dk1">
-                  <a:shade val="15000"/>
-                </a:schemeClr>
-              </a:lnRef>
-              <a:fillRef idx="1">
-                <a:schemeClr val="dk1"/>
-              </a:fillRef>
-              <a:effectRef idx="0">
-                <a:schemeClr val="dk1"/>
-              </a:effectRef>
-              <a:fontRef idx="minor">
-                <a:schemeClr val="lt1"/>
-              </a:fontRef>
-            </p:style>
-            <p:txBody>
-              <a:bodyPr rtlCol="0" anchor="ctr"/>
-              <a:lstStyle/>
-              <a:p>
-                <a:pPr algn="ctr"/>
-                <a:endParaRPr lang="fr-FR"/>
-              </a:p>
-            </p:txBody>
-          </p:sp>
-          <p:sp>
-            <p:nvSpPr>
-              <p:cNvPr id="108" name="Ellipse 107">
-                <a:extLst>
-                  <a:ext uri="{FF2B5EF4-FFF2-40B4-BE49-F238E27FC236}">
-                    <a16:creationId xmlns:a16="http://schemas.microsoft.com/office/drawing/2014/main" id="{13F3FFBA-6AB1-B1BB-D07E-932061C3EFC9}"/>
-                  </a:ext>
-                </a:extLst>
-              </p:cNvPr>
-              <p:cNvSpPr/>
-              <p:nvPr/>
-            </p:nvSpPr>
-            <p:spPr>
-              <a:xfrm>
-                <a:off x="4490043" y="3922006"/>
-                <a:ext cx="180000" cy="180000"/>
-              </a:xfrm>
-              <a:prstGeom prst="ellipse">
-                <a:avLst/>
-              </a:prstGeom>
-              <a:blipFill>
-                <a:blip r:embed="rId8"/>
-                <a:tile tx="0" ty="0" sx="100000" sy="100000" flip="none" algn="tl"/>
-              </a:blipFill>
-              <a:ln w="12700">
-                <a:solidFill>
-                  <a:schemeClr val="tx1"/>
-                </a:solidFill>
-              </a:ln>
-            </p:spPr>
-            <p:style>
-              <a:lnRef idx="2">
-                <a:schemeClr val="dk1">
-                  <a:shade val="15000"/>
-                </a:schemeClr>
-              </a:lnRef>
-              <a:fillRef idx="1">
-                <a:schemeClr val="dk1"/>
-              </a:fillRef>
-              <a:effectRef idx="0">
-                <a:schemeClr val="dk1"/>
-              </a:effectRef>
-              <a:fontRef idx="minor">
-                <a:schemeClr val="lt1"/>
-              </a:fontRef>
-            </p:style>
-            <p:txBody>
-              <a:bodyPr rtlCol="0" anchor="ctr"/>
-              <a:lstStyle/>
-              <a:p>
-                <a:pPr algn="ctr"/>
-                <a:endParaRPr lang="fr-FR"/>
-              </a:p>
-            </p:txBody>
-          </p:sp>
-          <p:sp>
-            <p:nvSpPr>
-              <p:cNvPr id="109" name="Ellipse 108">
-                <a:extLst>
-                  <a:ext uri="{FF2B5EF4-FFF2-40B4-BE49-F238E27FC236}">
-                    <a16:creationId xmlns:a16="http://schemas.microsoft.com/office/drawing/2014/main" id="{A2452E49-E772-38B9-B174-8EDC5702DCFF}"/>
-                  </a:ext>
-                </a:extLst>
-              </p:cNvPr>
-              <p:cNvSpPr/>
-              <p:nvPr/>
-            </p:nvSpPr>
-            <p:spPr>
-              <a:xfrm>
-                <a:off x="4899524" y="3912073"/>
-                <a:ext cx="180000" cy="180000"/>
-              </a:xfrm>
-              <a:prstGeom prst="ellipse">
-                <a:avLst/>
-              </a:prstGeom>
-              <a:blipFill>
-                <a:blip r:embed="rId8"/>
-                <a:tile tx="0" ty="0" sx="100000" sy="100000" flip="none" algn="tl"/>
-              </a:blipFill>
-              <a:ln w="12700">
-                <a:solidFill>
-                  <a:schemeClr val="tx1"/>
-                </a:solidFill>
-              </a:ln>
-            </p:spPr>
-            <p:style>
-              <a:lnRef idx="2">
-                <a:schemeClr val="dk1">
-                  <a:shade val="15000"/>
-                </a:schemeClr>
-              </a:lnRef>
-              <a:fillRef idx="1">
-                <a:schemeClr val="dk1"/>
-              </a:fillRef>
-              <a:effectRef idx="0">
-                <a:schemeClr val="dk1"/>
-              </a:effectRef>
-              <a:fontRef idx="minor">
-                <a:schemeClr val="lt1"/>
-              </a:fontRef>
-            </p:style>
-            <p:txBody>
-              <a:bodyPr rtlCol="0" anchor="ctr"/>
-              <a:lstStyle/>
-              <a:p>
-                <a:pPr algn="ctr"/>
-                <a:endParaRPr lang="fr-FR"/>
-              </a:p>
-            </p:txBody>
-          </p:sp>
-        </p:grpSp>
-        <p:sp>
-          <p:nvSpPr>
-            <p:cNvPr id="112" name="ZoneTexte 111">
-              <a:extLst>
-                <a:ext uri="{FF2B5EF4-FFF2-40B4-BE49-F238E27FC236}">
-                  <a16:creationId xmlns:a16="http://schemas.microsoft.com/office/drawing/2014/main" id="{7A430CFE-43B9-A3B3-CF82-9F07877EBE9A}"/>
-                </a:ext>
-              </a:extLst>
-            </p:cNvPr>
-            <p:cNvSpPr txBox="1"/>
-            <p:nvPr/>
-          </p:nvSpPr>
-          <p:spPr>
-            <a:xfrm>
-              <a:off x="5046386" y="2838450"/>
-              <a:ext cx="153888" cy="1762188"/>
-            </a:xfrm>
-            <a:prstGeom prst="rect">
-              <a:avLst/>
-            </a:prstGeom>
-            <a:noFill/>
-          </p:spPr>
-          <p:txBody>
-            <a:bodyPr vert="vert270" wrap="square" lIns="0" tIns="0" rIns="0" bIns="0" rtlCol="0">
-              <a:spAutoFit/>
-            </a:bodyPr>
-            <a:lstStyle/>
-            <a:p>
-              <a:r>
-                <a:rPr lang="fr-FR" sz="1000" b="1" dirty="0">
-                  <a:solidFill>
-                    <a:srgbClr val="FFC000"/>
-                  </a:solidFill>
-                  <a:latin typeface="Segoe UI" panose="020B0502040204020203" pitchFamily="34" charset="0"/>
-                  <a:cs typeface="Segoe UI" panose="020B0502040204020203" pitchFamily="34" charset="0"/>
-                </a:rPr>
-                <a:t>/ :  choisir en posant la carte</a:t>
-              </a:r>
-            </a:p>
-          </p:txBody>
-        </p:sp>
       </p:grpSp>
     </p:spTree>
     <p:extLst>
@@ -16337,10 +14351,10 @@
       </p:grpSpPr>
       <p:grpSp>
         <p:nvGrpSpPr>
-          <p:cNvPr id="23" name="Groupe 22">
+          <p:cNvPr id="2" name="Groupe 1">
             <a:extLst>
               <a:ext uri="{FF2B5EF4-FFF2-40B4-BE49-F238E27FC236}">
-                <a16:creationId xmlns:a16="http://schemas.microsoft.com/office/drawing/2014/main" id="{15213530-E65C-D1C7-E96E-E0039CDE1A7A}"/>
+                <a16:creationId xmlns:a16="http://schemas.microsoft.com/office/drawing/2014/main" id="{74A0EA3A-EDBC-233A-A279-8C1ACD675AD6}"/>
               </a:ext>
             </a:extLst>
           </p:cNvPr>
@@ -16577,7 +14591,7 @@
           </p:blipFill>
           <p:spPr>
             <a:xfrm>
-              <a:off x="1414994" y="2800656"/>
+              <a:off x="1410056" y="2695272"/>
               <a:ext cx="1056633" cy="1905145"/>
             </a:xfrm>
             <a:prstGeom prst="rect">
@@ -16599,8 +14613,8 @@
           </p:nvSpPr>
           <p:spPr>
             <a:xfrm>
-              <a:off x="1070614" y="2078526"/>
-              <a:ext cx="1735519" cy="646331"/>
+              <a:off x="1070614" y="2112793"/>
+              <a:ext cx="1735519" cy="369332"/>
             </a:xfrm>
             <a:prstGeom prst="rect">
               <a:avLst/>
@@ -16608,7 +14622,7 @@
             <a:noFill/>
           </p:spPr>
           <p:txBody>
-            <a:bodyPr wrap="square" rtlCol="0">
+            <a:bodyPr wrap="square" lIns="0" tIns="0" rIns="0" bIns="0" rtlCol="0">
               <a:spAutoFit/>
             </a:bodyPr>
             <a:lstStyle/>
@@ -16774,10 +14788,10 @@
       </p:grpSp>
       <p:grpSp>
         <p:nvGrpSpPr>
-          <p:cNvPr id="39" name="Groupe 38">
+          <p:cNvPr id="4" name="Groupe 3">
             <a:extLst>
               <a:ext uri="{FF2B5EF4-FFF2-40B4-BE49-F238E27FC236}">
-                <a16:creationId xmlns:a16="http://schemas.microsoft.com/office/drawing/2014/main" id="{A91998C6-C2EF-44AB-A962-D1450FBF56E2}"/>
+                <a16:creationId xmlns:a16="http://schemas.microsoft.com/office/drawing/2014/main" id="{927EEFA3-FB63-9234-0E10-C8C0644B3EAC}"/>
               </a:ext>
             </a:extLst>
           </p:cNvPr>
@@ -16786,7 +14800,7 @@
         </p:nvGrpSpPr>
         <p:grpSpPr>
           <a:xfrm>
-            <a:off x="3418344" y="1543946"/>
+            <a:off x="3348453" y="1543946"/>
             <a:ext cx="2124000" cy="3312000"/>
             <a:chOff x="3418344" y="1543946"/>
             <a:chExt cx="2124000" cy="3312000"/>
@@ -16992,8 +15006,8 @@
           </p:nvSpPr>
           <p:spPr>
             <a:xfrm>
-              <a:off x="3638074" y="2020460"/>
-              <a:ext cx="1847026" cy="830997"/>
+              <a:off x="3556831" y="2118277"/>
+              <a:ext cx="1847026" cy="553998"/>
             </a:xfrm>
             <a:prstGeom prst="rect">
               <a:avLst/>
@@ -17001,7 +15015,7 @@
             <a:noFill/>
           </p:spPr>
           <p:txBody>
-            <a:bodyPr wrap="square" rtlCol="0">
+            <a:bodyPr wrap="square" lIns="0" tIns="0" rIns="0" bIns="0" rtlCol="0">
               <a:spAutoFit/>
             </a:bodyPr>
             <a:lstStyle/>
@@ -17110,7 +15124,7 @@
           </p:blipFill>
           <p:spPr>
             <a:xfrm>
-              <a:off x="3938147" y="2724857"/>
+              <a:off x="3923516" y="2695272"/>
               <a:ext cx="1453587" cy="1974983"/>
             </a:xfrm>
             <a:prstGeom prst="rect">
@@ -17163,7 +15177,7 @@
           </p:blipFill>
           <p:spPr>
             <a:xfrm>
-              <a:off x="3604679" y="3068094"/>
+              <a:off x="3591448" y="3085541"/>
               <a:ext cx="664136" cy="499225"/>
             </a:xfrm>
             <a:prstGeom prst="rect">
@@ -17321,10 +15335,10 @@
       </p:grpSp>
       <p:grpSp>
         <p:nvGrpSpPr>
-          <p:cNvPr id="41" name="Groupe 40">
+          <p:cNvPr id="5" name="Groupe 4">
             <a:extLst>
               <a:ext uri="{FF2B5EF4-FFF2-40B4-BE49-F238E27FC236}">
-                <a16:creationId xmlns:a16="http://schemas.microsoft.com/office/drawing/2014/main" id="{7872EF56-0083-CA79-B84C-2FE2BA265A0D}"/>
+                <a16:creationId xmlns:a16="http://schemas.microsoft.com/office/drawing/2014/main" id="{0AB842E0-589D-0604-B3C3-E3C07D3A66BD}"/>
               </a:ext>
             </a:extLst>
           </p:cNvPr>
@@ -17333,7 +15347,7 @@
         </p:nvGrpSpPr>
         <p:grpSpPr>
           <a:xfrm>
-            <a:off x="5995831" y="1543946"/>
+            <a:off x="5815888" y="1543946"/>
             <a:ext cx="2124001" cy="3312000"/>
             <a:chOff x="5995831" y="1543946"/>
             <a:chExt cx="2124001" cy="3312000"/>
@@ -17539,8 +15553,8 @@
           </p:nvSpPr>
           <p:spPr>
             <a:xfrm>
-              <a:off x="6096082" y="2060755"/>
-              <a:ext cx="1923499" cy="461665"/>
+              <a:off x="6179071" y="2112793"/>
+              <a:ext cx="1745664" cy="369332"/>
             </a:xfrm>
             <a:prstGeom prst="rect">
               <a:avLst/>
@@ -17548,7 +15562,7 @@
             <a:noFill/>
           </p:spPr>
           <p:txBody>
-            <a:bodyPr wrap="square" rtlCol="0">
+            <a:bodyPr wrap="square" lIns="0" tIns="0" rIns="0" bIns="0" rtlCol="0">
               <a:spAutoFit/>
             </a:bodyPr>
             <a:lstStyle/>
@@ -17664,15 +15678,15 @@
                 </a:ext>
               </a:extLst>
             </a:blip>
-            <a:srcRect l="39260" t="12963" r="9752" b="49602"/>
+            <a:srcRect l="39260" t="12963" r="11798" b="49602"/>
             <a:stretch>
               <a:fillRect/>
             </a:stretch>
           </p:blipFill>
           <p:spPr>
             <a:xfrm flipH="1">
-              <a:off x="6207420" y="2791895"/>
-              <a:ext cx="1564884" cy="1148912"/>
+              <a:off x="6300855" y="2760698"/>
+              <a:ext cx="1502095" cy="1148912"/>
             </a:xfrm>
             <a:prstGeom prst="rect">
               <a:avLst/>
@@ -18000,10 +16014,10 @@
       </p:grpSp>
       <p:grpSp>
         <p:nvGrpSpPr>
-          <p:cNvPr id="47" name="Groupe 46">
+          <p:cNvPr id="6" name="Groupe 5">
             <a:extLst>
               <a:ext uri="{FF2B5EF4-FFF2-40B4-BE49-F238E27FC236}">
-                <a16:creationId xmlns:a16="http://schemas.microsoft.com/office/drawing/2014/main" id="{B57A9D7B-CE41-B60C-6A2D-BA03F26BFDA3}"/>
+                <a16:creationId xmlns:a16="http://schemas.microsoft.com/office/drawing/2014/main" id="{4E7270ED-2342-C1C8-8398-F7F49ED90453}"/>
               </a:ext>
             </a:extLst>
           </p:cNvPr>
@@ -18012,7 +16026,7 @@
         </p:nvGrpSpPr>
         <p:grpSpPr>
           <a:xfrm>
-            <a:off x="8536598" y="1543946"/>
+            <a:off x="8283325" y="1543946"/>
             <a:ext cx="2125204" cy="3312000"/>
             <a:chOff x="8536598" y="1543946"/>
             <a:chExt cx="2125204" cy="3312000"/>
@@ -18237,8 +16251,8 @@
           </p:nvSpPr>
           <p:spPr>
             <a:xfrm>
-              <a:off x="8718479" y="2066437"/>
-              <a:ext cx="1872227" cy="646331"/>
+              <a:off x="8762824" y="2118277"/>
+              <a:ext cx="1538283" cy="553998"/>
             </a:xfrm>
             <a:prstGeom prst="rect">
               <a:avLst/>
@@ -18246,7 +16260,7 @@
             <a:noFill/>
           </p:spPr>
           <p:txBody>
-            <a:bodyPr wrap="square" rtlCol="0">
+            <a:bodyPr wrap="square" lIns="0" tIns="0" rIns="0" bIns="0" rtlCol="0">
               <a:spAutoFit/>
             </a:bodyPr>
             <a:lstStyle/>
@@ -18404,7 +16418,7 @@
           </p:blipFill>
           <p:spPr>
             <a:xfrm>
-              <a:off x="8752598" y="2803259"/>
+              <a:off x="8690984" y="2760698"/>
               <a:ext cx="1689100" cy="1028897"/>
             </a:xfrm>
             <a:prstGeom prst="rect">
@@ -19019,10 +17033,10 @@
       </p:grpSpPr>
       <p:grpSp>
         <p:nvGrpSpPr>
-          <p:cNvPr id="8" name="Groupe 7">
+          <p:cNvPr id="2" name="Groupe 1">
             <a:extLst>
               <a:ext uri="{FF2B5EF4-FFF2-40B4-BE49-F238E27FC236}">
-                <a16:creationId xmlns:a16="http://schemas.microsoft.com/office/drawing/2014/main" id="{63F6BE4C-B607-9E16-D80D-E7E11B2AACDD}"/>
+                <a16:creationId xmlns:a16="http://schemas.microsoft.com/office/drawing/2014/main" id="{FBF5C08E-1FB2-7569-130F-92817E4F98BE}"/>
               </a:ext>
             </a:extLst>
           </p:cNvPr>
@@ -19184,8 +17198,8 @@
           </p:nvSpPr>
           <p:spPr>
             <a:xfrm>
-              <a:off x="1444224" y="2318297"/>
-              <a:ext cx="1817768" cy="276999"/>
+              <a:off x="1645389" y="2359594"/>
+              <a:ext cx="1573296" cy="184666"/>
             </a:xfrm>
             <a:prstGeom prst="rect">
               <a:avLst/>
@@ -19193,7 +17207,7 @@
             <a:noFill/>
           </p:spPr>
           <p:txBody>
-            <a:bodyPr wrap="square" rtlCol="0">
+            <a:bodyPr wrap="square" lIns="0" tIns="0" rIns="0" bIns="0" rtlCol="0">
               <a:spAutoFit/>
             </a:bodyPr>
             <a:lstStyle/>
@@ -19458,8 +17472,8 @@
           </p:nvSpPr>
           <p:spPr>
             <a:xfrm>
-              <a:off x="1444224" y="2708593"/>
-              <a:ext cx="1667249" cy="830997"/>
+              <a:off x="1645389" y="2772718"/>
+              <a:ext cx="1522814" cy="553998"/>
             </a:xfrm>
             <a:prstGeom prst="rect">
               <a:avLst/>
@@ -19467,7 +17481,7 @@
             <a:noFill/>
           </p:spPr>
           <p:txBody>
-            <a:bodyPr wrap="square" rtlCol="0">
+            <a:bodyPr wrap="square" lIns="0" tIns="0" rIns="0" bIns="0" rtlCol="0">
               <a:spAutoFit/>
             </a:bodyPr>
             <a:lstStyle/>
@@ -19552,10 +17566,10 @@
       </p:grpSp>
       <p:grpSp>
         <p:nvGrpSpPr>
-          <p:cNvPr id="45" name="Groupe 44">
+          <p:cNvPr id="3" name="Groupe 2">
             <a:extLst>
               <a:ext uri="{FF2B5EF4-FFF2-40B4-BE49-F238E27FC236}">
-                <a16:creationId xmlns:a16="http://schemas.microsoft.com/office/drawing/2014/main" id="{341684A8-8634-1BCF-07ED-A776CA81C0FC}"/>
+                <a16:creationId xmlns:a16="http://schemas.microsoft.com/office/drawing/2014/main" id="{30110118-0562-9E3A-FE3A-EFD6E0D72534}"/>
               </a:ext>
             </a:extLst>
           </p:cNvPr>
@@ -19564,7 +17578,7 @@
         </p:nvGrpSpPr>
         <p:grpSpPr>
           <a:xfrm>
-            <a:off x="4591336" y="1773000"/>
+            <a:off x="3972000" y="1774350"/>
             <a:ext cx="2124000" cy="3312000"/>
             <a:chOff x="4591336" y="1773000"/>
             <a:chExt cx="2124000" cy="3312000"/>
@@ -20060,8 +18074,8 @@
           </p:nvSpPr>
           <p:spPr>
             <a:xfrm>
-              <a:off x="4707183" y="2690798"/>
-              <a:ext cx="1970884" cy="646331"/>
+              <a:off x="4801666" y="2767835"/>
+              <a:ext cx="1719383" cy="553998"/>
             </a:xfrm>
             <a:prstGeom prst="rect">
               <a:avLst/>
@@ -20069,7 +18083,7 @@
             <a:noFill/>
           </p:spPr>
           <p:txBody>
-            <a:bodyPr wrap="square" rtlCol="0">
+            <a:bodyPr wrap="square" lIns="0" tIns="0" rIns="0" bIns="0" rtlCol="0">
               <a:spAutoFit/>
             </a:bodyPr>
             <a:lstStyle/>
@@ -20111,8 +18125,8 @@
           </p:nvSpPr>
           <p:spPr>
             <a:xfrm>
-              <a:off x="4678368" y="2318297"/>
-              <a:ext cx="1817768" cy="276999"/>
+              <a:off x="4880106" y="2357032"/>
+              <a:ext cx="1546460" cy="184666"/>
             </a:xfrm>
             <a:prstGeom prst="rect">
               <a:avLst/>
@@ -20120,7 +18134,7 @@
             <a:noFill/>
           </p:spPr>
           <p:txBody>
-            <a:bodyPr wrap="square" rtlCol="0">
+            <a:bodyPr wrap="square" lIns="0" tIns="0" rIns="0" bIns="0" rtlCol="0">
               <a:spAutoFit/>
             </a:bodyPr>
             <a:lstStyle/>
@@ -20229,10 +18243,10 @@
       </p:grpSp>
       <p:grpSp>
         <p:nvGrpSpPr>
-          <p:cNvPr id="46" name="Groupe 45">
+          <p:cNvPr id="6" name="Groupe 5">
             <a:extLst>
               <a:ext uri="{FF2B5EF4-FFF2-40B4-BE49-F238E27FC236}">
-                <a16:creationId xmlns:a16="http://schemas.microsoft.com/office/drawing/2014/main" id="{185E04A7-08A8-0BDA-1630-BEF7E928BDEF}"/>
+                <a16:creationId xmlns:a16="http://schemas.microsoft.com/office/drawing/2014/main" id="{AAF56D5C-4F49-7BD4-ED0D-F967839F0E2A}"/>
               </a:ext>
             </a:extLst>
           </p:cNvPr>
@@ -20241,7 +18255,7 @@
         </p:nvGrpSpPr>
         <p:grpSpPr>
           <a:xfrm>
-            <a:off x="8007813" y="1773000"/>
+            <a:off x="6607390" y="1773000"/>
             <a:ext cx="2124000" cy="3312000"/>
             <a:chOff x="8007813" y="1773000"/>
             <a:chExt cx="2124000" cy="3312000"/>
@@ -20737,8 +18751,8 @@
           </p:nvSpPr>
           <p:spPr>
             <a:xfrm>
-              <a:off x="8094639" y="2708593"/>
-              <a:ext cx="2013054" cy="646331"/>
+              <a:off x="8159745" y="2767835"/>
+              <a:ext cx="1836761" cy="553998"/>
             </a:xfrm>
             <a:prstGeom prst="rect">
               <a:avLst/>
@@ -20746,7 +18760,7 @@
             <a:noFill/>
           </p:spPr>
           <p:txBody>
-            <a:bodyPr wrap="square" rtlCol="0">
+            <a:bodyPr wrap="square" lIns="0" tIns="0" rIns="0" bIns="0" rtlCol="0">
               <a:spAutoFit/>
             </a:bodyPr>
             <a:lstStyle/>
@@ -20795,8 +18809,8 @@
           </p:nvSpPr>
           <p:spPr>
             <a:xfrm>
-              <a:off x="8086002" y="2313488"/>
-              <a:ext cx="1817768" cy="276999"/>
+              <a:off x="8289989" y="2357032"/>
+              <a:ext cx="1559648" cy="184666"/>
             </a:xfrm>
             <a:prstGeom prst="rect">
               <a:avLst/>
@@ -20804,7 +18818,7 @@
             <a:noFill/>
           </p:spPr>
           <p:txBody>
-            <a:bodyPr wrap="square" rtlCol="0">
+            <a:bodyPr wrap="square" lIns="0" tIns="0" rIns="0" bIns="0" rtlCol="0">
               <a:spAutoFit/>
             </a:bodyPr>
             <a:lstStyle/>

--- a/pictures/Deck-en/Deck-en.pptx
+++ b/pictures/Deck-en/Deck-en.pptx
@@ -203,7 +203,7 @@
           <a:p>
             <a:fld id="{263B0988-6DB9-4E3D-B7FD-EFF3BCABE954}" type="datetimeFigureOut">
               <a:rPr lang="fr-FR" smtClean="0"/>
-              <a:t>17/04/2026</a:t>
+              <a:t>18/04/2026</a:t>
             </a:fld>
             <a:endParaRPr lang="fr-FR"/>
           </a:p>
@@ -638,6 +638,90 @@
 </p:notes>
 </file>
 
+<file path=ppt/notesSlides/notesSlide3.xml><?xml version="1.0" encoding="utf-8"?>
+<p:notes xmlns:a="http://schemas.openxmlformats.org/drawingml/2006/main" xmlns:r="http://schemas.openxmlformats.org/officeDocument/2006/relationships" xmlns:p="http://schemas.openxmlformats.org/presentationml/2006/main">
+  <p:cSld>
+    <p:spTree>
+      <p:nvGrpSpPr>
+        <p:cNvPr id="1" name=""/>
+        <p:cNvGrpSpPr/>
+        <p:nvPr/>
+      </p:nvGrpSpPr>
+      <p:grpSpPr>
+        <a:xfrm>
+          <a:off x="0" y="0"/>
+          <a:ext cx="0" cy="0"/>
+          <a:chOff x="0" y="0"/>
+          <a:chExt cx="0" cy="0"/>
+        </a:xfrm>
+      </p:grpSpPr>
+      <p:sp>
+        <p:nvSpPr>
+          <p:cNvPr id="2" name="Espace réservé de l'image des diapositives 1"/>
+          <p:cNvSpPr>
+            <a:spLocks noGrp="1" noRot="1" noChangeAspect="1"/>
+          </p:cNvSpPr>
+          <p:nvPr>
+            <p:ph type="sldImg"/>
+          </p:nvPr>
+        </p:nvSpPr>
+        <p:spPr/>
+      </p:sp>
+      <p:sp>
+        <p:nvSpPr>
+          <p:cNvPr id="3" name="Espace réservé des notes 2"/>
+          <p:cNvSpPr>
+            <a:spLocks noGrp="1"/>
+          </p:cNvSpPr>
+          <p:nvPr>
+            <p:ph type="body" idx="1"/>
+          </p:nvPr>
+        </p:nvSpPr>
+        <p:spPr/>
+        <p:txBody>
+          <a:bodyPr/>
+          <a:lstStyle/>
+          <a:p>
+            <a:endParaRPr lang="fr-FR" dirty="0"/>
+          </a:p>
+        </p:txBody>
+      </p:sp>
+      <p:sp>
+        <p:nvSpPr>
+          <p:cNvPr id="4" name="Espace réservé du numéro de diapositive 3"/>
+          <p:cNvSpPr>
+            <a:spLocks noGrp="1"/>
+          </p:cNvSpPr>
+          <p:nvPr>
+            <p:ph type="sldNum" sz="quarter" idx="5"/>
+          </p:nvPr>
+        </p:nvSpPr>
+        <p:spPr/>
+        <p:txBody>
+          <a:bodyPr/>
+          <a:lstStyle/>
+          <a:p>
+            <a:fld id="{D3B0DD9D-2173-49B3-B084-704F33D21705}" type="slidenum">
+              <a:rPr lang="fr-FR" smtClean="0"/>
+              <a:t>6</a:t>
+            </a:fld>
+            <a:endParaRPr lang="fr-FR"/>
+          </a:p>
+        </p:txBody>
+      </p:sp>
+    </p:spTree>
+    <p:extLst>
+      <p:ext uri="{BB962C8B-B14F-4D97-AF65-F5344CB8AC3E}">
+        <p14:creationId xmlns:p14="http://schemas.microsoft.com/office/powerpoint/2010/main" val="3726237277"/>
+      </p:ext>
+    </p:extLst>
+  </p:cSld>
+  <p:clrMapOvr>
+    <a:masterClrMapping/>
+  </p:clrMapOvr>
+</p:notes>
+</file>
+
 <file path=ppt/slideLayouts/slideLayout1.xml><?xml version="1.0" encoding="utf-8"?>
 <p:sldLayout xmlns:a="http://schemas.openxmlformats.org/drawingml/2006/main" xmlns:r="http://schemas.openxmlformats.org/officeDocument/2006/relationships" xmlns:p="http://schemas.openxmlformats.org/presentationml/2006/main" type="title" preserve="1">
   <p:cSld name="Diapositive de titre">
@@ -785,7 +869,7 @@
           <a:p>
             <a:fld id="{588505E2-0C4C-443F-8F57-41958F504CA2}" type="datetimeFigureOut">
               <a:rPr lang="fr-FR" smtClean="0"/>
-              <a:t>17/04/2026</a:t>
+              <a:t>18/04/2026</a:t>
             </a:fld>
             <a:endParaRPr lang="fr-FR"/>
           </a:p>
@@ -983,7 +1067,7 @@
           <a:p>
             <a:fld id="{588505E2-0C4C-443F-8F57-41958F504CA2}" type="datetimeFigureOut">
               <a:rPr lang="fr-FR" smtClean="0"/>
-              <a:t>17/04/2026</a:t>
+              <a:t>18/04/2026</a:t>
             </a:fld>
             <a:endParaRPr lang="fr-FR"/>
           </a:p>
@@ -1191,7 +1275,7 @@
           <a:p>
             <a:fld id="{588505E2-0C4C-443F-8F57-41958F504CA2}" type="datetimeFigureOut">
               <a:rPr lang="fr-FR" smtClean="0"/>
-              <a:t>17/04/2026</a:t>
+              <a:t>18/04/2026</a:t>
             </a:fld>
             <a:endParaRPr lang="fr-FR"/>
           </a:p>
@@ -1389,7 +1473,7 @@
           <a:p>
             <a:fld id="{588505E2-0C4C-443F-8F57-41958F504CA2}" type="datetimeFigureOut">
               <a:rPr lang="fr-FR" smtClean="0"/>
-              <a:t>17/04/2026</a:t>
+              <a:t>18/04/2026</a:t>
             </a:fld>
             <a:endParaRPr lang="fr-FR"/>
           </a:p>
@@ -1664,7 +1748,7 @@
           <a:p>
             <a:fld id="{588505E2-0C4C-443F-8F57-41958F504CA2}" type="datetimeFigureOut">
               <a:rPr lang="fr-FR" smtClean="0"/>
-              <a:t>17/04/2026</a:t>
+              <a:t>18/04/2026</a:t>
             </a:fld>
             <a:endParaRPr lang="fr-FR"/>
           </a:p>
@@ -1929,7 +2013,7 @@
           <a:p>
             <a:fld id="{588505E2-0C4C-443F-8F57-41958F504CA2}" type="datetimeFigureOut">
               <a:rPr lang="fr-FR" smtClean="0"/>
-              <a:t>17/04/2026</a:t>
+              <a:t>18/04/2026</a:t>
             </a:fld>
             <a:endParaRPr lang="fr-FR"/>
           </a:p>
@@ -2341,7 +2425,7 @@
           <a:p>
             <a:fld id="{588505E2-0C4C-443F-8F57-41958F504CA2}" type="datetimeFigureOut">
               <a:rPr lang="fr-FR" smtClean="0"/>
-              <a:t>17/04/2026</a:t>
+              <a:t>18/04/2026</a:t>
             </a:fld>
             <a:endParaRPr lang="fr-FR"/>
           </a:p>
@@ -2482,7 +2566,7 @@
           <a:p>
             <a:fld id="{588505E2-0C4C-443F-8F57-41958F504CA2}" type="datetimeFigureOut">
               <a:rPr lang="fr-FR" smtClean="0"/>
-              <a:t>17/04/2026</a:t>
+              <a:t>18/04/2026</a:t>
             </a:fld>
             <a:endParaRPr lang="fr-FR"/>
           </a:p>
@@ -2595,7 +2679,7 @@
           <a:p>
             <a:fld id="{588505E2-0C4C-443F-8F57-41958F504CA2}" type="datetimeFigureOut">
               <a:rPr lang="fr-FR" smtClean="0"/>
-              <a:t>17/04/2026</a:t>
+              <a:t>18/04/2026</a:t>
             </a:fld>
             <a:endParaRPr lang="fr-FR"/>
           </a:p>
@@ -2906,7 +2990,7 @@
           <a:p>
             <a:fld id="{588505E2-0C4C-443F-8F57-41958F504CA2}" type="datetimeFigureOut">
               <a:rPr lang="fr-FR" smtClean="0"/>
-              <a:t>17/04/2026</a:t>
+              <a:t>18/04/2026</a:t>
             </a:fld>
             <a:endParaRPr lang="fr-FR"/>
           </a:p>
@@ -3194,7 +3278,7 @@
           <a:p>
             <a:fld id="{588505E2-0C4C-443F-8F57-41958F504CA2}" type="datetimeFigureOut">
               <a:rPr lang="fr-FR" smtClean="0"/>
-              <a:t>17/04/2026</a:t>
+              <a:t>18/04/2026</a:t>
             </a:fld>
             <a:endParaRPr lang="fr-FR"/>
           </a:p>
@@ -3435,7 +3519,7 @@
           <a:p>
             <a:fld id="{588505E2-0C4C-443F-8F57-41958F504CA2}" type="datetimeFigureOut">
               <a:rPr lang="fr-FR" smtClean="0"/>
-              <a:t>17/04/2026</a:t>
+              <a:t>18/04/2026</a:t>
             </a:fld>
             <a:endParaRPr lang="fr-FR"/>
           </a:p>
@@ -6239,10 +6323,10 @@
       </p:grpSp>
       <p:grpSp>
         <p:nvGrpSpPr>
-          <p:cNvPr id="13" name="Groupe 12">
+          <p:cNvPr id="19" name="Groupe 18">
             <a:extLst>
               <a:ext uri="{FF2B5EF4-FFF2-40B4-BE49-F238E27FC236}">
-                <a16:creationId xmlns:a16="http://schemas.microsoft.com/office/drawing/2014/main" id="{1CCB6775-8B51-D13F-E939-7B7902CC35E2}"/>
+                <a16:creationId xmlns:a16="http://schemas.microsoft.com/office/drawing/2014/main" id="{03089565-D921-A13C-5E53-2043696ED554}"/>
               </a:ext>
             </a:extLst>
           </p:cNvPr>
@@ -6253,7 +6337,7 @@
           <a:xfrm>
             <a:off x="6727546" y="846176"/>
             <a:ext cx="2124000" cy="3312000"/>
-            <a:chOff x="6981743" y="846176"/>
+            <a:chOff x="6727546" y="846176"/>
             <a:chExt cx="2124000" cy="3312000"/>
           </a:xfrm>
         </p:grpSpPr>
@@ -6271,7 +6355,7 @@
           </p:nvSpPr>
           <p:spPr>
             <a:xfrm>
-              <a:off x="6981743" y="846176"/>
+              <a:off x="6727546" y="846176"/>
               <a:ext cx="2124000" cy="3312000"/>
             </a:xfrm>
             <a:prstGeom prst="rect">
@@ -6324,7 +6408,7 @@
           </p:nvSpPr>
           <p:spPr>
             <a:xfrm>
-              <a:off x="7062485" y="3676934"/>
+              <a:off x="6808288" y="3676934"/>
               <a:ext cx="360000" cy="360000"/>
             </a:xfrm>
             <a:prstGeom prst="donut">
@@ -6386,7 +6470,7 @@
           </p:nvSpPr>
           <p:spPr>
             <a:xfrm rot="5400000">
-              <a:off x="8121280" y="3084940"/>
+              <a:off x="7867083" y="3084940"/>
               <a:ext cx="396000" cy="360000"/>
             </a:xfrm>
             <a:prstGeom prst="hexagon">
@@ -6453,7 +6537,7 @@
           </p:nvSpPr>
           <p:spPr>
             <a:xfrm rot="5400000">
-              <a:off x="7698639" y="3083335"/>
+              <a:off x="7444442" y="3083335"/>
               <a:ext cx="396000" cy="360000"/>
             </a:xfrm>
             <a:prstGeom prst="hexagon">
@@ -6509,7 +6593,7 @@
           </p:nvCxnSpPr>
           <p:spPr>
             <a:xfrm>
-              <a:off x="7895015" y="3256231"/>
+              <a:off x="7640818" y="3256231"/>
               <a:ext cx="481421" cy="12683"/>
             </a:xfrm>
             <a:prstGeom prst="straightConnector1">
@@ -6548,7 +6632,7 @@
           </p:nvSpPr>
           <p:spPr>
             <a:xfrm>
-              <a:off x="7167614" y="1389077"/>
+              <a:off x="6913417" y="1389077"/>
               <a:ext cx="1818049" cy="369332"/>
             </a:xfrm>
             <a:prstGeom prst="rect">
@@ -6617,7 +6701,7 @@
           </p:blipFill>
           <p:spPr>
             <a:xfrm>
-              <a:off x="7150124" y="1825443"/>
+              <a:off x="6895927" y="1825443"/>
               <a:ext cx="1133030" cy="981962"/>
             </a:xfrm>
             <a:prstGeom prst="rect">
@@ -6639,7 +6723,7 @@
           </p:nvSpPr>
           <p:spPr>
             <a:xfrm>
-              <a:off x="8362282" y="1841910"/>
+              <a:off x="8108085" y="1841910"/>
               <a:ext cx="622921" cy="738664"/>
             </a:xfrm>
             <a:prstGeom prst="rect">
@@ -6682,7 +6766,7 @@
           </p:nvSpPr>
           <p:spPr>
             <a:xfrm>
-              <a:off x="6981743" y="846176"/>
+              <a:off x="6727546" y="846176"/>
               <a:ext cx="432000" cy="432000"/>
             </a:xfrm>
             <a:prstGeom prst="rect">
@@ -6754,7 +6838,7 @@
           </p:nvSpPr>
           <p:spPr>
             <a:xfrm>
-              <a:off x="7413743" y="846176"/>
+              <a:off x="7159546" y="846176"/>
               <a:ext cx="1260000" cy="432000"/>
             </a:xfrm>
             <a:prstGeom prst="rect">
@@ -6825,7 +6909,7 @@
           </p:nvSpPr>
           <p:spPr>
             <a:xfrm>
-              <a:off x="8673743" y="846176"/>
+              <a:off x="8419546" y="846176"/>
               <a:ext cx="432000" cy="432000"/>
             </a:xfrm>
             <a:prstGeom prst="rect">
@@ -17072,7 +17156,7 @@
               <a:avLst/>
             </a:prstGeom>
             <a:blipFill dpi="0" rotWithShape="1">
-              <a:blip r:embed="rId2">
+              <a:blip r:embed="rId3">
                 <a:alphaModFix amt="90000"/>
               </a:blip>
               <a:srcRect/>
@@ -17125,11 +17209,11 @@
               <a:avLst/>
             </a:prstGeom>
             <a:blipFill dpi="0" rotWithShape="1">
-              <a:blip r:embed="rId3">
+              <a:blip r:embed="rId4">
                 <a:extLst>
                   <a:ext uri="{BEBA8EAE-BF5A-486C-A8C5-ECC9F3942E4B}">
                     <a14:imgProps xmlns:a14="http://schemas.microsoft.com/office/drawing/2010/main">
-                      <a14:imgLayer r:embed="rId4">
+                      <a14:imgLayer r:embed="rId5">
                         <a14:imgEffect>
                           <a14:artisticWatercolorSponge/>
                         </a14:imgEffect>
@@ -17290,11 +17374,11 @@
               <a:avLst/>
             </a:prstGeom>
             <a:blipFill>
-              <a:blip r:embed="rId5">
+              <a:blip r:embed="rId6">
                 <a:extLst>
                   <a:ext uri="{BEBA8EAE-BF5A-486C-A8C5-ECC9F3942E4B}">
                     <a14:imgProps xmlns:a14="http://schemas.microsoft.com/office/drawing/2010/main">
-                      <a14:imgLayer r:embed="rId6">
+                      <a14:imgLayer r:embed="rId7">
                         <a14:imgEffect>
                           <a14:brightnessContrast bright="-20000" contrast="-40000"/>
                         </a14:imgEffect>
@@ -17357,11 +17441,11 @@
               <a:avLst/>
             </a:prstGeom>
             <a:blipFill>
-              <a:blip r:embed="rId5">
+              <a:blip r:embed="rId6">
                 <a:extLst>
                   <a:ext uri="{BEBA8EAE-BF5A-486C-A8C5-ECC9F3942E4B}">
                     <a14:imgProps xmlns:a14="http://schemas.microsoft.com/office/drawing/2010/main">
-                      <a14:imgLayer r:embed="rId6">
+                      <a14:imgLayer r:embed="rId7">
                         <a14:imgEffect>
                           <a14:brightnessContrast bright="-20000" contrast="-40000"/>
                         </a14:imgEffect>
@@ -17424,7 +17508,7 @@
               <a:avLst/>
             </a:prstGeom>
             <a:blipFill>
-              <a:blip r:embed="rId7"/>
+              <a:blip r:embed="rId8"/>
               <a:tile tx="0" ty="0" sx="100000" sy="100000" flip="none" algn="tl"/>
             </a:blipFill>
             <a:ln w="12700">
@@ -17544,7 +17628,7 @@
             <a:blip>
               <a:extLst>
                 <a:ext uri="{96DAC541-7B7A-43D3-8B79-37D633B846F1}">
-                  <asvg:svgBlip xmlns:asvg="http://schemas.microsoft.com/office/drawing/2016/SVG/main" r:embed="rId8"/>
+                  <asvg:svgBlip xmlns:asvg="http://schemas.microsoft.com/office/drawing/2016/SVG/main" r:embed="rId9"/>
                 </a:ext>
               </a:extLst>
             </a:blip>
@@ -17605,7 +17689,7 @@
               <a:avLst/>
             </a:prstGeom>
             <a:blipFill dpi="0" rotWithShape="1">
-              <a:blip r:embed="rId2">
+              <a:blip r:embed="rId3">
                 <a:alphaModFix amt="90000"/>
               </a:blip>
               <a:srcRect/>
@@ -17658,11 +17742,11 @@
               <a:avLst/>
             </a:prstGeom>
             <a:blipFill dpi="0" rotWithShape="1">
-              <a:blip r:embed="rId3">
+              <a:blip r:embed="rId4">
                 <a:extLst>
                   <a:ext uri="{BEBA8EAE-BF5A-486C-A8C5-ECC9F3942E4B}">
                     <a14:imgProps xmlns:a14="http://schemas.microsoft.com/office/drawing/2010/main">
-                      <a14:imgLayer r:embed="rId4">
+                      <a14:imgLayer r:embed="rId5">
                         <a14:imgEffect>
                           <a14:artisticWatercolorSponge/>
                         </a14:imgEffect>
@@ -17782,11 +17866,11 @@
               <a:avLst/>
             </a:prstGeom>
             <a:blipFill>
-              <a:blip r:embed="rId5">
+              <a:blip r:embed="rId6">
                 <a:extLst>
                   <a:ext uri="{BEBA8EAE-BF5A-486C-A8C5-ECC9F3942E4B}">
                     <a14:imgProps xmlns:a14="http://schemas.microsoft.com/office/drawing/2010/main">
-                      <a14:imgLayer r:embed="rId6">
+                      <a14:imgLayer r:embed="rId7">
                         <a14:imgEffect>
                           <a14:brightnessContrast bright="-20000" contrast="-40000"/>
                         </a14:imgEffect>
@@ -17849,7 +17933,7 @@
               <a:avLst/>
             </a:prstGeom>
             <a:blipFill>
-              <a:blip r:embed="rId7"/>
+              <a:blip r:embed="rId8"/>
               <a:tile tx="0" ty="0" sx="100000" sy="100000" flip="none" algn="tl"/>
             </a:blipFill>
             <a:ln w="12700">
@@ -17904,7 +17988,7 @@
               <a:avLst/>
             </a:prstGeom>
             <a:blipFill>
-              <a:blip r:embed="rId7"/>
+              <a:blip r:embed="rId8"/>
               <a:tile tx="0" ty="0" sx="100000" sy="100000" flip="none" algn="tl"/>
             </a:blipFill>
             <a:ln w="12700">
@@ -17959,7 +18043,7 @@
               <a:avLst/>
             </a:prstGeom>
             <a:blipFill>
-              <a:blip r:embed="rId7"/>
+              <a:blip r:embed="rId8"/>
               <a:tile tx="0" ty="0" sx="100000" sy="100000" flip="none" algn="tl"/>
             </a:blipFill>
             <a:ln w="12700">
@@ -18014,11 +18098,11 @@
               <a:avLst/>
             </a:prstGeom>
             <a:blipFill>
-              <a:blip r:embed="rId5">
+              <a:blip r:embed="rId6">
                 <a:extLst>
                   <a:ext uri="{BEBA8EAE-BF5A-486C-A8C5-ECC9F3942E4B}">
                     <a14:imgProps xmlns:a14="http://schemas.microsoft.com/office/drawing/2010/main">
-                      <a14:imgLayer r:embed="rId6">
+                      <a14:imgLayer r:embed="rId7">
                         <a14:imgEffect>
                           <a14:brightnessContrast bright="-20000" contrast="-40000"/>
                         </a14:imgEffect>
@@ -18221,7 +18305,7 @@
             <a:blip>
               <a:extLst>
                 <a:ext uri="{96DAC541-7B7A-43D3-8B79-37D633B846F1}">
-                  <asvg:svgBlip xmlns:asvg="http://schemas.microsoft.com/office/drawing/2016/SVG/main" r:embed="rId8"/>
+                  <asvg:svgBlip xmlns:asvg="http://schemas.microsoft.com/office/drawing/2016/SVG/main" r:embed="rId9"/>
                 </a:ext>
               </a:extLst>
             </a:blip>
@@ -18282,7 +18366,7 @@
               <a:avLst/>
             </a:prstGeom>
             <a:blipFill dpi="0" rotWithShape="1">
-              <a:blip r:embed="rId2">
+              <a:blip r:embed="rId3">
                 <a:alphaModFix amt="90000"/>
               </a:blip>
               <a:srcRect/>
@@ -18335,11 +18419,11 @@
               <a:avLst/>
             </a:prstGeom>
             <a:blipFill dpi="0" rotWithShape="1">
-              <a:blip r:embed="rId3">
+              <a:blip r:embed="rId4">
                 <a:extLst>
                   <a:ext uri="{BEBA8EAE-BF5A-486C-A8C5-ECC9F3942E4B}">
                     <a14:imgProps xmlns:a14="http://schemas.microsoft.com/office/drawing/2010/main">
-                      <a14:imgLayer r:embed="rId4">
+                      <a14:imgLayer r:embed="rId5">
                         <a14:imgEffect>
                           <a14:artisticWatercolorSponge/>
                         </a14:imgEffect>
@@ -18459,11 +18543,11 @@
               <a:avLst/>
             </a:prstGeom>
             <a:blipFill>
-              <a:blip r:embed="rId5">
+              <a:blip r:embed="rId6">
                 <a:extLst>
                   <a:ext uri="{BEBA8EAE-BF5A-486C-A8C5-ECC9F3942E4B}">
                     <a14:imgProps xmlns:a14="http://schemas.microsoft.com/office/drawing/2010/main">
-                      <a14:imgLayer r:embed="rId6">
+                      <a14:imgLayer r:embed="rId7">
                         <a14:imgEffect>
                           <a14:brightnessContrast bright="-20000" contrast="-40000"/>
                         </a14:imgEffect>
@@ -18526,7 +18610,7 @@
               <a:avLst/>
             </a:prstGeom>
             <a:blipFill>
-              <a:blip r:embed="rId7"/>
+              <a:blip r:embed="rId8"/>
               <a:tile tx="0" ty="0" sx="100000" sy="100000" flip="none" algn="tl"/>
             </a:blipFill>
             <a:ln w="12700">
@@ -18581,7 +18665,7 @@
               <a:avLst/>
             </a:prstGeom>
             <a:blipFill>
-              <a:blip r:embed="rId7"/>
+              <a:blip r:embed="rId8"/>
               <a:tile tx="0" ty="0" sx="100000" sy="100000" flip="none" algn="tl"/>
             </a:blipFill>
             <a:ln w="12700">
@@ -18636,7 +18720,7 @@
               <a:avLst/>
             </a:prstGeom>
             <a:blipFill>
-              <a:blip r:embed="rId7"/>
+              <a:blip r:embed="rId8"/>
               <a:tile tx="0" ty="0" sx="100000" sy="100000" flip="none" algn="tl"/>
             </a:blipFill>
             <a:ln w="12700">
@@ -18691,11 +18775,11 @@
               <a:avLst/>
             </a:prstGeom>
             <a:blipFill>
-              <a:blip r:embed="rId5">
+              <a:blip r:embed="rId6">
                 <a:extLst>
                   <a:ext uri="{BEBA8EAE-BF5A-486C-A8C5-ECC9F3942E4B}">
                     <a14:imgProps xmlns:a14="http://schemas.microsoft.com/office/drawing/2010/main">
-                      <a14:imgLayer r:embed="rId6">
+                      <a14:imgLayer r:embed="rId7">
                         <a14:imgEffect>
                           <a14:brightnessContrast bright="-20000" contrast="-40000"/>
                         </a14:imgEffect>
@@ -18918,7 +19002,7 @@
             <a:blip>
               <a:extLst>
                 <a:ext uri="{96DAC541-7B7A-43D3-8B79-37D633B846F1}">
-                  <asvg:svgBlip xmlns:asvg="http://schemas.microsoft.com/office/drawing/2016/SVG/main" r:embed="rId8"/>
+                  <asvg:svgBlip xmlns:asvg="http://schemas.microsoft.com/office/drawing/2016/SVG/main" r:embed="rId9"/>
                 </a:ext>
               </a:extLst>
             </a:blip>
